--- a/data/prezentacja/Triangulacja_wielokata_prostego.pptx
+++ b/data/prezentacja/Triangulacja_wielokata_prostego.pptx
@@ -147,6 +147,7 @@
 <p1510:revInfo xmlns:a="http://schemas.openxmlformats.org/drawingml/2006/main" xmlns:r="http://schemas.openxmlformats.org/officeDocument/2006/relationships" xmlns:p1510="http://schemas.microsoft.com/office/powerpoint/2015/10/main">
   <p1510:revLst>
     <p1510:client id="{CAC0B421-687E-48BE-9161-5EDA0FB3AB77}" v="36" dt="2024-01-02T22:52:35.755"/>
+    <p1510:client id="{DCFA052C-74AC-4E45-A38F-AC8C9516762B}" v="104" dt="2024-01-02T23:55:47.572"/>
     <p1510:client id="{E964FB2E-9597-47EC-A3A3-C11CAC6719C4}" v="345" dt="2024-01-02T23:45:23.557"/>
   </p1510:revLst>
 </p1510:revInfo>
@@ -1777,7 +1778,7 @@
         <a:lstStyle/>
         <a:p>
           <a:r>
-            <a:rPr lang="pl-PL" dirty="0"/>
+            <a:rPr lang="pl-PL"/>
             <a:t>3. Usuwanie trójkątów zewnętrznych</a:t>
           </a:r>
         </a:p>
@@ -2513,7 +2514,7 @@
             <a:buNone/>
           </a:pPr>
           <a:r>
-            <a:rPr lang="pl-PL" sz="2600" kern="1200" dirty="0"/>
+            <a:rPr lang="pl-PL" sz="2600" kern="1200"/>
             <a:t>3. Usuwanie trójkątów zewnętrznych</a:t>
           </a:r>
         </a:p>
@@ -5671,7 +5672,7 @@
               <a:rPr lang="en-US" smtClean="0"/>
               <a:t>1/2/2024</a:t>
             </a:fld>
-            <a:endParaRPr lang="en-US" dirty="0"/>
+            <a:endParaRPr lang="en-US"/>
           </a:p>
         </p:txBody>
       </p:sp>
@@ -5700,7 +5701,6 @@
               <a:rPr lang="en-US"/>
               <a:t>Sample Footer Text</a:t>
             </a:r>
-            <a:endParaRPr lang="en-US" dirty="0"/>
           </a:p>
         </p:txBody>
       </p:sp>
@@ -5730,7 +5730,7 @@
               <a:pPr/>
               <a:t>‹#›</a:t>
             </a:fld>
-            <a:endParaRPr lang="en-US" dirty="0"/>
+            <a:endParaRPr lang="en-US"/>
           </a:p>
         </p:txBody>
       </p:sp>
@@ -5874,7 +5874,7 @@
               <a:rPr lang="en-US" smtClean="0"/>
               <a:t>1/2/2024</a:t>
             </a:fld>
-            <a:endParaRPr lang="en-US" dirty="0"/>
+            <a:endParaRPr lang="en-US"/>
           </a:p>
         </p:txBody>
       </p:sp>
@@ -5903,7 +5903,6 @@
               <a:rPr lang="en-US"/>
               <a:t>Sample Footer Text</a:t>
             </a:r>
-            <a:endParaRPr lang="en-US" dirty="0"/>
           </a:p>
         </p:txBody>
       </p:sp>
@@ -5933,7 +5932,7 @@
               <a:pPr/>
               <a:t>‹#›</a:t>
             </a:fld>
-            <a:endParaRPr lang="en-US" dirty="0"/>
+            <a:endParaRPr lang="en-US"/>
           </a:p>
         </p:txBody>
       </p:sp>
@@ -6087,7 +6086,7 @@
               <a:rPr lang="en-US" smtClean="0"/>
               <a:t>1/2/2024</a:t>
             </a:fld>
-            <a:endParaRPr lang="en-US" dirty="0"/>
+            <a:endParaRPr lang="en-US"/>
           </a:p>
         </p:txBody>
       </p:sp>
@@ -6116,7 +6115,6 @@
               <a:rPr lang="en-US"/>
               <a:t>Sample Footer Text</a:t>
             </a:r>
-            <a:endParaRPr lang="en-US" dirty="0"/>
           </a:p>
         </p:txBody>
       </p:sp>
@@ -6146,7 +6144,7 @@
               <a:pPr/>
               <a:t>‹#›</a:t>
             </a:fld>
-            <a:endParaRPr lang="en-US" dirty="0"/>
+            <a:endParaRPr lang="en-US"/>
           </a:p>
         </p:txBody>
       </p:sp>
@@ -6273,7 +6271,6 @@
               <a:rPr lang="en-US"/>
               <a:t>Fifth level</a:t>
             </a:r>
-            <a:endParaRPr lang="en-US" dirty="0"/>
           </a:p>
         </p:txBody>
       </p:sp>
@@ -6302,7 +6299,7 @@
               <a:rPr lang="en-US" smtClean="0"/>
               <a:t>1/2/2024</a:t>
             </a:fld>
-            <a:endParaRPr lang="en-US" dirty="0"/>
+            <a:endParaRPr lang="en-US"/>
           </a:p>
         </p:txBody>
       </p:sp>
@@ -6331,7 +6328,6 @@
               <a:rPr lang="en-US"/>
               <a:t>Sample Footer Text</a:t>
             </a:r>
-            <a:endParaRPr lang="en-US" dirty="0"/>
           </a:p>
         </p:txBody>
       </p:sp>
@@ -6361,7 +6357,7 @@
               <a:pPr/>
               <a:t>‹#›</a:t>
             </a:fld>
-            <a:endParaRPr lang="en-US" dirty="0"/>
+            <a:endParaRPr lang="en-US"/>
           </a:p>
         </p:txBody>
       </p:sp>
@@ -6582,7 +6578,7 @@
               <a:rPr lang="en-US" smtClean="0"/>
               <a:t>1/2/2024</a:t>
             </a:fld>
-            <a:endParaRPr lang="en-US" dirty="0"/>
+            <a:endParaRPr lang="en-US"/>
           </a:p>
         </p:txBody>
       </p:sp>
@@ -6611,7 +6607,6 @@
               <a:rPr lang="en-US"/>
               <a:t>Sample Footer Text</a:t>
             </a:r>
-            <a:endParaRPr lang="en-US" dirty="0"/>
           </a:p>
         </p:txBody>
       </p:sp>
@@ -6641,7 +6636,7 @@
               <a:pPr/>
               <a:t>‹#›</a:t>
             </a:fld>
-            <a:endParaRPr lang="en-US" dirty="0"/>
+            <a:endParaRPr lang="en-US"/>
           </a:p>
         </p:txBody>
       </p:sp>
@@ -6852,7 +6847,7 @@
               <a:rPr lang="en-US" smtClean="0"/>
               <a:t>1/2/2024</a:t>
             </a:fld>
-            <a:endParaRPr lang="en-US" dirty="0"/>
+            <a:endParaRPr lang="en-US"/>
           </a:p>
         </p:txBody>
       </p:sp>
@@ -6881,7 +6876,6 @@
               <a:rPr lang="en-US"/>
               <a:t>Sample Footer Text</a:t>
             </a:r>
-            <a:endParaRPr lang="en-US" dirty="0"/>
           </a:p>
         </p:txBody>
       </p:sp>
@@ -6911,7 +6905,7 @@
               <a:pPr/>
               <a:t>‹#›</a:t>
             </a:fld>
-            <a:endParaRPr lang="en-US" dirty="0"/>
+            <a:endParaRPr lang="en-US"/>
           </a:p>
         </p:txBody>
       </p:sp>
@@ -7269,7 +7263,7 @@
               <a:rPr lang="en-US" smtClean="0"/>
               <a:t>1/2/2024</a:t>
             </a:fld>
-            <a:endParaRPr lang="en-US" dirty="0"/>
+            <a:endParaRPr lang="en-US"/>
           </a:p>
         </p:txBody>
       </p:sp>
@@ -7298,7 +7292,6 @@
               <a:rPr lang="en-US"/>
               <a:t>Sample Footer Text</a:t>
             </a:r>
-            <a:endParaRPr lang="en-US" dirty="0"/>
           </a:p>
         </p:txBody>
       </p:sp>
@@ -7328,7 +7321,7 @@
               <a:pPr/>
               <a:t>‹#›</a:t>
             </a:fld>
-            <a:endParaRPr lang="en-US" dirty="0"/>
+            <a:endParaRPr lang="en-US"/>
           </a:p>
         </p:txBody>
       </p:sp>
@@ -7415,7 +7408,7 @@
               <a:rPr lang="en-US" smtClean="0"/>
               <a:t>1/2/2024</a:t>
             </a:fld>
-            <a:endParaRPr lang="en-US" dirty="0"/>
+            <a:endParaRPr lang="en-US"/>
           </a:p>
         </p:txBody>
       </p:sp>
@@ -7444,7 +7437,6 @@
               <a:rPr lang="en-US"/>
               <a:t>Sample Footer Text</a:t>
             </a:r>
-            <a:endParaRPr lang="en-US" dirty="0"/>
           </a:p>
         </p:txBody>
       </p:sp>
@@ -7474,7 +7466,7 @@
               <a:pPr/>
               <a:t>‹#›</a:t>
             </a:fld>
-            <a:endParaRPr lang="en-US" dirty="0"/>
+            <a:endParaRPr lang="en-US"/>
           </a:p>
         </p:txBody>
       </p:sp>
@@ -7533,7 +7525,7 @@
               <a:rPr lang="en-US" smtClean="0"/>
               <a:t>1/2/2024</a:t>
             </a:fld>
-            <a:endParaRPr lang="en-US" dirty="0"/>
+            <a:endParaRPr lang="en-US"/>
           </a:p>
         </p:txBody>
       </p:sp>
@@ -7562,7 +7554,6 @@
               <a:rPr lang="en-US"/>
               <a:t>Sample Footer Text</a:t>
             </a:r>
-            <a:endParaRPr lang="en-US" dirty="0"/>
           </a:p>
         </p:txBody>
       </p:sp>
@@ -7592,7 +7583,7 @@
               <a:pPr/>
               <a:t>‹#›</a:t>
             </a:fld>
-            <a:endParaRPr lang="en-US" dirty="0"/>
+            <a:endParaRPr lang="en-US"/>
           </a:p>
         </p:txBody>
       </p:sp>
@@ -7849,7 +7840,7 @@
               <a:rPr lang="en-US" smtClean="0"/>
               <a:t>1/2/2024</a:t>
             </a:fld>
-            <a:endParaRPr lang="en-US" dirty="0"/>
+            <a:endParaRPr lang="en-US"/>
           </a:p>
         </p:txBody>
       </p:sp>
@@ -7878,7 +7869,6 @@
               <a:rPr lang="en-US"/>
               <a:t>Sample Footer Text</a:t>
             </a:r>
-            <a:endParaRPr lang="en-US" dirty="0"/>
           </a:p>
         </p:txBody>
       </p:sp>
@@ -7908,7 +7898,7 @@
               <a:pPr/>
               <a:t>‹#›</a:t>
             </a:fld>
-            <a:endParaRPr lang="en-US" dirty="0"/>
+            <a:endParaRPr lang="en-US"/>
           </a:p>
         </p:txBody>
       </p:sp>
@@ -8145,7 +8135,7 @@
               <a:rPr lang="en-US" smtClean="0"/>
               <a:t>1/2/2024</a:t>
             </a:fld>
-            <a:endParaRPr lang="en-US" dirty="0"/>
+            <a:endParaRPr lang="en-US"/>
           </a:p>
         </p:txBody>
       </p:sp>
@@ -8174,7 +8164,6 @@
               <a:rPr lang="en-US"/>
               <a:t>Sample Footer Text</a:t>
             </a:r>
-            <a:endParaRPr lang="en-US" dirty="0"/>
           </a:p>
         </p:txBody>
       </p:sp>
@@ -8204,7 +8193,7 @@
               <a:pPr/>
               <a:t>‹#›</a:t>
             </a:fld>
-            <a:endParaRPr lang="en-US" dirty="0"/>
+            <a:endParaRPr lang="en-US"/>
           </a:p>
         </p:txBody>
       </p:sp>
@@ -8471,7 +8460,7 @@
             <a:bodyPr rtlCol="0" anchor="ctr"/>
             <a:lstStyle/>
             <a:p>
-              <a:endParaRPr lang="en-US" dirty="0"/>
+              <a:endParaRPr lang="en-US"/>
             </a:p>
           </p:txBody>
         </p:sp>
@@ -8680,7 +8669,7 @@
             <a:bodyPr rtlCol="0" anchor="ctr"/>
             <a:lstStyle/>
             <a:p>
-              <a:endParaRPr lang="en-US" dirty="0"/>
+              <a:endParaRPr lang="en-US"/>
             </a:p>
           </p:txBody>
         </p:sp>
@@ -8889,7 +8878,7 @@
             <a:bodyPr rtlCol="0" anchor="ctr"/>
             <a:lstStyle/>
             <a:p>
-              <a:endParaRPr lang="en-US" dirty="0"/>
+              <a:endParaRPr lang="en-US"/>
             </a:p>
           </p:txBody>
         </p:sp>
@@ -9027,7 +9016,7 @@
             <a:bodyPr rtlCol="0" anchor="ctr"/>
             <a:lstStyle/>
             <a:p>
-              <a:endParaRPr lang="en-US" dirty="0"/>
+              <a:endParaRPr lang="en-US"/>
             </a:p>
           </p:txBody>
         </p:sp>
@@ -9067,7 +9056,6 @@
               <a:rPr lang="en-US"/>
               <a:t>Click to edit Master title style</a:t>
             </a:r>
-            <a:endParaRPr lang="en-US" dirty="0"/>
           </a:p>
         </p:txBody>
       </p:sp>
@@ -9135,7 +9123,6 @@
               <a:rPr lang="en-US"/>
               <a:t>Fifth level</a:t>
             </a:r>
-            <a:endParaRPr lang="en-US" dirty="0"/>
           </a:p>
         </p:txBody>
       </p:sp>
@@ -9182,7 +9169,7 @@
               <a:rPr lang="en-US" smtClean="0"/>
               <a:t>1/2/2024</a:t>
             </a:fld>
-            <a:endParaRPr lang="en-US" dirty="0"/>
+            <a:endParaRPr lang="en-US"/>
           </a:p>
         </p:txBody>
       </p:sp>
@@ -9229,7 +9216,6 @@
               <a:rPr lang="en-US"/>
               <a:t>Sample Footer Text</a:t>
             </a:r>
-            <a:endParaRPr lang="en-US" dirty="0"/>
           </a:p>
         </p:txBody>
       </p:sp>
@@ -9277,7 +9263,7 @@
               <a:pPr/>
               <a:t>‹#›</a:t>
             </a:fld>
-            <a:endParaRPr lang="en-US" dirty="0"/>
+            <a:endParaRPr lang="en-US"/>
           </a:p>
         </p:txBody>
       </p:sp>
@@ -9668,7 +9654,7 @@
           <a:bodyPr rtlCol="0" anchor="ctr"/>
           <a:lstStyle/>
           <a:p>
-            <a:endParaRPr lang="en-US" dirty="0">
+            <a:endParaRPr lang="en-US">
               <a:solidFill>
                 <a:schemeClr val="tx1"/>
               </a:solidFill>
@@ -9950,7 +9936,7 @@
             <a:bodyPr rtlCol="0" anchor="ctr"/>
             <a:lstStyle/>
             <a:p>
-              <a:endParaRPr lang="en-US" dirty="0"/>
+              <a:endParaRPr lang="en-US"/>
             </a:p>
           </p:txBody>
         </p:sp>
@@ -10005,7 +9991,7 @@
             <a:bodyPr rtlCol="0" anchor="ctr"/>
             <a:lstStyle/>
             <a:p>
-              <a:endParaRPr lang="en-US" dirty="0"/>
+              <a:endParaRPr lang="en-US"/>
             </a:p>
           </p:txBody>
         </p:sp>
@@ -10115,7 +10101,7 @@
             <a:bodyPr rtlCol="0" anchor="ctr"/>
             <a:lstStyle/>
             <a:p>
-              <a:endParaRPr lang="en-US" dirty="0"/>
+              <a:endParaRPr lang="en-US"/>
             </a:p>
           </p:txBody>
         </p:sp>
@@ -10167,7 +10153,7 @@
           <a:bodyPr rtlCol="0" anchor="ctr"/>
           <a:lstStyle/>
           <a:p>
-            <a:endParaRPr lang="en-US" dirty="0">
+            <a:endParaRPr lang="en-US">
               <a:solidFill>
                 <a:schemeClr val="tx1"/>
               </a:solidFill>
@@ -10204,7 +10190,7 @@
           <a:lstStyle/>
           <a:p>
             <a:r>
-              <a:rPr lang="pl-PL" b="1" dirty="0">
+              <a:rPr lang="pl-PL" b="1">
                 <a:latin typeface="Arial Black" panose="020B0A04020102020204" pitchFamily="34" charset="0"/>
               </a:rPr>
               <a:t>Triangulacja wielokąta prostego – porównanie metod</a:t>
@@ -10241,7 +10227,7 @@
           <a:lstStyle/>
           <a:p>
             <a:r>
-              <a:rPr lang="pl-PL" sz="2200" b="1" i="1" dirty="0">
+              <a:rPr lang="pl-PL" sz="2200" b="1" i="1">
                 <a:latin typeface="Arial Black" panose="020B0A04020102020204" pitchFamily="34" charset="0"/>
               </a:rPr>
               <a:t>Projekt nr 7</a:t>
@@ -10249,7 +10235,7 @@
           </a:p>
           <a:p>
             <a:r>
-              <a:rPr lang="pl-PL" sz="2200" b="1" i="1" dirty="0">
+              <a:rPr lang="pl-PL" sz="2200" b="1" i="1">
                 <a:latin typeface="Arial Black"/>
               </a:rPr>
               <a:t>Robert Mesek</a:t>
@@ -10257,7 +10243,7 @@
           </a:p>
           <a:p>
             <a:r>
-              <a:rPr lang="pl-PL" sz="2200" b="1" i="1" dirty="0">
+              <a:rPr lang="pl-PL" sz="2200" b="1" i="1">
                 <a:latin typeface="Arial Black" panose="020B0A04020102020204" pitchFamily="34" charset="0"/>
               </a:rPr>
               <a:t>Wojciech Kaźmierczak</a:t>
@@ -10265,7 +10251,7 @@
           </a:p>
           <a:p>
             <a:r>
-              <a:rPr lang="pl-PL" sz="2200" b="1" i="1" dirty="0">
+              <a:rPr lang="pl-PL" sz="2200" b="1" i="1">
                 <a:latin typeface="Arial Black" panose="020B0A04020102020204" pitchFamily="34" charset="0"/>
               </a:rPr>
               <a:t>Grupa 4</a:t>
@@ -10325,27 +10311,27 @@
           <a:lstStyle/>
           <a:p>
             <a:r>
-              <a:rPr lang="en-US" dirty="0" err="1">
+              <a:rPr lang="en-US" err="1">
                 <a:ea typeface="Open sans"/>
                 <a:cs typeface="Open sans"/>
               </a:rPr>
               <a:t>Wierzchołek</a:t>
             </a:r>
             <a:r>
-              <a:rPr lang="en-US" dirty="0">
+              <a:rPr lang="en-US">
                 <a:ea typeface="Open sans"/>
                 <a:cs typeface="Open sans"/>
               </a:rPr>
               <a:t> </a:t>
             </a:r>
             <a:r>
-              <a:rPr lang="en-US" dirty="0" err="1">
+              <a:rPr lang="en-US" err="1">
                 <a:ea typeface="Open sans"/>
                 <a:cs typeface="Open sans"/>
               </a:rPr>
               <a:t>łączący</a:t>
             </a:r>
-            <a:endParaRPr lang="en-US" dirty="0" err="1"/>
+            <a:endParaRPr lang="en-US" err="1"/>
           </a:p>
         </p:txBody>
       </p:sp>
@@ -10376,69 +10362,69 @@
               <a:buNone/>
             </a:pPr>
             <a:r>
-              <a:rPr lang="pl-PL" dirty="0">
+              <a:rPr lang="pl-PL">
                 <a:ea typeface="+mn-lt"/>
                 <a:cs typeface="+mn-lt"/>
               </a:rPr>
               <a:t>Pozostają jeszcze wierzchołki </a:t>
             </a:r>
             <a:r>
-              <a:rPr lang="pl-PL" dirty="0" err="1">
+              <a:rPr lang="pl-PL" err="1">
                 <a:ea typeface="+mn-lt"/>
                 <a:cs typeface="+mn-lt"/>
               </a:rPr>
               <a:t>v_i</a:t>
             </a:r>
             <a:r>
-              <a:rPr lang="pl-PL" dirty="0">
+              <a:rPr lang="pl-PL">
                 <a:ea typeface="+mn-lt"/>
                 <a:cs typeface="+mn-lt"/>
               </a:rPr>
               <a:t> łączące. Potrzebować one będą wierzchołków znajdujących się pod miotłą (jeszcze nie przetworzonych), ale będzie to dokładnie odwrócona sytuacja dla wierzchołka dzielącego. Za pomocnika(</a:t>
             </a:r>
             <a:r>
-              <a:rPr lang="pl-PL" dirty="0" err="1">
+              <a:rPr lang="pl-PL" err="1">
                 <a:ea typeface="+mn-lt"/>
                 <a:cs typeface="+mn-lt"/>
               </a:rPr>
               <a:t>v_i</a:t>
             </a:r>
             <a:r>
-              <a:rPr lang="pl-PL" dirty="0">
+              <a:rPr lang="pl-PL">
                 <a:ea typeface="+mn-lt"/>
                 <a:cs typeface="+mn-lt"/>
               </a:rPr>
               <a:t>), będziemy wybierać wierzchołek leżący pomiędzy </a:t>
             </a:r>
             <a:r>
-              <a:rPr lang="pl-PL" dirty="0" err="1">
+              <a:rPr lang="pl-PL" err="1">
                 <a:ea typeface="+mn-lt"/>
                 <a:cs typeface="+mn-lt"/>
               </a:rPr>
               <a:t>e_l</a:t>
             </a:r>
             <a:r>
-              <a:rPr lang="pl-PL" dirty="0">
+              <a:rPr lang="pl-PL">
                 <a:ea typeface="+mn-lt"/>
                 <a:cs typeface="+mn-lt"/>
               </a:rPr>
               <a:t> a </a:t>
             </a:r>
             <a:r>
-              <a:rPr lang="pl-PL" dirty="0" err="1">
+              <a:rPr lang="pl-PL" err="1">
                 <a:ea typeface="+mn-lt"/>
                 <a:cs typeface="+mn-lt"/>
               </a:rPr>
               <a:t>e_p</a:t>
             </a:r>
             <a:r>
-              <a:rPr lang="pl-PL" dirty="0">
+              <a:rPr lang="pl-PL">
                 <a:ea typeface="+mn-lt"/>
                 <a:cs typeface="+mn-lt"/>
               </a:rPr>
               <a:t>, znajdujący się najbliżej.</a:t>
             </a:r>
-            <a:endParaRPr lang="pl-PL" dirty="0">
+            <a:endParaRPr lang="pl-PL">
               <a:ea typeface="Open sans"/>
               <a:cs typeface="Open sans"/>
             </a:endParaRPr>
@@ -10728,7 +10714,7 @@
             <a:bodyPr rtlCol="0" anchor="ctr"/>
             <a:lstStyle/>
             <a:p>
-              <a:endParaRPr lang="en-US" dirty="0"/>
+              <a:endParaRPr lang="en-US"/>
             </a:p>
           </p:txBody>
         </p:sp>
@@ -10946,7 +10932,7 @@
             <a:bodyPr rtlCol="0" anchor="ctr"/>
             <a:lstStyle/>
             <a:p>
-              <a:endParaRPr lang="en-US" dirty="0"/>
+              <a:endParaRPr lang="en-US"/>
             </a:p>
           </p:txBody>
         </p:sp>
@@ -11164,7 +11150,7 @@
             <a:bodyPr rtlCol="0" anchor="ctr"/>
             <a:lstStyle/>
             <a:p>
-              <a:endParaRPr lang="en-US" dirty="0"/>
+              <a:endParaRPr lang="en-US"/>
             </a:p>
           </p:txBody>
         </p:sp>
@@ -11329,7 +11315,7 @@
             <a:bodyPr rtlCol="0" anchor="ctr"/>
             <a:lstStyle/>
             <a:p>
-              <a:endParaRPr lang="en-US" dirty="0"/>
+              <a:endParaRPr lang="en-US"/>
             </a:p>
           </p:txBody>
         </p:sp>
@@ -11376,7 +11362,7 @@
           <a:bodyPr rtlCol="0" anchor="ctr"/>
           <a:lstStyle/>
           <a:p>
-            <a:endParaRPr lang="en-US" dirty="0">
+            <a:endParaRPr lang="en-US">
               <a:solidFill>
                 <a:schemeClr val="tx1"/>
               </a:solidFill>
@@ -11431,7 +11417,7 @@
           <a:bodyPr rtlCol="0" anchor="ctr"/>
           <a:lstStyle/>
           <a:p>
-            <a:endParaRPr lang="en-US" dirty="0">
+            <a:endParaRPr lang="en-US">
               <a:solidFill>
                 <a:schemeClr val="tx1"/>
               </a:solidFill>
@@ -11739,7 +11725,7 @@
             <a:bodyPr rtlCol="0" anchor="ctr"/>
             <a:lstStyle/>
             <a:p>
-              <a:endParaRPr lang="en-US" dirty="0"/>
+              <a:endParaRPr lang="en-US"/>
             </a:p>
           </p:txBody>
         </p:sp>
@@ -12215,7 +12201,7 @@
             <a:bodyPr rtlCol="0" anchor="ctr"/>
             <a:lstStyle/>
             <a:p>
-              <a:endParaRPr lang="en-US" dirty="0"/>
+              <a:endParaRPr lang="en-US"/>
             </a:p>
           </p:txBody>
         </p:sp>
@@ -12433,7 +12419,7 @@
             <a:bodyPr rtlCol="0" anchor="ctr"/>
             <a:lstStyle/>
             <a:p>
-              <a:endParaRPr lang="en-US" dirty="0"/>
+              <a:endParaRPr lang="en-US"/>
             </a:p>
           </p:txBody>
         </p:sp>
@@ -12651,7 +12637,7 @@
             <a:bodyPr rtlCol="0" anchor="ctr"/>
             <a:lstStyle/>
             <a:p>
-              <a:endParaRPr lang="en-US" dirty="0"/>
+              <a:endParaRPr lang="en-US"/>
             </a:p>
           </p:txBody>
         </p:sp>
@@ -12816,7 +12802,7 @@
             <a:bodyPr rtlCol="0" anchor="ctr"/>
             <a:lstStyle/>
             <a:p>
-              <a:endParaRPr lang="en-US" dirty="0"/>
+              <a:endParaRPr lang="en-US"/>
             </a:p>
           </p:txBody>
         </p:sp>
@@ -12863,7 +12849,7 @@
           <a:bodyPr rtlCol="0" anchor="ctr"/>
           <a:lstStyle/>
           <a:p>
-            <a:endParaRPr lang="en-US" dirty="0">
+            <a:endParaRPr lang="en-US">
               <a:solidFill>
                 <a:schemeClr val="tx1"/>
               </a:solidFill>
@@ -12918,7 +12904,7 @@
           <a:bodyPr rtlCol="0" anchor="ctr"/>
           <a:lstStyle/>
           <a:p>
-            <a:endParaRPr lang="en-US" dirty="0">
+            <a:endParaRPr lang="en-US">
               <a:solidFill>
                 <a:schemeClr val="tx1"/>
               </a:solidFill>
@@ -13226,7 +13212,7 @@
             <a:bodyPr rtlCol="0" anchor="ctr"/>
             <a:lstStyle/>
             <a:p>
-              <a:endParaRPr lang="en-US" dirty="0"/>
+              <a:endParaRPr lang="en-US"/>
             </a:p>
           </p:txBody>
         </p:sp>
@@ -13473,111 +13459,111 @@
           <a:lstStyle/>
           <a:p>
             <a:r>
-              <a:rPr lang="en-US" dirty="0" err="1">
+              <a:rPr lang="en-US" err="1">
                 <a:ea typeface="+mj-lt"/>
                 <a:cs typeface="+mj-lt"/>
               </a:rPr>
               <a:t>Konwersja</a:t>
             </a:r>
             <a:r>
-              <a:rPr lang="en-US" dirty="0">
+              <a:rPr lang="en-US">
                 <a:ea typeface="+mj-lt"/>
                 <a:cs typeface="+mj-lt"/>
               </a:rPr>
               <a:t> </a:t>
             </a:r>
             <a:r>
-              <a:rPr lang="en-US" dirty="0" err="1">
+              <a:rPr lang="en-US" err="1">
                 <a:ea typeface="+mj-lt"/>
                 <a:cs typeface="+mj-lt"/>
               </a:rPr>
               <a:t>punktów</a:t>
             </a:r>
             <a:r>
-              <a:rPr lang="en-US" dirty="0">
+              <a:rPr lang="en-US">
                 <a:ea typeface="+mj-lt"/>
                 <a:cs typeface="+mj-lt"/>
               </a:rPr>
               <a:t> </a:t>
             </a:r>
             <a:r>
-              <a:rPr lang="en-US" dirty="0" err="1">
+              <a:rPr lang="en-US" err="1">
                 <a:ea typeface="+mj-lt"/>
                 <a:cs typeface="+mj-lt"/>
               </a:rPr>
               <a:t>i</a:t>
             </a:r>
             <a:r>
-              <a:rPr lang="en-US" dirty="0">
+              <a:rPr lang="en-US">
                 <a:ea typeface="+mj-lt"/>
                 <a:cs typeface="+mj-lt"/>
               </a:rPr>
               <a:t> </a:t>
             </a:r>
             <a:r>
-              <a:rPr lang="en-US" dirty="0" err="1">
+              <a:rPr lang="en-US" err="1">
                 <a:ea typeface="+mj-lt"/>
                 <a:cs typeface="+mj-lt"/>
               </a:rPr>
               <a:t>przekątnych</a:t>
             </a:r>
             <a:r>
-              <a:rPr lang="en-US" dirty="0">
+              <a:rPr lang="en-US">
                 <a:ea typeface="+mj-lt"/>
                 <a:cs typeface="+mj-lt"/>
               </a:rPr>
               <a:t> </a:t>
             </a:r>
             <a:r>
-              <a:rPr lang="en-US" dirty="0" err="1">
+              <a:rPr lang="en-US" err="1">
                 <a:ea typeface="+mj-lt"/>
                 <a:cs typeface="+mj-lt"/>
               </a:rPr>
               <a:t>na</a:t>
             </a:r>
             <a:r>
-              <a:rPr lang="en-US" dirty="0">
+              <a:rPr lang="en-US">
                 <a:ea typeface="+mj-lt"/>
                 <a:cs typeface="+mj-lt"/>
               </a:rPr>
               <a:t> </a:t>
             </a:r>
             <a:r>
-              <a:rPr lang="en-US" dirty="0" err="1">
+              <a:rPr lang="en-US" err="1">
                 <a:ea typeface="+mj-lt"/>
                 <a:cs typeface="+mj-lt"/>
               </a:rPr>
               <a:t>poszczególne</a:t>
             </a:r>
             <a:r>
-              <a:rPr lang="en-US" dirty="0">
+              <a:rPr lang="en-US">
                 <a:ea typeface="+mj-lt"/>
                 <a:cs typeface="+mj-lt"/>
               </a:rPr>
               <a:t> </a:t>
             </a:r>
             <a:r>
-              <a:rPr lang="en-US" dirty="0" err="1">
+              <a:rPr lang="en-US" err="1">
                 <a:ea typeface="+mj-lt"/>
                 <a:cs typeface="+mj-lt"/>
               </a:rPr>
               <a:t>wielokąty</a:t>
             </a:r>
             <a:r>
-              <a:rPr lang="en-US" dirty="0">
+              <a:rPr lang="en-US">
                 <a:ea typeface="+mj-lt"/>
                 <a:cs typeface="+mj-lt"/>
               </a:rPr>
               <a:t> y-</a:t>
             </a:r>
             <a:r>
-              <a:rPr lang="en-US" dirty="0" err="1">
+              <a:rPr lang="en-US" err="1">
                 <a:ea typeface="+mj-lt"/>
                 <a:cs typeface="+mj-lt"/>
               </a:rPr>
               <a:t>monotoniczne</a:t>
             </a:r>
-            <a:endParaRPr lang="en-US" dirty="0" err="1"/>
+            <a:endParaRPr lang="en-US" err="1"/>
           </a:p>
         </p:txBody>
       </p:sp>
@@ -13608,7 +13594,7 @@
               <a:buNone/>
             </a:pPr>
             <a:r>
-              <a:rPr lang="pl-PL" dirty="0">
+              <a:rPr lang="pl-PL">
                 <a:ea typeface="+mn-lt"/>
                 <a:cs typeface="+mn-lt"/>
               </a:rPr>
@@ -13619,7 +13605,7 @@
             <a:pPr marL="0" indent="0">
               <a:buNone/>
             </a:pPr>
-            <a:endParaRPr lang="pl-PL" dirty="0">
+            <a:endParaRPr lang="pl-PL">
               <a:ea typeface="Open sans"/>
               <a:cs typeface="Open sans"/>
             </a:endParaRPr>
@@ -13629,7 +13615,7 @@
               <a:buNone/>
             </a:pPr>
             <a:r>
-              <a:rPr lang="pl-PL" dirty="0">
+              <a:rPr lang="pl-PL">
                 <a:ea typeface="+mn-lt"/>
                 <a:cs typeface="+mn-lt"/>
               </a:rPr>
@@ -13695,55 +13681,55 @@
           <a:lstStyle/>
           <a:p>
             <a:r>
-              <a:rPr lang="en-US" dirty="0" err="1">
+              <a:rPr lang="en-US" err="1">
                 <a:ea typeface="+mj-lt"/>
                 <a:cs typeface="+mj-lt"/>
               </a:rPr>
               <a:t>Triangulacja</a:t>
             </a:r>
             <a:r>
-              <a:rPr lang="en-US" dirty="0">
+              <a:rPr lang="en-US">
                 <a:ea typeface="+mj-lt"/>
                 <a:cs typeface="+mj-lt"/>
               </a:rPr>
               <a:t> </a:t>
             </a:r>
             <a:r>
-              <a:rPr lang="en-US" dirty="0" err="1">
+              <a:rPr lang="en-US" err="1">
                 <a:ea typeface="+mj-lt"/>
                 <a:cs typeface="+mj-lt"/>
               </a:rPr>
               <a:t>kolejnych</a:t>
             </a:r>
             <a:r>
-              <a:rPr lang="en-US" dirty="0">
+              <a:rPr lang="en-US">
                 <a:ea typeface="+mj-lt"/>
                 <a:cs typeface="+mj-lt"/>
               </a:rPr>
               <a:t> </a:t>
             </a:r>
             <a:r>
-              <a:rPr lang="en-US" dirty="0" err="1">
+              <a:rPr lang="en-US" err="1">
                 <a:ea typeface="+mj-lt"/>
                 <a:cs typeface="+mj-lt"/>
               </a:rPr>
               <a:t>wielokątów</a:t>
             </a:r>
             <a:r>
-              <a:rPr lang="en-US" dirty="0">
+              <a:rPr lang="en-US">
                 <a:ea typeface="+mj-lt"/>
                 <a:cs typeface="+mj-lt"/>
               </a:rPr>
               <a:t> y-</a:t>
             </a:r>
             <a:r>
-              <a:rPr lang="en-US" dirty="0" err="1">
+              <a:rPr lang="en-US" err="1">
                 <a:ea typeface="+mj-lt"/>
                 <a:cs typeface="+mj-lt"/>
               </a:rPr>
               <a:t>monotonicznych</a:t>
             </a:r>
-            <a:endParaRPr lang="en-US" dirty="0" err="1"/>
+            <a:endParaRPr lang="en-US" err="1"/>
           </a:p>
         </p:txBody>
       </p:sp>
@@ -13776,7 +13762,7 @@
           <a:lstStyle/>
           <a:p>
             <a:r>
-              <a:rPr lang="pl-PL" dirty="0">
+              <a:rPr lang="pl-PL">
                 <a:ea typeface="+mn-lt"/>
                 <a:cs typeface="+mn-lt"/>
               </a:rPr>
@@ -13785,7 +13771,7 @@
           </a:p>
           <a:p>
             <a:r>
-              <a:rPr lang="pl-PL" dirty="0">
+              <a:rPr lang="pl-PL">
                 <a:ea typeface="+mn-lt"/>
                 <a:cs typeface="+mn-lt"/>
               </a:rPr>
@@ -13794,7 +13780,7 @@
           </a:p>
           <a:p>
             <a:r>
-              <a:rPr lang="pl-PL" dirty="0">
+              <a:rPr lang="pl-PL">
                 <a:ea typeface="+mn-lt"/>
                 <a:cs typeface="+mn-lt"/>
               </a:rPr>
@@ -13803,7 +13789,7 @@
           </a:p>
           <a:p>
             <a:r>
-              <a:rPr lang="pl-PL" dirty="0">
+              <a:rPr lang="pl-PL">
                 <a:ea typeface="+mn-lt"/>
                 <a:cs typeface="+mn-lt"/>
               </a:rPr>
@@ -13813,7 +13799,7 @@
           <a:p>
             <a:pPr lvl="1"/>
             <a:r>
-              <a:rPr lang="pl-PL" dirty="0">
+              <a:rPr lang="pl-PL">
                 <a:ea typeface="+mn-lt"/>
                 <a:cs typeface="+mn-lt"/>
               </a:rPr>
@@ -13823,13 +13809,13 @@
           <a:p>
             <a:pPr lvl="1"/>
             <a:r>
-              <a:rPr lang="pl-PL" dirty="0">
+              <a:rPr lang="pl-PL">
                 <a:ea typeface="+mn-lt"/>
                 <a:cs typeface="+mn-lt"/>
               </a:rPr>
               <a:t>w przeciwnym przypadku umieszczamy badane wierzchołki na stosie.</a:t>
             </a:r>
-            <a:endParaRPr lang="pl-PL" dirty="0">
+            <a:endParaRPr lang="pl-PL">
               <a:ea typeface="Open sans"/>
               <a:cs typeface="Open sans"/>
             </a:endParaRPr>
@@ -14119,7 +14105,7 @@
             <a:bodyPr rtlCol="0" anchor="ctr"/>
             <a:lstStyle/>
             <a:p>
-              <a:endParaRPr lang="en-US" dirty="0"/>
+              <a:endParaRPr lang="en-US"/>
             </a:p>
           </p:txBody>
         </p:sp>
@@ -14337,7 +14323,7 @@
             <a:bodyPr rtlCol="0" anchor="ctr"/>
             <a:lstStyle/>
             <a:p>
-              <a:endParaRPr lang="en-US" dirty="0"/>
+              <a:endParaRPr lang="en-US"/>
             </a:p>
           </p:txBody>
         </p:sp>
@@ -14555,7 +14541,7 @@
             <a:bodyPr rtlCol="0" anchor="ctr"/>
             <a:lstStyle/>
             <a:p>
-              <a:endParaRPr lang="en-US" dirty="0"/>
+              <a:endParaRPr lang="en-US"/>
             </a:p>
           </p:txBody>
         </p:sp>
@@ -14720,7 +14706,7 @@
             <a:bodyPr rtlCol="0" anchor="ctr"/>
             <a:lstStyle/>
             <a:p>
-              <a:endParaRPr lang="en-US" dirty="0"/>
+              <a:endParaRPr lang="en-US"/>
             </a:p>
           </p:txBody>
         </p:sp>
@@ -14767,7 +14753,7 @@
           <a:bodyPr rtlCol="0" anchor="ctr"/>
           <a:lstStyle/>
           <a:p>
-            <a:endParaRPr lang="en-US" dirty="0">
+            <a:endParaRPr lang="en-US">
               <a:solidFill>
                 <a:schemeClr val="tx1"/>
               </a:solidFill>
@@ -14822,7 +14808,7 @@
           <a:bodyPr rtlCol="0" anchor="ctr"/>
           <a:lstStyle/>
           <a:p>
-            <a:endParaRPr lang="en-US" dirty="0">
+            <a:endParaRPr lang="en-US">
               <a:solidFill>
                 <a:schemeClr val="tx1"/>
               </a:solidFill>
@@ -15130,7 +15116,7 @@
             <a:bodyPr rtlCol="0" anchor="ctr"/>
             <a:lstStyle/>
             <a:p>
-              <a:endParaRPr lang="en-US" dirty="0"/>
+              <a:endParaRPr lang="en-US"/>
             </a:p>
           </p:txBody>
         </p:sp>
@@ -15234,38 +15220,6 @@
           </a:p>
         </p:txBody>
       </p:sp>
-      <p:pic>
-        <p:nvPicPr>
-          <p:cNvPr id="4" name="Content Placeholder 3">
-            <a:extLst>
-              <a:ext uri="{FF2B5EF4-FFF2-40B4-BE49-F238E27FC236}">
-                <a16:creationId xmlns:a16="http://schemas.microsoft.com/office/drawing/2014/main" id="{056E3AB0-BEFB-4CDD-47F0-E4F8C44D8DBA}"/>
-              </a:ext>
-            </a:extLst>
-          </p:cNvPr>
-          <p:cNvPicPr>
-            <a:picLocks noGrp="1" noChangeAspect="1"/>
-          </p:cNvPicPr>
-          <p:nvPr>
-            <p:ph idx="1"/>
-          </p:nvPr>
-        </p:nvPicPr>
-        <p:blipFill>
-          <a:blip r:embed="rId2"/>
-          <a:stretch>
-            <a:fillRect/>
-          </a:stretch>
-        </p:blipFill>
-        <p:spPr>
-          <a:xfrm>
-            <a:off x="4953000" y="841230"/>
-            <a:ext cx="6689185" cy="5217565"/>
-          </a:xfrm>
-          <a:prstGeom prst="rect">
-            <a:avLst/>
-          </a:prstGeom>
-        </p:spPr>
-      </p:pic>
       <p:sp useBgFill="1">
         <p:nvSpPr>
           <p:cNvPr id="26" name="Oval 25">
@@ -15323,6 +15277,35 @@
           </a:p>
         </p:txBody>
       </p:sp>
+      <p:pic>
+        <p:nvPicPr>
+          <p:cNvPr id="6" name="Content Placeholder 5" descr="A graph of a function&#10;&#10;Description automatically generated">
+            <a:extLst>
+              <a:ext uri="{FF2B5EF4-FFF2-40B4-BE49-F238E27FC236}">
+                <a16:creationId xmlns:a16="http://schemas.microsoft.com/office/drawing/2014/main" id="{A4DCDD76-1622-F071-0902-2E4A6F66101C}"/>
+              </a:ext>
+            </a:extLst>
+          </p:cNvPr>
+          <p:cNvPicPr>
+            <a:picLocks noGrp="1" noChangeAspect="1"/>
+          </p:cNvPicPr>
+          <p:nvPr>
+            <p:ph idx="1"/>
+          </p:nvPr>
+        </p:nvPicPr>
+        <p:blipFill>
+          <a:blip r:embed="rId2"/>
+          <a:stretch>
+            <a:fillRect/>
+          </a:stretch>
+        </p:blipFill>
+        <p:spPr>
+          <a:xfrm>
+            <a:off x="4194992" y="625985"/>
+            <a:ext cx="7451226" cy="5601014"/>
+          </a:xfrm>
+        </p:spPr>
+      </p:pic>
     </p:spTree>
     <p:extLst>
       <p:ext uri="{BB962C8B-B14F-4D97-AF65-F5344CB8AC3E}">
@@ -15375,27 +15358,27 @@
           <a:lstStyle/>
           <a:p>
             <a:r>
-              <a:rPr lang="en-US" dirty="0" err="1">
+              <a:rPr lang="en-US" err="1">
                 <a:ea typeface="+mj-lt"/>
                 <a:cs typeface="+mj-lt"/>
               </a:rPr>
               <a:t>Kompletny</a:t>
             </a:r>
             <a:r>
-              <a:rPr lang="en-US" dirty="0">
+              <a:rPr lang="en-US">
                 <a:ea typeface="+mj-lt"/>
                 <a:cs typeface="+mj-lt"/>
               </a:rPr>
               <a:t> </a:t>
             </a:r>
             <a:r>
-              <a:rPr lang="en-US" dirty="0" err="1">
+              <a:rPr lang="en-US" err="1">
                 <a:ea typeface="+mj-lt"/>
                 <a:cs typeface="+mj-lt"/>
               </a:rPr>
               <a:t>algorytm</a:t>
             </a:r>
-            <a:endParaRPr lang="en-US" dirty="0" err="1"/>
+            <a:endParaRPr lang="en-US" err="1"/>
           </a:p>
         </p:txBody>
       </p:sp>
@@ -15428,13 +15411,13 @@
           <a:lstStyle/>
           <a:p>
             <a:r>
-              <a:rPr lang="pl-PL" dirty="0">
+              <a:rPr lang="pl-PL">
                 <a:ea typeface="+mn-lt"/>
                 <a:cs typeface="+mn-lt"/>
               </a:rPr>
               <a:t>Dane wejściowe</a:t>
             </a:r>
-            <a:endParaRPr lang="pl-PL" dirty="0">
+            <a:endParaRPr lang="pl-PL">
               <a:ea typeface="Open sans"/>
               <a:cs typeface="Open sans"/>
             </a:endParaRPr>
@@ -15442,30 +15425,30 @@
           <a:p>
             <a:pPr lvl="1"/>
             <a:r>
-              <a:rPr lang="pl-PL" sz="2800" dirty="0">
+              <a:rPr lang="pl-PL" sz="2800">
                 <a:ea typeface="+mn-lt"/>
                 <a:cs typeface="+mn-lt"/>
               </a:rPr>
               <a:t>Wielokąt prosty zadany w postaci punktów w kierunku </a:t>
             </a:r>
             <a:br>
-              <a:rPr lang="pl-PL" dirty="0"/>
+              <a:rPr lang="pl-PL"/>
             </a:br>
             <a:r>
-              <a:rPr lang="pl-PL" sz="2800" dirty="0">
+              <a:rPr lang="pl-PL" sz="2800">
                 <a:ea typeface="+mn-lt"/>
                 <a:cs typeface="+mn-lt"/>
               </a:rPr>
               <a:t>przeciwnym do wskazówek zegara.</a:t>
             </a:r>
-            <a:endParaRPr lang="pl-PL" dirty="0">
+            <a:endParaRPr lang="pl-PL">
               <a:ea typeface="+mn-lt"/>
               <a:cs typeface="+mn-lt"/>
             </a:endParaRPr>
           </a:p>
           <a:p>
             <a:r>
-              <a:rPr lang="pl-PL" dirty="0">
+              <a:rPr lang="pl-PL">
                 <a:ea typeface="+mn-lt"/>
                 <a:cs typeface="+mn-lt"/>
               </a:rPr>
@@ -15475,7 +15458,7 @@
           <a:p>
             <a:pPr lvl="1"/>
             <a:r>
-              <a:rPr lang="pl-PL" dirty="0">
+              <a:rPr lang="pl-PL">
                 <a:ea typeface="+mn-lt"/>
                 <a:cs typeface="+mn-lt"/>
               </a:rPr>
@@ -15484,7 +15467,7 @@
           </a:p>
           <a:p>
             <a:r>
-              <a:rPr lang="pl-PL" dirty="0">
+              <a:rPr lang="pl-PL">
                 <a:ea typeface="+mn-lt"/>
                 <a:cs typeface="+mn-lt"/>
               </a:rPr>
@@ -15493,20 +15476,20 @@
           </a:p>
           <a:p>
             <a:r>
-              <a:rPr lang="pl-PL" dirty="0">
+              <a:rPr lang="pl-PL">
                 <a:ea typeface="+mn-lt"/>
                 <a:cs typeface="+mn-lt"/>
               </a:rPr>
               <a:t>Złożoność pamięciowa kompletnego algorytmu dla n wierzchołków: </a:t>
             </a:r>
             <a:br>
-              <a:rPr lang="pl-PL" dirty="0">
+              <a:rPr lang="pl-PL">
                 <a:ea typeface="+mn-lt"/>
                 <a:cs typeface="+mn-lt"/>
               </a:rPr>
             </a:br>
             <a:r>
-              <a:rPr lang="pl-PL" dirty="0">
+              <a:rPr lang="pl-PL">
                 <a:ea typeface="+mn-lt"/>
                 <a:cs typeface="+mn-lt"/>
               </a:rPr>
@@ -15798,7 +15781,7 @@
             <a:bodyPr rtlCol="0" anchor="ctr"/>
             <a:lstStyle/>
             <a:p>
-              <a:endParaRPr lang="en-US" dirty="0"/>
+              <a:endParaRPr lang="en-US"/>
             </a:p>
           </p:txBody>
         </p:sp>
@@ -16016,7 +15999,7 @@
             <a:bodyPr rtlCol="0" anchor="ctr"/>
             <a:lstStyle/>
             <a:p>
-              <a:endParaRPr lang="en-US" dirty="0"/>
+              <a:endParaRPr lang="en-US"/>
             </a:p>
           </p:txBody>
         </p:sp>
@@ -16234,7 +16217,7 @@
             <a:bodyPr rtlCol="0" anchor="ctr"/>
             <a:lstStyle/>
             <a:p>
-              <a:endParaRPr lang="en-US" dirty="0"/>
+              <a:endParaRPr lang="en-US"/>
             </a:p>
           </p:txBody>
         </p:sp>
@@ -16399,7 +16382,7 @@
             <a:bodyPr rtlCol="0" anchor="ctr"/>
             <a:lstStyle/>
             <a:p>
-              <a:endParaRPr lang="en-US" dirty="0"/>
+              <a:endParaRPr lang="en-US"/>
             </a:p>
           </p:txBody>
         </p:sp>
@@ -16446,7 +16429,7 @@
           <a:bodyPr rtlCol="0" anchor="ctr"/>
           <a:lstStyle/>
           <a:p>
-            <a:endParaRPr lang="en-US" dirty="0">
+            <a:endParaRPr lang="en-US">
               <a:solidFill>
                 <a:schemeClr val="tx1"/>
               </a:solidFill>
@@ -16501,7 +16484,7 @@
           <a:bodyPr rtlCol="0" anchor="ctr"/>
           <a:lstStyle/>
           <a:p>
-            <a:endParaRPr lang="en-US" dirty="0">
+            <a:endParaRPr lang="en-US">
               <a:solidFill>
                 <a:schemeClr val="tx1"/>
               </a:solidFill>
@@ -16815,7 +16798,7 @@
             <a:bodyPr rtlCol="0" anchor="ctr"/>
             <a:lstStyle/>
             <a:p>
-              <a:endParaRPr lang="en-US" dirty="0"/>
+              <a:endParaRPr lang="en-US"/>
             </a:p>
           </p:txBody>
         </p:sp>
@@ -17031,7 +17014,7 @@
             <a:bodyPr rtlCol="0" anchor="ctr"/>
             <a:lstStyle/>
             <a:p>
-              <a:endParaRPr lang="en-US" dirty="0"/>
+              <a:endParaRPr lang="en-US"/>
             </a:p>
           </p:txBody>
         </p:sp>
@@ -17300,7 +17283,7 @@
             <a:bodyPr rtlCol="0" anchor="ctr"/>
             <a:lstStyle/>
             <a:p>
-              <a:endParaRPr lang="en-US" dirty="0"/>
+              <a:endParaRPr lang="en-US"/>
             </a:p>
           </p:txBody>
         </p:sp>
@@ -17406,7 +17389,7 @@
             <a:bodyPr rtlCol="0" anchor="ctr"/>
             <a:lstStyle/>
             <a:p>
-              <a:endParaRPr lang="en-US" dirty="0"/>
+              <a:endParaRPr lang="en-US"/>
             </a:p>
           </p:txBody>
         </p:sp>
@@ -17494,7 +17477,7 @@
           <a:p>
             <a:pPr algn="ctr"/>
             <a:r>
-              <a:rPr lang="pl-PL" sz="5400" u="sng" kern="1200" dirty="0">
+              <a:rPr lang="pl-PL" sz="5400" u="sng" kern="1200">
                 <a:solidFill>
                   <a:srgbClr val="FFFFFF"/>
                 </a:solidFill>
@@ -17505,7 +17488,7 @@
               <a:t>Metoda II</a:t>
             </a:r>
             <a:br>
-              <a:rPr lang="pl-PL" sz="5400" kern="1200" dirty="0">
+              <a:rPr lang="pl-PL" sz="5400" kern="1200">
                 <a:solidFill>
                   <a:srgbClr val="FFFFFF"/>
                 </a:solidFill>
@@ -17515,7 +17498,7 @@
               </a:rPr>
             </a:br>
             <a:r>
-              <a:rPr lang="pl-PL" sz="5400" kern="1200" dirty="0">
+              <a:rPr lang="pl-PL" sz="5400" kern="1200">
                 <a:solidFill>
                   <a:srgbClr val="FFFFFF"/>
                 </a:solidFill>
@@ -17526,7 +17509,7 @@
               <a:t>Triangulacja </a:t>
             </a:r>
             <a:r>
-              <a:rPr lang="pl-PL" sz="5400" kern="1200" dirty="0" err="1">
+              <a:rPr lang="pl-PL" sz="5400" kern="1200" err="1">
                 <a:solidFill>
                   <a:srgbClr val="FFFFFF"/>
                 </a:solidFill>
@@ -17536,7 +17519,7 @@
               </a:rPr>
               <a:t>Delaunay’a</a:t>
             </a:r>
-            <a:endParaRPr lang="en-US" sz="5400" kern="1200" dirty="0">
+            <a:endParaRPr lang="en-US" sz="5400" kern="1200">
               <a:solidFill>
                 <a:srgbClr val="FFFFFF"/>
               </a:solidFill>
@@ -17599,14 +17582,14 @@
           <a:lstStyle/>
           <a:p>
             <a:r>
-              <a:rPr lang="pl-PL" dirty="0"/>
+              <a:rPr lang="pl-PL"/>
               <a:t>Triangulacja </a:t>
             </a:r>
             <a:r>
-              <a:rPr lang="pl-PL" dirty="0" err="1"/>
+              <a:rPr lang="pl-PL" err="1"/>
               <a:t>Delaunay’a</a:t>
             </a:r>
-            <a:endParaRPr lang="pl-PL" dirty="0"/>
+            <a:endParaRPr lang="pl-PL"/>
           </a:p>
         </p:txBody>
       </p:sp>
@@ -17637,47 +17620,47 @@
           <a:lstStyle/>
           <a:p>
             <a:r>
-              <a:rPr lang="pl-PL" b="0" i="0" dirty="0">
+              <a:rPr lang="pl-PL" b="0" i="0">
                 <a:effectLst/>
               </a:rPr>
               <a:t>Triangulacja </a:t>
             </a:r>
             <a:r>
-              <a:rPr lang="pl-PL" b="0" i="0" dirty="0" err="1">
+              <a:rPr lang="pl-PL" b="0" i="0" err="1">
                 <a:effectLst/>
               </a:rPr>
               <a:t>Delaunay’a</a:t>
             </a:r>
             <a:r>
-              <a:rPr lang="pl-PL" b="0" i="0" dirty="0">
+              <a:rPr lang="pl-PL" b="0" i="0">
                 <a:effectLst/>
               </a:rPr>
               <a:t> jest to triangulacja zbioru punktów na płaszczyźnie 2D taka, że żaden punkt nie leży wewnątrz okręgu opisanego na trójkącie należącym do triangulacji. Triangulacja </a:t>
             </a:r>
             <a:r>
-              <a:rPr lang="pl-PL" b="0" i="0" dirty="0" err="1">
+              <a:rPr lang="pl-PL" b="0" i="0" err="1">
                 <a:effectLst/>
               </a:rPr>
               <a:t>Delaunay’a</a:t>
             </a:r>
             <a:r>
-              <a:rPr lang="pl-PL" b="0" i="0" dirty="0">
+              <a:rPr lang="pl-PL" b="0" i="0">
                 <a:effectLst/>
               </a:rPr>
               <a:t> jest używana m.in. do modelowania terenu, automatycznego generowania </a:t>
             </a:r>
             <a:r>
-              <a:rPr lang="pl-PL" b="0" i="0" dirty="0" err="1">
+              <a:rPr lang="pl-PL" b="0" i="0" err="1">
                 <a:effectLst/>
               </a:rPr>
               <a:t>mesh</a:t>
             </a:r>
             <a:r>
-              <a:rPr lang="pl-PL" dirty="0" err="1"/>
+              <a:rPr lang="pl-PL" err="1"/>
               <a:t>u</a:t>
             </a:r>
             <a:r>
-              <a:rPr lang="pl-PL" b="0" i="0" dirty="0">
+              <a:rPr lang="pl-PL" b="0" i="0">
                 <a:effectLst/>
               </a:rPr>
               <a:t>.</a:t>
@@ -17685,7 +17668,7 @@
           </a:p>
           <a:p>
             <a:r>
-              <a:rPr lang="pl-PL" b="0" i="0" dirty="0">
+              <a:rPr lang="pl-PL" b="0" i="0">
                 <a:solidFill>
                   <a:srgbClr val="444444"/>
                 </a:solidFill>
@@ -17694,15 +17677,15 @@
               <a:t> </a:t>
             </a:r>
             <a:r>
-              <a:rPr lang="pl-PL" dirty="0"/>
+              <a:rPr lang="pl-PL"/>
               <a:t>Dalej rozpatrywany algorytm to triangulacja </a:t>
             </a:r>
             <a:r>
-              <a:rPr lang="pl-PL" dirty="0" err="1"/>
+              <a:rPr lang="pl-PL" err="1"/>
               <a:t>Delaunay’a</a:t>
             </a:r>
             <a:r>
-              <a:rPr lang="pl-PL" dirty="0"/>
+              <a:rPr lang="pl-PL"/>
               <a:t> z ograniczeniami (z procedurami odzyskania krawędzi oraz usuwania trójkątów zewnętrznych). (triangulacja wieloboku)</a:t>
             </a:r>
           </a:p>
@@ -17788,7 +17771,7 @@
           <a:bodyPr rtlCol="0" anchor="ctr"/>
           <a:lstStyle/>
           <a:p>
-            <a:endParaRPr lang="en-US" dirty="0">
+            <a:endParaRPr lang="en-US">
               <a:solidFill>
                 <a:schemeClr val="tx1"/>
               </a:solidFill>
@@ -17843,7 +17826,7 @@
           <a:bodyPr rtlCol="0" anchor="ctr"/>
           <a:lstStyle/>
           <a:p>
-            <a:endParaRPr lang="en-US" dirty="0">
+            <a:endParaRPr lang="en-US">
               <a:solidFill>
                 <a:schemeClr val="tx1"/>
               </a:solidFill>
@@ -18151,7 +18134,7 @@
             <a:bodyPr rtlCol="0" anchor="ctr"/>
             <a:lstStyle/>
             <a:p>
-              <a:endParaRPr lang="en-US" dirty="0"/>
+              <a:endParaRPr lang="en-US"/>
             </a:p>
           </p:txBody>
         </p:sp>
@@ -18241,7 +18224,7 @@
           <a:p>
             <a:pPr algn="ctr"/>
             <a:r>
-              <a:rPr lang="pl-PL" sz="4100" dirty="0"/>
+              <a:rPr lang="pl-PL" sz="4100"/>
               <a:t>Struktura danych do przechowywania siatki triangulacji</a:t>
             </a:r>
           </a:p>
@@ -18276,69 +18259,69 @@
           <a:lstStyle/>
           <a:p>
             <a:r>
-              <a:rPr lang="pl-PL" sz="1800" dirty="0"/>
+              <a:rPr lang="pl-PL" sz="1800"/>
               <a:t>Do reprezentacji siatki użyta została struktura Half-Edge posiada on następujące atrybuty:</a:t>
             </a:r>
           </a:p>
           <a:p>
             <a:r>
-              <a:rPr lang="pl-PL" sz="1800" dirty="0" err="1"/>
+              <a:rPr lang="pl-PL" sz="1800" err="1"/>
               <a:t>origin</a:t>
             </a:r>
             <a:r>
-              <a:rPr lang="pl-PL" sz="1800" dirty="0"/>
+              <a:rPr lang="pl-PL" sz="1800"/>
               <a:t> – punkt z którego </a:t>
             </a:r>
             <a:r>
-              <a:rPr lang="pl-PL" sz="1800" dirty="0" err="1"/>
+              <a:rPr lang="pl-PL" sz="1800" err="1"/>
               <a:t>półkrawędź</a:t>
             </a:r>
             <a:r>
-              <a:rPr lang="pl-PL" sz="1800" dirty="0"/>
+              <a:rPr lang="pl-PL" sz="1800"/>
               <a:t> wychodzi</a:t>
             </a:r>
           </a:p>
           <a:p>
             <a:r>
-              <a:rPr lang="pl-PL" sz="1800" dirty="0" err="1"/>
+              <a:rPr lang="pl-PL" sz="1800" err="1"/>
               <a:t>next</a:t>
             </a:r>
             <a:r>
-              <a:rPr lang="pl-PL" sz="1800" dirty="0"/>
+              <a:rPr lang="pl-PL" sz="1800"/>
               <a:t> – następnik (też Half-Edge)</a:t>
             </a:r>
           </a:p>
           <a:p>
             <a:r>
-              <a:rPr lang="pl-PL" sz="1800" dirty="0" err="1"/>
+              <a:rPr lang="pl-PL" sz="1800" err="1"/>
               <a:t>prev</a:t>
             </a:r>
             <a:r>
-              <a:rPr lang="pl-PL" sz="1800" dirty="0"/>
+              <a:rPr lang="pl-PL" sz="1800"/>
               <a:t> - poprzednik (też Half-Edge)</a:t>
             </a:r>
           </a:p>
           <a:p>
             <a:r>
-              <a:rPr lang="pl-PL" sz="1800" dirty="0"/>
+              <a:rPr lang="pl-PL" sz="1800"/>
               <a:t>face – ściana, której jest częścią</a:t>
             </a:r>
           </a:p>
           <a:p>
             <a:r>
-              <a:rPr lang="pl-PL" sz="1800" dirty="0" err="1"/>
+              <a:rPr lang="pl-PL" sz="1800" err="1"/>
               <a:t>twin</a:t>
             </a:r>
             <a:r>
-              <a:rPr lang="pl-PL" sz="1800" dirty="0"/>
+              <a:rPr lang="pl-PL" sz="1800"/>
               <a:t> – obiekt Half-Edge zwrócony przeciwnie na tej samej krawędzi</a:t>
             </a:r>
           </a:p>
           <a:p>
-            <a:endParaRPr lang="pl-PL" sz="1800" dirty="0"/>
+            <a:endParaRPr lang="pl-PL" sz="1800"/>
           </a:p>
           <a:p>
-            <a:endParaRPr lang="pl-PL" sz="1800" dirty="0"/>
+            <a:endParaRPr lang="pl-PL" sz="1800"/>
           </a:p>
         </p:txBody>
       </p:sp>
@@ -18440,7 +18423,7 @@
           <a:lstStyle/>
           <a:p>
             <a:r>
-              <a:rPr lang="pl-PL" dirty="0"/>
+              <a:rPr lang="pl-PL"/>
               <a:t>Czym jest triangulacja?</a:t>
             </a:r>
           </a:p>
@@ -18475,27 +18458,27 @@
           <a:lstStyle/>
           <a:p>
             <a:r>
-              <a:rPr lang="pl-PL" sz="2800" dirty="0">
+              <a:rPr lang="pl-PL" sz="2800">
                 <a:latin typeface="Arial" panose="020B0604020202020204" pitchFamily="34" charset="0"/>
               </a:rPr>
               <a:t>Triangulacja wielokąta w 2D to podział</a:t>
             </a:r>
             <a:r>
-              <a:rPr lang="pl-PL" sz="2800" dirty="0"/>
+              <a:rPr lang="pl-PL" sz="2800"/>
               <a:t> </a:t>
             </a:r>
             <a:r>
-              <a:rPr lang="pl-PL" sz="2800" dirty="0">
+              <a:rPr lang="pl-PL" sz="2800">
                 <a:latin typeface="Arial" panose="020B0604020202020204" pitchFamily="34" charset="0"/>
               </a:rPr>
               <a:t>wielokąta na trójkąty, których jedynymi</a:t>
             </a:r>
             <a:r>
-              <a:rPr lang="pl-PL" sz="2800" dirty="0"/>
+              <a:rPr lang="pl-PL" sz="2800"/>
               <a:t> </a:t>
             </a:r>
             <a:r>
-              <a:rPr lang="pl-PL" sz="2800" dirty="0">
+              <a:rPr lang="pl-PL" sz="2800">
                 <a:latin typeface="Arial" panose="020B0604020202020204" pitchFamily="34" charset="0"/>
               </a:rPr>
               <a:t>wierzchołkami są wierzchołki wielokąta.</a:t>
@@ -18503,12 +18486,12 @@
           </a:p>
           <a:p>
             <a:r>
-              <a:rPr lang="pl-PL" dirty="0">
+              <a:rPr lang="pl-PL">
                 <a:latin typeface="Arial" panose="020B0604020202020204" pitchFamily="34" charset="0"/>
               </a:rPr>
               <a:t> Istnieje wiele triangulacji tego samo wielokąta, jednak każda z nich posiadać będzie tą samą liczbę trójkątów.</a:t>
             </a:r>
-            <a:endParaRPr lang="pl-PL" sz="2800" kern="150" dirty="0">
+            <a:endParaRPr lang="pl-PL" sz="2800" kern="150">
               <a:effectLst/>
               <a:latin typeface="Arial" panose="020B0604020202020204" pitchFamily="34" charset="0"/>
               <a:ea typeface="DejaVu Sans"/>
@@ -18517,7 +18500,7 @@
           </a:p>
           <a:p>
             <a:r>
-              <a:rPr lang="pl-PL" sz="2800" dirty="0">
+              <a:rPr lang="pl-PL" sz="2800">
                 <a:latin typeface="Arial" panose="020B0604020202020204" pitchFamily="34" charset="0"/>
                 <a:cs typeface="Arial" panose="020B0604020202020204" pitchFamily="34" charset="0"/>
               </a:rPr>
@@ -18526,27 +18509,27 @@
           </a:p>
           <a:p>
             <a:r>
-              <a:rPr lang="pl-PL" dirty="0">
+              <a:rPr lang="pl-PL">
                 <a:latin typeface="Arial" panose="020B0604020202020204" pitchFamily="34" charset="0"/>
                 <a:cs typeface="Arial" panose="020B0604020202020204" pitchFamily="34" charset="0"/>
               </a:rPr>
               <a:t> Istnieje wiele różnych metod/algorytmów triangulacji, jednak my dzisiaj zajmiemy się dwoma metodami: </a:t>
             </a:r>
             <a:r>
-              <a:rPr lang="pl-PL" dirty="0"/>
+              <a:rPr lang="pl-PL"/>
               <a:t>Triangulacja z wykorzystaniem wielokątów monotonicznych, Triangulacja </a:t>
             </a:r>
             <a:r>
-              <a:rPr lang="pl-PL" dirty="0" err="1"/>
+              <a:rPr lang="pl-PL" err="1"/>
               <a:t>Delaunay’a</a:t>
             </a:r>
-            <a:endParaRPr lang="pl-PL" sz="2800" dirty="0">
+            <a:endParaRPr lang="pl-PL" sz="2800">
               <a:latin typeface="Arial" panose="020B0604020202020204" pitchFamily="34" charset="0"/>
               <a:cs typeface="Arial" panose="020B0604020202020204" pitchFamily="34" charset="0"/>
             </a:endParaRPr>
           </a:p>
           <a:p>
-            <a:endParaRPr lang="pl-PL" dirty="0"/>
+            <a:endParaRPr lang="pl-PL"/>
           </a:p>
         </p:txBody>
       </p:sp>
@@ -18630,7 +18613,7 @@
           <a:bodyPr rtlCol="0" anchor="ctr"/>
           <a:lstStyle/>
           <a:p>
-            <a:endParaRPr lang="en-US" dirty="0">
+            <a:endParaRPr lang="en-US">
               <a:solidFill>
                 <a:schemeClr val="tx1"/>
               </a:solidFill>
@@ -18685,7 +18668,7 @@
           <a:bodyPr rtlCol="0" anchor="ctr"/>
           <a:lstStyle/>
           <a:p>
-            <a:endParaRPr lang="en-US" dirty="0">
+            <a:endParaRPr lang="en-US">
               <a:solidFill>
                 <a:schemeClr val="tx1"/>
               </a:solidFill>
@@ -18725,7 +18708,6 @@
               <a:rPr lang="pl-PL"/>
               <a:t>Etapy algorytmu</a:t>
             </a:r>
-            <a:endParaRPr lang="pl-PL" dirty="0"/>
           </a:p>
         </p:txBody>
       </p:sp>
@@ -18954,7 +18936,7 @@
           <a:lstStyle/>
           <a:p>
             <a:r>
-              <a:rPr lang="pl-PL" dirty="0"/>
+              <a:rPr lang="pl-PL"/>
               <a:t>1.Wstępna triangulacja</a:t>
             </a:r>
           </a:p>
@@ -18989,16 +18971,16 @@
           <a:lstStyle/>
           <a:p>
             <a:r>
-              <a:rPr lang="pl-PL" dirty="0"/>
+              <a:rPr lang="pl-PL"/>
               <a:t>Mając triangulację n punktów dokładamy kolejny punkt, uwzględniając warunek okręgu (w okręgu opisanym na trójkącie nie może się zawierać żaden inny punkt) otrzymujemy triangulację dla n+1 punktów.</a:t>
             </a:r>
           </a:p>
           <a:p>
-            <a:endParaRPr lang="pl-PL" dirty="0"/>
+            <a:endParaRPr lang="pl-PL"/>
           </a:p>
           <a:p>
             <a:r>
-              <a:rPr lang="pl-PL" dirty="0"/>
+              <a:rPr lang="pl-PL"/>
               <a:t>Jako początkowy stan triangulacji przyjmujemy trójkąt zawierający wszystkie punkty zbioru, zatem jest to triangulacja dla n=3 punktów.</a:t>
             </a:r>
           </a:p>
@@ -19114,7 +19096,7 @@
           <a:bodyPr rtlCol="0" anchor="ctr"/>
           <a:lstStyle/>
           <a:p>
-            <a:endParaRPr lang="en-US" dirty="0">
+            <a:endParaRPr lang="en-US">
               <a:solidFill>
                 <a:schemeClr val="tx1"/>
               </a:solidFill>
@@ -19169,7 +19151,7 @@
           <a:bodyPr rtlCol="0" anchor="ctr"/>
           <a:lstStyle/>
           <a:p>
-            <a:endParaRPr lang="en-US" dirty="0">
+            <a:endParaRPr lang="en-US">
               <a:solidFill>
                 <a:schemeClr val="tx1"/>
               </a:solidFill>
@@ -19206,7 +19188,7 @@
           <a:lstStyle/>
           <a:p>
             <a:r>
-              <a:rPr lang="pl-PL" dirty="0"/>
+              <a:rPr lang="pl-PL"/>
               <a:t>Wstawienie punktu</a:t>
             </a:r>
           </a:p>
@@ -19512,7 +19494,7 @@
             <a:bodyPr rtlCol="0" anchor="ctr"/>
             <a:lstStyle/>
             <a:p>
-              <a:endParaRPr lang="en-US" dirty="0"/>
+              <a:endParaRPr lang="en-US"/>
             </a:p>
           </p:txBody>
         </p:sp>
@@ -19657,7 +19639,7 @@
           <a:lstStyle/>
           <a:p>
             <a:r>
-              <a:rPr lang="pl-PL" sz="3600" dirty="0"/>
+              <a:rPr lang="pl-PL" sz="3600"/>
               <a:t>Wyszukanie trójkąta, w którym zawiera się punkt</a:t>
             </a:r>
           </a:p>
@@ -19692,55 +19674,55 @@
           <a:lstStyle/>
           <a:p>
             <a:r>
-              <a:rPr lang="pl-PL" sz="2000" dirty="0"/>
+              <a:rPr lang="pl-PL" sz="2000"/>
               <a:t>Wyszukiwanie odbywa się przy pomocy funkcji orient(), która przyjmuje </a:t>
             </a:r>
             <a:r>
-              <a:rPr lang="pl-PL" sz="2000" dirty="0" err="1"/>
+              <a:rPr lang="pl-PL" sz="2000" err="1"/>
               <a:t>półkrawędź</a:t>
             </a:r>
             <a:r>
-              <a:rPr lang="pl-PL" sz="2000" dirty="0"/>
+              <a:rPr lang="pl-PL" sz="2000"/>
               <a:t> oraz dany punkt. </a:t>
             </a:r>
             <a:r>
-              <a:rPr lang="pl-PL" sz="2000" dirty="0" err="1"/>
+              <a:rPr lang="pl-PL" sz="2000" err="1"/>
               <a:t>Półkrawędzie</a:t>
             </a:r>
             <a:r>
-              <a:rPr lang="pl-PL" sz="2000" dirty="0"/>
+              <a:rPr lang="pl-PL" sz="2000"/>
               <a:t> są skierowane otrzymujemy, zatem informacje czy punkt leży po prawej czy po lewej danej </a:t>
             </a:r>
             <a:r>
-              <a:rPr lang="pl-PL" sz="2000" dirty="0" err="1"/>
+              <a:rPr lang="pl-PL" sz="2000" err="1"/>
               <a:t>półkrawędzi</a:t>
             </a:r>
             <a:r>
-              <a:rPr lang="pl-PL" sz="2000" dirty="0"/>
+              <a:rPr lang="pl-PL" sz="2000"/>
               <a:t>. Każdy trójkąt reprezentowany jest przez trzy </a:t>
             </a:r>
             <a:r>
-              <a:rPr lang="pl-PL" sz="2000" dirty="0" err="1"/>
+              <a:rPr lang="pl-PL" sz="2000" err="1"/>
               <a:t>półkrawędzie</a:t>
             </a:r>
             <a:r>
-              <a:rPr lang="pl-PL" sz="2000" dirty="0"/>
+              <a:rPr lang="pl-PL" sz="2000"/>
               <a:t> skierowane przeciwnie do wskazówek zegara. Jeśli funkcja orient dla danego trójkąta zwróci dodatnią wartość (punkt leży po lewej) dla wszystkich </a:t>
             </a:r>
             <a:r>
-              <a:rPr lang="pl-PL" sz="2000" dirty="0" err="1"/>
+              <a:rPr lang="pl-PL" sz="2000" err="1"/>
               <a:t>półkrawędzi</a:t>
             </a:r>
             <a:r>
-              <a:rPr lang="pl-PL" sz="2000" dirty="0"/>
+              <a:rPr lang="pl-PL" sz="2000"/>
               <a:t> to oznacza iż rozpatrywany trójkąt jest szukanym. Gdy dla którejkolwiek z </a:t>
             </a:r>
             <a:r>
-              <a:rPr lang="pl-PL" sz="2000" dirty="0" err="1"/>
+              <a:rPr lang="pl-PL" sz="2000" err="1"/>
               <a:t>półkrawędzi</a:t>
             </a:r>
             <a:r>
-              <a:rPr lang="pl-PL" sz="2000" dirty="0"/>
+              <a:rPr lang="pl-PL" sz="2000"/>
               <a:t> punkt leży po prawej porzucamy aktualnie rozpatrywany trójkąt i przechodzimy do sąsiada sąsiadującego rozpatrywaną krawędzią.</a:t>
             </a:r>
           </a:p>
@@ -19828,7 +19810,7 @@
           <a:lstStyle/>
           <a:p>
             <a:r>
-              <a:rPr lang="pl-PL" dirty="0"/>
+              <a:rPr lang="pl-PL"/>
               <a:t>Wyszukiwanie trójkątów, których otoczki zawierają dany punkt</a:t>
             </a:r>
           </a:p>
@@ -19856,13 +19838,13 @@
           <a:lstStyle/>
           <a:p>
             <a:r>
-              <a:rPr lang="pl-PL" dirty="0"/>
+              <a:rPr lang="pl-PL"/>
               <a:t>Po znalezieniu trójkąta zawierającego wstawiany punkt przy pomocy przeszukiwanie w szerz (BFS) szukamy wszystkich trójkątów, które w swej otoczce zawierają wstawiany punkt.</a:t>
             </a:r>
           </a:p>
           <a:p>
             <a:r>
-              <a:rPr lang="pl-PL" dirty="0"/>
+              <a:rPr lang="pl-PL"/>
               <a:t>Realizacja BFS:</a:t>
             </a:r>
           </a:p>
@@ -19871,7 +19853,7 @@
               <a:buNone/>
             </a:pPr>
             <a:r>
-              <a:rPr lang="pl-PL" dirty="0"/>
+              <a:rPr lang="pl-PL"/>
               <a:t>	Jeśli dany trójkąt w swej otoczce zawiera dany punkt, do kolejki dodawane są wszystkie trójkąty będące sąsiadami rozpatrywanego, algorytm wykonuje się dopóki wszystkie trójkąty zawierające w swym okręgu opisanym wstawiany punkt nie zostaną przetworzone.</a:t>
             </a:r>
           </a:p>
@@ -19936,7 +19918,7 @@
           <a:lstStyle/>
           <a:p>
             <a:r>
-              <a:rPr lang="pl-PL" sz="1600" dirty="0"/>
+              <a:rPr lang="pl-PL" sz="1600"/>
               <a:t>Na pierwszym rysunku widać okręgi opisane na dwóch trójkątach, w których zawiera się wstawiany punkt. Następnie zostały one usunięte i zastąpione trójkątami utworzonymi poprzez połączenie dodawanego punktu z punktami będącymi wierzchołkami wielokąta utworzonego przez usunięte trójkąty.</a:t>
             </a:r>
           </a:p>
@@ -20043,8 +20025,8 @@
             </p:blipFill>
             <p:spPr>
               <a:xfrm>
-                <a:off x="3333401" y="2292243"/>
-                <a:ext cx="2054160" cy="3083040"/>
+                <a:off x="3333408" y="2291883"/>
+                <a:ext cx="2054147" cy="3083040"/>
               </a:xfrm>
               <a:prstGeom prst="rect">
                 <a:avLst/>
@@ -20094,8 +20076,8 @@
             </p:blipFill>
             <p:spPr>
               <a:xfrm>
-                <a:off x="3331961" y="2344443"/>
-                <a:ext cx="533520" cy="2517480"/>
+                <a:off x="3331573" y="2344083"/>
+                <a:ext cx="533576" cy="2517480"/>
               </a:xfrm>
               <a:prstGeom prst="rect">
                 <a:avLst/>
@@ -20145,7 +20127,7 @@
             </p:blipFill>
             <p:spPr>
               <a:xfrm>
-                <a:off x="2788361" y="2326803"/>
+                <a:off x="2788361" y="2326443"/>
                 <a:ext cx="591120" cy="2586240"/>
               </a:xfrm>
               <a:prstGeom prst="rect">
@@ -20196,7 +20178,7 @@
             </p:blipFill>
             <p:spPr>
               <a:xfrm>
-                <a:off x="2824361" y="4717923"/>
+                <a:off x="2824001" y="4717563"/>
                 <a:ext cx="1005120" cy="160200"/>
               </a:xfrm>
               <a:prstGeom prst="rect">
@@ -20247,7 +20229,7 @@
             </p:blipFill>
             <p:spPr>
               <a:xfrm>
-                <a:off x="3794921" y="4719723"/>
+                <a:off x="3794561" y="4719363"/>
                 <a:ext cx="1494720" cy="606240"/>
               </a:xfrm>
               <a:prstGeom prst="rect">
@@ -20298,8 +20280,8 @@
             </p:blipFill>
             <p:spPr>
               <a:xfrm>
-                <a:off x="8588321" y="2322123"/>
-                <a:ext cx="547560" cy="1524600"/>
+                <a:off x="8587934" y="2321763"/>
+                <a:ext cx="547614" cy="1524600"/>
               </a:xfrm>
               <a:prstGeom prst="rect">
                 <a:avLst/>
@@ -20349,8 +20331,8 @@
             </p:blipFill>
             <p:spPr>
               <a:xfrm>
-                <a:off x="9090521" y="3768243"/>
-                <a:ext cx="1506600" cy="1578600"/>
+                <a:off x="9090521" y="3768261"/>
+                <a:ext cx="1506600" cy="1578564"/>
               </a:xfrm>
               <a:prstGeom prst="rect">
                 <a:avLst/>
@@ -20400,7 +20382,7 @@
             </p:blipFill>
             <p:spPr>
               <a:xfrm>
-                <a:off x="9055961" y="3819363"/>
+                <a:off x="9055961" y="3819003"/>
                 <a:ext cx="72000" cy="1047240"/>
               </a:xfrm>
               <a:prstGeom prst="rect">
@@ -20451,7 +20433,7 @@
             </p:blipFill>
             <p:spPr>
               <a:xfrm>
-                <a:off x="8105561" y="3827643"/>
+                <a:off x="8105201" y="3827643"/>
                 <a:ext cx="1014840" cy="1086840"/>
               </a:xfrm>
               <a:prstGeom prst="rect">
@@ -20490,7 +20472,7 @@
           <a:lstStyle/>
           <a:p>
             <a:r>
-              <a:rPr lang="pl-PL" sz="2400" b="1" dirty="0"/>
+              <a:rPr lang="pl-PL" sz="2400" b="1"/>
               <a:t>Graficzna reprezentacja dodawania punktu</a:t>
             </a:r>
           </a:p>
@@ -20548,7 +20530,7 @@
           <a:lstStyle/>
           <a:p>
             <a:r>
-              <a:rPr lang="pl-PL" dirty="0"/>
+              <a:rPr lang="pl-PL"/>
               <a:t>2. Odzyskiwanie krawędzi</a:t>
             </a:r>
           </a:p>
@@ -20583,15 +20565,15 @@
           <a:lstStyle/>
           <a:p>
             <a:r>
-              <a:rPr lang="pl-PL" sz="2000" dirty="0"/>
+              <a:rPr lang="pl-PL" sz="2000"/>
               <a:t>Po pierwszym etapie otrzymujemy triangulację </a:t>
             </a:r>
             <a:r>
-              <a:rPr lang="pl-PL" sz="2000" dirty="0" err="1"/>
+              <a:rPr lang="pl-PL" sz="2000" err="1"/>
               <a:t>Delaunay’a</a:t>
             </a:r>
             <a:r>
-              <a:rPr lang="pl-PL" sz="2000" dirty="0"/>
+              <a:rPr lang="pl-PL" sz="2000"/>
               <a:t>, jednak nie uwzględnia ona boków wielokąta, którego triangulację chcieliśmy otrzymać. Zatem następnym etapem będzie modyfikacja triangulacji, aby była ona triangulacją wielokąta, a nie tylko triangulacją zbioru punktów.</a:t>
             </a:r>
           </a:p>
@@ -20737,7 +20719,7 @@
           <a:bodyPr rtlCol="0" anchor="ctr"/>
           <a:lstStyle/>
           <a:p>
-            <a:endParaRPr lang="en-US" dirty="0">
+            <a:endParaRPr lang="en-US">
               <a:solidFill>
                 <a:schemeClr val="tx1"/>
               </a:solidFill>
@@ -20792,7 +20774,7 @@
           <a:bodyPr rtlCol="0" anchor="ctr"/>
           <a:lstStyle/>
           <a:p>
-            <a:endParaRPr lang="en-US" dirty="0">
+            <a:endParaRPr lang="en-US">
               <a:solidFill>
                 <a:schemeClr val="tx1"/>
               </a:solidFill>
@@ -21164,7 +21146,7 @@
             <a:bodyPr rtlCol="0" anchor="ctr"/>
             <a:lstStyle/>
             <a:p>
-              <a:endParaRPr lang="en-US" dirty="0"/>
+              <a:endParaRPr lang="en-US"/>
             </a:p>
           </p:txBody>
         </p:sp>
@@ -21308,7 +21290,7 @@
           <a:lstStyle/>
           <a:p>
             <a:r>
-              <a:rPr lang="pl-PL" dirty="0"/>
+              <a:rPr lang="pl-PL"/>
               <a:t>Wykrywanie przecięć</a:t>
             </a:r>
           </a:p>
@@ -21343,45 +21325,45 @@
           <a:lstStyle/>
           <a:p>
             <a:r>
-              <a:rPr lang="pl-PL" sz="1300" dirty="0"/>
+              <a:rPr lang="pl-PL" sz="1300"/>
               <a:t>Aby uzyskać triangulację wielokąta, iterujemy po każdej jego krawędzi i sprawdzamy, czy jest ona zawarta w powstałej triangulacji, jeśli nie, wyszukujemy krawędzie triangulacji, które ją przecinają i zastępujemy je.</a:t>
             </a:r>
           </a:p>
           <a:p>
             <a:r>
-              <a:rPr lang="pl-PL" sz="1300" dirty="0"/>
+              <a:rPr lang="pl-PL" sz="1300"/>
               <a:t>Samo wykrywanie przecięć realizowane jest również za pomocą funkcji orient() zwracającej liczbę dodatnia, jeśli punkt znajduje się po lewej stronie </a:t>
             </a:r>
             <a:r>
-              <a:rPr lang="pl-PL" sz="1300" dirty="0" err="1"/>
+              <a:rPr lang="pl-PL" sz="1300" err="1"/>
               <a:t>półkrawędzi</a:t>
             </a:r>
             <a:r>
-              <a:rPr lang="pl-PL" sz="1300" dirty="0"/>
+              <a:rPr lang="pl-PL" sz="1300"/>
               <a:t>, a ujemną jeśli po prawej. Zatem warunkiem koniecznym, aby dwie krawędzie się przecinały jest ujemny iloczyn wyników </a:t>
             </a:r>
             <a:r>
-              <a:rPr lang="pl-PL" sz="1300" dirty="0" err="1"/>
+              <a:rPr lang="pl-PL" sz="1300" err="1"/>
               <a:t>wywołań</a:t>
             </a:r>
             <a:r>
-              <a:rPr lang="pl-PL" sz="1300" dirty="0"/>
+              <a:rPr lang="pl-PL" sz="1300"/>
               <a:t> orient dla danej </a:t>
             </a:r>
             <a:r>
-              <a:rPr lang="pl-PL" sz="1300" dirty="0" err="1"/>
+              <a:rPr lang="pl-PL" sz="1300" err="1"/>
               <a:t>półkrawędzi</a:t>
             </a:r>
             <a:r>
-              <a:rPr lang="pl-PL" sz="1300" dirty="0"/>
+              <a:rPr lang="pl-PL" sz="1300"/>
               <a:t>, mianowicie dla punkt C i D względem </a:t>
             </a:r>
             <a:r>
-              <a:rPr lang="pl-PL" sz="1300" dirty="0" err="1"/>
+              <a:rPr lang="pl-PL" sz="1300" err="1"/>
               <a:t>półkrawędzi</a:t>
             </a:r>
             <a:r>
-              <a:rPr lang="pl-PL" sz="1300" dirty="0"/>
+              <a:rPr lang="pl-PL" sz="1300"/>
               <a:t> AB oraz A i B względem CD.</a:t>
             </a:r>
           </a:p>
@@ -21527,7 +21509,7 @@
           <a:bodyPr rtlCol="0" anchor="ctr"/>
           <a:lstStyle/>
           <a:p>
-            <a:endParaRPr lang="en-US" dirty="0">
+            <a:endParaRPr lang="en-US">
               <a:solidFill>
                 <a:schemeClr val="tx1"/>
               </a:solidFill>
@@ -21582,7 +21564,7 @@
           <a:bodyPr rtlCol="0" anchor="ctr"/>
           <a:lstStyle/>
           <a:p>
-            <a:endParaRPr lang="en-US" dirty="0">
+            <a:endParaRPr lang="en-US">
               <a:solidFill>
                 <a:schemeClr val="tx1"/>
               </a:solidFill>
@@ -21835,7 +21817,7 @@
             <a:bodyPr rtlCol="0" anchor="ctr"/>
             <a:lstStyle/>
             <a:p>
-              <a:endParaRPr lang="en-US" dirty="0"/>
+              <a:endParaRPr lang="en-US"/>
             </a:p>
           </p:txBody>
         </p:sp>
@@ -21979,7 +21961,7 @@
           <a:lstStyle/>
           <a:p>
             <a:r>
-              <a:rPr lang="pl-PL" dirty="0"/>
+              <a:rPr lang="pl-PL"/>
               <a:t>3. Usuwanie trójkątów zewnętrznych</a:t>
             </a:r>
           </a:p>
@@ -22014,36 +21996,36 @@
           <a:lstStyle/>
           <a:p>
             <a:r>
-              <a:rPr lang="pl-PL" sz="1800" dirty="0"/>
+              <a:rPr lang="pl-PL" sz="1800"/>
               <a:t> Wielokąt zadany jest przeciwnie do wskazówek zegara zatem biorąc </a:t>
             </a:r>
             <a:r>
-              <a:rPr lang="pl-PL" sz="1800" dirty="0" err="1"/>
+              <a:rPr lang="pl-PL" sz="1800" err="1"/>
               <a:t>półkrawędź</a:t>
             </a:r>
             <a:r>
-              <a:rPr lang="pl-PL" sz="1800" dirty="0"/>
+              <a:rPr lang="pl-PL" sz="1800"/>
               <a:t> z pierwszego do drugiego wierzchołka wiemy, że trójkąt, do której ona (ta </a:t>
             </a:r>
             <a:r>
-              <a:rPr lang="pl-PL" sz="1800" dirty="0" err="1"/>
+              <a:rPr lang="pl-PL" sz="1800" err="1"/>
               <a:t>półkrawędź</a:t>
             </a:r>
             <a:r>
-              <a:rPr lang="pl-PL" sz="1800" dirty="0"/>
+              <a:rPr lang="pl-PL" sz="1800"/>
               <a:t>) należy znajduje się wewnątrz wielokąta. Potem poruszając się po kolejnych sąsiadach rozpatrywanego trójkąta (możemy wejść do sąsiada pod warunkiem, że krawędź ich łącząca nie należy do wieloboku, bo wtedy wyszlibyśmy poza wielobok) oznaczamy trójkąty jako „odwiedzone”. Pozostałe trójkąty usuwamy, w ten sposób otrzymujemy ostateczną triangulacje </a:t>
             </a:r>
             <a:r>
-              <a:rPr lang="pl-PL" sz="1800" dirty="0" err="1"/>
+              <a:rPr lang="pl-PL" sz="1800" err="1"/>
               <a:t>Delaunay’a</a:t>
             </a:r>
             <a:r>
-              <a:rPr lang="pl-PL" sz="1800" dirty="0"/>
+              <a:rPr lang="pl-PL" sz="1800"/>
               <a:t>. Na rysunku wszystkie trójkąty poza oznaczonymi na zielono należącymi do wieloboku są do usunięcia</a:t>
             </a:r>
           </a:p>
           <a:p>
-            <a:endParaRPr lang="pl-PL" sz="1800" dirty="0"/>
+            <a:endParaRPr lang="pl-PL" sz="1800"/>
           </a:p>
         </p:txBody>
       </p:sp>
@@ -22130,7 +22112,7 @@
           <a:p>
             <a:pPr algn="ctr"/>
             <a:r>
-              <a:rPr lang="pl-PL" dirty="0"/>
+              <a:rPr lang="pl-PL"/>
               <a:t>Wizualizacja poszukiwania trójkątów wewnątrz przykładowego wieloboku</a:t>
             </a:r>
           </a:p>
@@ -22251,7 +22233,7 @@
           <a:bodyPr rtlCol="0" anchor="ctr"/>
           <a:lstStyle/>
           <a:p>
-            <a:endParaRPr lang="en-US" dirty="0">
+            <a:endParaRPr lang="en-US">
               <a:solidFill>
                 <a:schemeClr val="tx1"/>
               </a:solidFill>
@@ -22306,7 +22288,7 @@
           <a:bodyPr rtlCol="0" anchor="ctr"/>
           <a:lstStyle/>
           <a:p>
-            <a:endParaRPr lang="en-US" dirty="0">
+            <a:endParaRPr lang="en-US">
               <a:solidFill>
                 <a:schemeClr val="tx1"/>
               </a:solidFill>
@@ -22620,7 +22602,7 @@
             <a:bodyPr rtlCol="0" anchor="ctr"/>
             <a:lstStyle/>
             <a:p>
-              <a:endParaRPr lang="en-US" dirty="0"/>
+              <a:endParaRPr lang="en-US"/>
             </a:p>
           </p:txBody>
         </p:sp>
@@ -22889,7 +22871,7 @@
             <a:bodyPr rtlCol="0" anchor="ctr"/>
             <a:lstStyle/>
             <a:p>
-              <a:endParaRPr lang="en-US" dirty="0"/>
+              <a:endParaRPr lang="en-US"/>
             </a:p>
           </p:txBody>
         </p:sp>
@@ -22995,7 +22977,7 @@
             <a:bodyPr rtlCol="0" anchor="ctr"/>
             <a:lstStyle/>
             <a:p>
-              <a:endParaRPr lang="en-US" dirty="0"/>
+              <a:endParaRPr lang="en-US"/>
             </a:p>
           </p:txBody>
         </p:sp>
@@ -23030,7 +23012,7 @@
           <a:p>
             <a:pPr algn="ctr"/>
             <a:r>
-              <a:rPr lang="pl-PL" u="sng" dirty="0">
+              <a:rPr lang="pl-PL" u="sng">
                 <a:solidFill>
                   <a:srgbClr val="FFFFFF"/>
                 </a:solidFill>
@@ -23038,14 +23020,14 @@
               <a:t>Metoda I</a:t>
             </a:r>
             <a:br>
-              <a:rPr lang="pl-PL" dirty="0">
+              <a:rPr lang="pl-PL">
                 <a:solidFill>
                   <a:srgbClr val="FFFFFF"/>
                 </a:solidFill>
               </a:rPr>
             </a:br>
             <a:r>
-              <a:rPr lang="pl-PL" dirty="0">
+              <a:rPr lang="pl-PL">
                 <a:solidFill>
                   <a:srgbClr val="FFFFFF"/>
                 </a:solidFill>
@@ -23135,7 +23117,7 @@
           <a:bodyPr rtlCol="0" anchor="ctr"/>
           <a:lstStyle/>
           <a:p>
-            <a:endParaRPr lang="en-US" dirty="0">
+            <a:endParaRPr lang="en-US">
               <a:solidFill>
                 <a:schemeClr val="tx1"/>
               </a:solidFill>
@@ -23190,7 +23172,7 @@
           <a:bodyPr rtlCol="0" anchor="ctr"/>
           <a:lstStyle/>
           <a:p>
-            <a:endParaRPr lang="en-US" dirty="0">
+            <a:endParaRPr lang="en-US">
               <a:solidFill>
                 <a:schemeClr val="tx1"/>
               </a:solidFill>
@@ -23443,7 +23425,7 @@
             <a:bodyPr rtlCol="0" anchor="ctr"/>
             <a:lstStyle/>
             <a:p>
-              <a:endParaRPr lang="en-US" dirty="0"/>
+              <a:endParaRPr lang="en-US"/>
             </a:p>
           </p:txBody>
         </p:sp>
@@ -23587,7 +23569,7 @@
           <a:lstStyle/>
           <a:p>
             <a:r>
-              <a:rPr lang="pl-PL" dirty="0"/>
+              <a:rPr lang="pl-PL"/>
               <a:t>Usuwanie nieodwiedzonych trójkątów</a:t>
             </a:r>
           </a:p>
@@ -23622,21 +23604,21 @@
           <a:lstStyle/>
           <a:p>
             <a:r>
-              <a:rPr lang="pl-PL" sz="1800" dirty="0"/>
+              <a:rPr lang="pl-PL" sz="1800"/>
               <a:t>Ostatnim etapem triangulacji </a:t>
             </a:r>
             <a:r>
-              <a:rPr lang="pl-PL" sz="1800" dirty="0" err="1"/>
+              <a:rPr lang="pl-PL" sz="1800" err="1"/>
               <a:t>Delaunay’a</a:t>
             </a:r>
             <a:r>
-              <a:rPr lang="pl-PL" sz="1800" dirty="0"/>
+              <a:rPr lang="pl-PL" sz="1800"/>
               <a:t> wieloboku jest usunięcie trójkątów triangulacji, nie zawierających się w wieloboku. Odbywa się to iterując po trójkątach triangulacji, jeśli dany nie został odwiedzony to usuwany jest z ostatecznej triangulacji.</a:t>
             </a:r>
           </a:p>
           <a:p>
             <a:r>
-              <a:rPr lang="pl-PL" sz="1800" dirty="0"/>
+              <a:rPr lang="pl-PL" sz="1800"/>
               <a:t> Ostateczna postać triangulacji dla przykładu z poprzedniego slajdu znajduje się obok.</a:t>
             </a:r>
           </a:p>
@@ -23710,12 +23692,863 @@
           <a:chExt cx="0" cy="0"/>
         </a:xfrm>
       </p:grpSpPr>
+      <p:grpSp>
+        <p:nvGrpSpPr>
+          <p:cNvPr id="50" name="Group 49">
+            <a:extLst>
+              <a:ext uri="{FF2B5EF4-FFF2-40B4-BE49-F238E27FC236}">
+                <a16:creationId xmlns:a16="http://schemas.microsoft.com/office/drawing/2014/main" id="{D91916A1-FEE7-41E7-BEE3-2B4941A6F305}"/>
+              </a:ext>
+              <a:ext uri="{C183D7F6-B498-43B3-948B-1728B52AA6E4}">
+                <adec:decorative xmlns:adec="http://schemas.microsoft.com/office/drawing/2017/decorative" val="1"/>
+              </a:ext>
+            </a:extLst>
+          </p:cNvPr>
+          <p:cNvGrpSpPr>
+            <a:grpSpLocks noGrp="1" noUngrp="1" noRot="1" noChangeAspect="1" noMove="1" noResize="1"/>
+          </p:cNvGrpSpPr>
+          <p:nvPr>
+            <p:extLst>
+              <p:ext uri="{386F3935-93C4-4BCD-93E2-E3B085C9AB24}">
+                <p16:designElem xmlns:p16="http://schemas.microsoft.com/office/powerpoint/2015/main" val="1"/>
+              </p:ext>
+            </p:extLst>
+          </p:nvPr>
+        </p:nvGrpSpPr>
+        <p:grpSpPr>
+          <a:xfrm>
+            <a:off x="175990" y="62886"/>
+            <a:ext cx="11708355" cy="6301715"/>
+            <a:chOff x="175990" y="62886"/>
+            <a:chExt cx="11708355" cy="6301715"/>
+          </a:xfrm>
+        </p:grpSpPr>
+        <p:sp useBgFill="1">
+          <p:nvSpPr>
+            <p:cNvPr id="27" name="Graphic 10">
+              <a:extLst>
+                <a:ext uri="{FF2B5EF4-FFF2-40B4-BE49-F238E27FC236}">
+                  <a16:creationId xmlns:a16="http://schemas.microsoft.com/office/drawing/2014/main" id="{EAFF5F08-677C-4873-9274-02B6FE751044}"/>
+                </a:ext>
+                <a:ext uri="{C183D7F6-B498-43B3-948B-1728B52AA6E4}">
+                  <adec:decorative xmlns:adec="http://schemas.microsoft.com/office/drawing/2017/decorative" val="1"/>
+                </a:ext>
+              </a:extLst>
+            </p:cNvPr>
+            <p:cNvSpPr/>
+            <p:nvPr>
+              <p:extLst>
+                <p:ext uri="{386F3935-93C4-4BCD-93E2-E3B085C9AB24}">
+                  <p16:designElem xmlns:p16="http://schemas.microsoft.com/office/powerpoint/2015/main" val="1"/>
+                </p:ext>
+              </p:extLst>
+            </p:nvPr>
+          </p:nvSpPr>
+          <p:spPr>
+            <a:xfrm rot="2700000">
+              <a:off x="175990" y="525742"/>
+              <a:ext cx="1066799" cy="1066799"/>
+            </a:xfrm>
+            <a:custGeom>
+              <a:avLst/>
+              <a:gdLst>
+                <a:gd name="connsiteX0" fmla="*/ 4053340 w 6859500"/>
+                <a:gd name="connsiteY0" fmla="*/ 6235893 h 6859500"/>
+                <a:gd name="connsiteX1" fmla="*/ 4053340 w 6859500"/>
+                <a:gd name="connsiteY1" fmla="*/ 4053340 h 6859500"/>
+                <a:gd name="connsiteX2" fmla="*/ 6235893 w 6859500"/>
+                <a:gd name="connsiteY2" fmla="*/ 4053340 h 6859500"/>
+                <a:gd name="connsiteX3" fmla="*/ 6859501 w 6859500"/>
+                <a:gd name="connsiteY3" fmla="*/ 3429731 h 6859500"/>
+                <a:gd name="connsiteX4" fmla="*/ 6235893 w 6859500"/>
+                <a:gd name="connsiteY4" fmla="*/ 2806123 h 6859500"/>
+                <a:gd name="connsiteX5" fmla="*/ 4053340 w 6859500"/>
+                <a:gd name="connsiteY5" fmla="*/ 2806123 h 6859500"/>
+                <a:gd name="connsiteX6" fmla="*/ 4053340 w 6859500"/>
+                <a:gd name="connsiteY6" fmla="*/ 623608 h 6859500"/>
+                <a:gd name="connsiteX7" fmla="*/ 3429731 w 6859500"/>
+                <a:gd name="connsiteY7" fmla="*/ 0 h 6859500"/>
+                <a:gd name="connsiteX8" fmla="*/ 2806123 w 6859500"/>
+                <a:gd name="connsiteY8" fmla="*/ 623608 h 6859500"/>
+                <a:gd name="connsiteX9" fmla="*/ 2806123 w 6859500"/>
+                <a:gd name="connsiteY9" fmla="*/ 2806161 h 6859500"/>
+                <a:gd name="connsiteX10" fmla="*/ 623608 w 6859500"/>
+                <a:gd name="connsiteY10" fmla="*/ 2806161 h 6859500"/>
+                <a:gd name="connsiteX11" fmla="*/ 0 w 6859500"/>
+                <a:gd name="connsiteY11" fmla="*/ 3429731 h 6859500"/>
+                <a:gd name="connsiteX12" fmla="*/ 623608 w 6859500"/>
+                <a:gd name="connsiteY12" fmla="*/ 4053340 h 6859500"/>
+                <a:gd name="connsiteX13" fmla="*/ 2806161 w 6859500"/>
+                <a:gd name="connsiteY13" fmla="*/ 4053340 h 6859500"/>
+                <a:gd name="connsiteX14" fmla="*/ 2806161 w 6859500"/>
+                <a:gd name="connsiteY14" fmla="*/ 6235893 h 6859500"/>
+                <a:gd name="connsiteX15" fmla="*/ 3429770 w 6859500"/>
+                <a:gd name="connsiteY15" fmla="*/ 6859501 h 6859500"/>
+                <a:gd name="connsiteX16" fmla="*/ 4053340 w 6859500"/>
+                <a:gd name="connsiteY16" fmla="*/ 6235893 h 6859500"/>
+              </a:gdLst>
+              <a:ahLst/>
+              <a:cxnLst>
+                <a:cxn ang="0">
+                  <a:pos x="connsiteX0" y="connsiteY0"/>
+                </a:cxn>
+                <a:cxn ang="0">
+                  <a:pos x="connsiteX1" y="connsiteY1"/>
+                </a:cxn>
+                <a:cxn ang="0">
+                  <a:pos x="connsiteX2" y="connsiteY2"/>
+                </a:cxn>
+                <a:cxn ang="0">
+                  <a:pos x="connsiteX3" y="connsiteY3"/>
+                </a:cxn>
+                <a:cxn ang="0">
+                  <a:pos x="connsiteX4" y="connsiteY4"/>
+                </a:cxn>
+                <a:cxn ang="0">
+                  <a:pos x="connsiteX5" y="connsiteY5"/>
+                </a:cxn>
+                <a:cxn ang="0">
+                  <a:pos x="connsiteX6" y="connsiteY6"/>
+                </a:cxn>
+                <a:cxn ang="0">
+                  <a:pos x="connsiteX7" y="connsiteY7"/>
+                </a:cxn>
+                <a:cxn ang="0">
+                  <a:pos x="connsiteX8" y="connsiteY8"/>
+                </a:cxn>
+                <a:cxn ang="0">
+                  <a:pos x="connsiteX9" y="connsiteY9"/>
+                </a:cxn>
+                <a:cxn ang="0">
+                  <a:pos x="connsiteX10" y="connsiteY10"/>
+                </a:cxn>
+                <a:cxn ang="0">
+                  <a:pos x="connsiteX11" y="connsiteY11"/>
+                </a:cxn>
+                <a:cxn ang="0">
+                  <a:pos x="connsiteX12" y="connsiteY12"/>
+                </a:cxn>
+                <a:cxn ang="0">
+                  <a:pos x="connsiteX13" y="connsiteY13"/>
+                </a:cxn>
+                <a:cxn ang="0">
+                  <a:pos x="connsiteX14" y="connsiteY14"/>
+                </a:cxn>
+                <a:cxn ang="0">
+                  <a:pos x="connsiteX15" y="connsiteY15"/>
+                </a:cxn>
+                <a:cxn ang="0">
+                  <a:pos x="connsiteX16" y="connsiteY16"/>
+                </a:cxn>
+              </a:cxnLst>
+              <a:rect l="l" t="t" r="r" b="b"/>
+              <a:pathLst>
+                <a:path w="6859500" h="6859500">
+                  <a:moveTo>
+                    <a:pt x="4053340" y="6235893"/>
+                  </a:moveTo>
+                  <a:lnTo>
+                    <a:pt x="4053340" y="4053340"/>
+                  </a:lnTo>
+                  <a:lnTo>
+                    <a:pt x="6235893" y="4053340"/>
+                  </a:lnTo>
+                  <a:cubicBezTo>
+                    <a:pt x="6580293" y="4053340"/>
+                    <a:pt x="6859501" y="3774132"/>
+                    <a:pt x="6859501" y="3429731"/>
+                  </a:cubicBezTo>
+                  <a:cubicBezTo>
+                    <a:pt x="6859501" y="3085330"/>
+                    <a:pt x="6580332" y="2806123"/>
+                    <a:pt x="6235893" y="2806123"/>
+                  </a:cubicBezTo>
+                  <a:lnTo>
+                    <a:pt x="4053340" y="2806123"/>
+                  </a:lnTo>
+                  <a:lnTo>
+                    <a:pt x="4053340" y="623608"/>
+                  </a:lnTo>
+                  <a:cubicBezTo>
+                    <a:pt x="4053340" y="279208"/>
+                    <a:pt x="3774171" y="0"/>
+                    <a:pt x="3429731" y="0"/>
+                  </a:cubicBezTo>
+                  <a:cubicBezTo>
+                    <a:pt x="3085330" y="0"/>
+                    <a:pt x="2806123" y="279208"/>
+                    <a:pt x="2806123" y="623608"/>
+                  </a:cubicBezTo>
+                  <a:lnTo>
+                    <a:pt x="2806123" y="2806161"/>
+                  </a:lnTo>
+                  <a:lnTo>
+                    <a:pt x="623608" y="2806161"/>
+                  </a:lnTo>
+                  <a:cubicBezTo>
+                    <a:pt x="279208" y="2806161"/>
+                    <a:pt x="0" y="3085369"/>
+                    <a:pt x="0" y="3429731"/>
+                  </a:cubicBezTo>
+                  <a:cubicBezTo>
+                    <a:pt x="0" y="3774132"/>
+                    <a:pt x="279208" y="4053340"/>
+                    <a:pt x="623608" y="4053340"/>
+                  </a:cubicBezTo>
+                  <a:lnTo>
+                    <a:pt x="2806161" y="4053340"/>
+                  </a:lnTo>
+                  <a:lnTo>
+                    <a:pt x="2806161" y="6235893"/>
+                  </a:lnTo>
+                  <a:cubicBezTo>
+                    <a:pt x="2806161" y="6580293"/>
+                    <a:pt x="3085369" y="6859501"/>
+                    <a:pt x="3429770" y="6859501"/>
+                  </a:cubicBezTo>
+                  <a:cubicBezTo>
+                    <a:pt x="3774171" y="6859501"/>
+                    <a:pt x="4053340" y="6580293"/>
+                    <a:pt x="4053340" y="6235893"/>
+                  </a:cubicBezTo>
+                  <a:close/>
+                </a:path>
+              </a:pathLst>
+            </a:custGeom>
+            <a:ln w="3848" cap="flat">
+              <a:noFill/>
+              <a:prstDash val="solid"/>
+              <a:miter/>
+            </a:ln>
+            <a:effectLst>
+              <a:glow rad="152400">
+                <a:srgbClr val="000000">
+                  <a:alpha val="4000"/>
+                </a:srgbClr>
+              </a:glow>
+              <a:outerShdw blurRad="101600" dist="38100" dir="16200000" rotWithShape="0">
+                <a:srgbClr val="000000">
+                  <a:alpha val="5000"/>
+                </a:srgbClr>
+              </a:outerShdw>
+            </a:effectLst>
+          </p:spPr>
+          <p:txBody>
+            <a:bodyPr rtlCol="0" anchor="ctr"/>
+            <a:lstStyle/>
+            <a:p>
+              <a:endParaRPr lang="en-US" dirty="0"/>
+            </a:p>
+          </p:txBody>
+        </p:sp>
+        <p:sp useBgFill="1">
+          <p:nvSpPr>
+            <p:cNvPr id="28" name="Graphic 10">
+              <a:extLst>
+                <a:ext uri="{FF2B5EF4-FFF2-40B4-BE49-F238E27FC236}">
+                  <a16:creationId xmlns:a16="http://schemas.microsoft.com/office/drawing/2014/main" id="{16514C65-F179-4953-B660-5FC657697957}"/>
+                </a:ext>
+                <a:ext uri="{C183D7F6-B498-43B3-948B-1728B52AA6E4}">
+                  <adec:decorative xmlns:adec="http://schemas.microsoft.com/office/drawing/2017/decorative" val="1"/>
+                </a:ext>
+              </a:extLst>
+            </p:cNvPr>
+            <p:cNvSpPr/>
+            <p:nvPr>
+              <p:extLst>
+                <p:ext uri="{386F3935-93C4-4BCD-93E2-E3B085C9AB24}">
+                  <p16:designElem xmlns:p16="http://schemas.microsoft.com/office/powerpoint/2015/main" val="1"/>
+                </p:ext>
+              </p:extLst>
+            </p:nvPr>
+          </p:nvSpPr>
+          <p:spPr>
+            <a:xfrm rot="2700000">
+              <a:off x="8482021" y="62886"/>
+              <a:ext cx="2322574" cy="2322574"/>
+            </a:xfrm>
+            <a:custGeom>
+              <a:avLst/>
+              <a:gdLst>
+                <a:gd name="connsiteX0" fmla="*/ 4053340 w 6859500"/>
+                <a:gd name="connsiteY0" fmla="*/ 6235893 h 6859500"/>
+                <a:gd name="connsiteX1" fmla="*/ 4053340 w 6859500"/>
+                <a:gd name="connsiteY1" fmla="*/ 4053340 h 6859500"/>
+                <a:gd name="connsiteX2" fmla="*/ 6235893 w 6859500"/>
+                <a:gd name="connsiteY2" fmla="*/ 4053340 h 6859500"/>
+                <a:gd name="connsiteX3" fmla="*/ 6859501 w 6859500"/>
+                <a:gd name="connsiteY3" fmla="*/ 3429731 h 6859500"/>
+                <a:gd name="connsiteX4" fmla="*/ 6235893 w 6859500"/>
+                <a:gd name="connsiteY4" fmla="*/ 2806123 h 6859500"/>
+                <a:gd name="connsiteX5" fmla="*/ 4053340 w 6859500"/>
+                <a:gd name="connsiteY5" fmla="*/ 2806123 h 6859500"/>
+                <a:gd name="connsiteX6" fmla="*/ 4053340 w 6859500"/>
+                <a:gd name="connsiteY6" fmla="*/ 623608 h 6859500"/>
+                <a:gd name="connsiteX7" fmla="*/ 3429731 w 6859500"/>
+                <a:gd name="connsiteY7" fmla="*/ 0 h 6859500"/>
+                <a:gd name="connsiteX8" fmla="*/ 2806123 w 6859500"/>
+                <a:gd name="connsiteY8" fmla="*/ 623608 h 6859500"/>
+                <a:gd name="connsiteX9" fmla="*/ 2806123 w 6859500"/>
+                <a:gd name="connsiteY9" fmla="*/ 2806161 h 6859500"/>
+                <a:gd name="connsiteX10" fmla="*/ 623608 w 6859500"/>
+                <a:gd name="connsiteY10" fmla="*/ 2806161 h 6859500"/>
+                <a:gd name="connsiteX11" fmla="*/ 0 w 6859500"/>
+                <a:gd name="connsiteY11" fmla="*/ 3429731 h 6859500"/>
+                <a:gd name="connsiteX12" fmla="*/ 623608 w 6859500"/>
+                <a:gd name="connsiteY12" fmla="*/ 4053340 h 6859500"/>
+                <a:gd name="connsiteX13" fmla="*/ 2806161 w 6859500"/>
+                <a:gd name="connsiteY13" fmla="*/ 4053340 h 6859500"/>
+                <a:gd name="connsiteX14" fmla="*/ 2806161 w 6859500"/>
+                <a:gd name="connsiteY14" fmla="*/ 6235893 h 6859500"/>
+                <a:gd name="connsiteX15" fmla="*/ 3429770 w 6859500"/>
+                <a:gd name="connsiteY15" fmla="*/ 6859501 h 6859500"/>
+                <a:gd name="connsiteX16" fmla="*/ 4053340 w 6859500"/>
+                <a:gd name="connsiteY16" fmla="*/ 6235893 h 6859500"/>
+              </a:gdLst>
+              <a:ahLst/>
+              <a:cxnLst>
+                <a:cxn ang="0">
+                  <a:pos x="connsiteX0" y="connsiteY0"/>
+                </a:cxn>
+                <a:cxn ang="0">
+                  <a:pos x="connsiteX1" y="connsiteY1"/>
+                </a:cxn>
+                <a:cxn ang="0">
+                  <a:pos x="connsiteX2" y="connsiteY2"/>
+                </a:cxn>
+                <a:cxn ang="0">
+                  <a:pos x="connsiteX3" y="connsiteY3"/>
+                </a:cxn>
+                <a:cxn ang="0">
+                  <a:pos x="connsiteX4" y="connsiteY4"/>
+                </a:cxn>
+                <a:cxn ang="0">
+                  <a:pos x="connsiteX5" y="connsiteY5"/>
+                </a:cxn>
+                <a:cxn ang="0">
+                  <a:pos x="connsiteX6" y="connsiteY6"/>
+                </a:cxn>
+                <a:cxn ang="0">
+                  <a:pos x="connsiteX7" y="connsiteY7"/>
+                </a:cxn>
+                <a:cxn ang="0">
+                  <a:pos x="connsiteX8" y="connsiteY8"/>
+                </a:cxn>
+                <a:cxn ang="0">
+                  <a:pos x="connsiteX9" y="connsiteY9"/>
+                </a:cxn>
+                <a:cxn ang="0">
+                  <a:pos x="connsiteX10" y="connsiteY10"/>
+                </a:cxn>
+                <a:cxn ang="0">
+                  <a:pos x="connsiteX11" y="connsiteY11"/>
+                </a:cxn>
+                <a:cxn ang="0">
+                  <a:pos x="connsiteX12" y="connsiteY12"/>
+                </a:cxn>
+                <a:cxn ang="0">
+                  <a:pos x="connsiteX13" y="connsiteY13"/>
+                </a:cxn>
+                <a:cxn ang="0">
+                  <a:pos x="connsiteX14" y="connsiteY14"/>
+                </a:cxn>
+                <a:cxn ang="0">
+                  <a:pos x="connsiteX15" y="connsiteY15"/>
+                </a:cxn>
+                <a:cxn ang="0">
+                  <a:pos x="connsiteX16" y="connsiteY16"/>
+                </a:cxn>
+              </a:cxnLst>
+              <a:rect l="l" t="t" r="r" b="b"/>
+              <a:pathLst>
+                <a:path w="6859500" h="6859500">
+                  <a:moveTo>
+                    <a:pt x="4053340" y="6235893"/>
+                  </a:moveTo>
+                  <a:lnTo>
+                    <a:pt x="4053340" y="4053340"/>
+                  </a:lnTo>
+                  <a:lnTo>
+                    <a:pt x="6235893" y="4053340"/>
+                  </a:lnTo>
+                  <a:cubicBezTo>
+                    <a:pt x="6580293" y="4053340"/>
+                    <a:pt x="6859501" y="3774132"/>
+                    <a:pt x="6859501" y="3429731"/>
+                  </a:cubicBezTo>
+                  <a:cubicBezTo>
+                    <a:pt x="6859501" y="3085330"/>
+                    <a:pt x="6580332" y="2806123"/>
+                    <a:pt x="6235893" y="2806123"/>
+                  </a:cubicBezTo>
+                  <a:lnTo>
+                    <a:pt x="4053340" y="2806123"/>
+                  </a:lnTo>
+                  <a:lnTo>
+                    <a:pt x="4053340" y="623608"/>
+                  </a:lnTo>
+                  <a:cubicBezTo>
+                    <a:pt x="4053340" y="279208"/>
+                    <a:pt x="3774171" y="0"/>
+                    <a:pt x="3429731" y="0"/>
+                  </a:cubicBezTo>
+                  <a:cubicBezTo>
+                    <a:pt x="3085330" y="0"/>
+                    <a:pt x="2806123" y="279208"/>
+                    <a:pt x="2806123" y="623608"/>
+                  </a:cubicBezTo>
+                  <a:lnTo>
+                    <a:pt x="2806123" y="2806161"/>
+                  </a:lnTo>
+                  <a:lnTo>
+                    <a:pt x="623608" y="2806161"/>
+                  </a:lnTo>
+                  <a:cubicBezTo>
+                    <a:pt x="279208" y="2806161"/>
+                    <a:pt x="0" y="3085369"/>
+                    <a:pt x="0" y="3429731"/>
+                  </a:cubicBezTo>
+                  <a:cubicBezTo>
+                    <a:pt x="0" y="3774132"/>
+                    <a:pt x="279208" y="4053340"/>
+                    <a:pt x="623608" y="4053340"/>
+                  </a:cubicBezTo>
+                  <a:lnTo>
+                    <a:pt x="2806161" y="4053340"/>
+                  </a:lnTo>
+                  <a:lnTo>
+                    <a:pt x="2806161" y="6235893"/>
+                  </a:lnTo>
+                  <a:cubicBezTo>
+                    <a:pt x="2806161" y="6580293"/>
+                    <a:pt x="3085369" y="6859501"/>
+                    <a:pt x="3429770" y="6859501"/>
+                  </a:cubicBezTo>
+                  <a:cubicBezTo>
+                    <a:pt x="3774171" y="6859501"/>
+                    <a:pt x="4053340" y="6580293"/>
+                    <a:pt x="4053340" y="6235893"/>
+                  </a:cubicBezTo>
+                  <a:close/>
+                </a:path>
+              </a:pathLst>
+            </a:custGeom>
+            <a:ln w="3848" cap="flat">
+              <a:noFill/>
+              <a:prstDash val="solid"/>
+              <a:miter/>
+            </a:ln>
+            <a:effectLst>
+              <a:glow rad="152400">
+                <a:srgbClr val="000000">
+                  <a:alpha val="4000"/>
+                </a:srgbClr>
+              </a:glow>
+              <a:outerShdw blurRad="101600" dist="38100" dir="16200000" rotWithShape="0">
+                <a:srgbClr val="000000">
+                  <a:alpha val="5000"/>
+                </a:srgbClr>
+              </a:outerShdw>
+            </a:effectLst>
+          </p:spPr>
+          <p:txBody>
+            <a:bodyPr rtlCol="0" anchor="ctr"/>
+            <a:lstStyle/>
+            <a:p>
+              <a:endParaRPr lang="en-US" dirty="0"/>
+            </a:p>
+          </p:txBody>
+        </p:sp>
+        <p:sp useBgFill="1">
+          <p:nvSpPr>
+            <p:cNvPr id="29" name="Graphic 10">
+              <a:extLst>
+                <a:ext uri="{FF2B5EF4-FFF2-40B4-BE49-F238E27FC236}">
+                  <a16:creationId xmlns:a16="http://schemas.microsoft.com/office/drawing/2014/main" id="{DF5DA89C-9FED-4AE0-8C36-20612E77FAC0}"/>
+                </a:ext>
+                <a:ext uri="{C183D7F6-B498-43B3-948B-1728B52AA6E4}">
+                  <adec:decorative xmlns:adec="http://schemas.microsoft.com/office/drawing/2017/decorative" val="1"/>
+                </a:ext>
+              </a:extLst>
+            </p:cNvPr>
+            <p:cNvSpPr/>
+            <p:nvPr>
+              <p:extLst>
+                <p:ext uri="{386F3935-93C4-4BCD-93E2-E3B085C9AB24}">
+                  <p16:designElem xmlns:p16="http://schemas.microsoft.com/office/powerpoint/2015/main" val="1"/>
+                </p:ext>
+              </p:extLst>
+            </p:nvPr>
+          </p:nvSpPr>
+          <p:spPr>
+            <a:xfrm rot="2700000">
+              <a:off x="10578627" y="5015941"/>
+              <a:ext cx="925287" cy="925287"/>
+            </a:xfrm>
+            <a:custGeom>
+              <a:avLst/>
+              <a:gdLst>
+                <a:gd name="connsiteX0" fmla="*/ 4053340 w 6859500"/>
+                <a:gd name="connsiteY0" fmla="*/ 6235893 h 6859500"/>
+                <a:gd name="connsiteX1" fmla="*/ 4053340 w 6859500"/>
+                <a:gd name="connsiteY1" fmla="*/ 4053340 h 6859500"/>
+                <a:gd name="connsiteX2" fmla="*/ 6235893 w 6859500"/>
+                <a:gd name="connsiteY2" fmla="*/ 4053340 h 6859500"/>
+                <a:gd name="connsiteX3" fmla="*/ 6859501 w 6859500"/>
+                <a:gd name="connsiteY3" fmla="*/ 3429731 h 6859500"/>
+                <a:gd name="connsiteX4" fmla="*/ 6235893 w 6859500"/>
+                <a:gd name="connsiteY4" fmla="*/ 2806123 h 6859500"/>
+                <a:gd name="connsiteX5" fmla="*/ 4053340 w 6859500"/>
+                <a:gd name="connsiteY5" fmla="*/ 2806123 h 6859500"/>
+                <a:gd name="connsiteX6" fmla="*/ 4053340 w 6859500"/>
+                <a:gd name="connsiteY6" fmla="*/ 623608 h 6859500"/>
+                <a:gd name="connsiteX7" fmla="*/ 3429731 w 6859500"/>
+                <a:gd name="connsiteY7" fmla="*/ 0 h 6859500"/>
+                <a:gd name="connsiteX8" fmla="*/ 2806123 w 6859500"/>
+                <a:gd name="connsiteY8" fmla="*/ 623608 h 6859500"/>
+                <a:gd name="connsiteX9" fmla="*/ 2806123 w 6859500"/>
+                <a:gd name="connsiteY9" fmla="*/ 2806161 h 6859500"/>
+                <a:gd name="connsiteX10" fmla="*/ 623608 w 6859500"/>
+                <a:gd name="connsiteY10" fmla="*/ 2806161 h 6859500"/>
+                <a:gd name="connsiteX11" fmla="*/ 0 w 6859500"/>
+                <a:gd name="connsiteY11" fmla="*/ 3429731 h 6859500"/>
+                <a:gd name="connsiteX12" fmla="*/ 623608 w 6859500"/>
+                <a:gd name="connsiteY12" fmla="*/ 4053340 h 6859500"/>
+                <a:gd name="connsiteX13" fmla="*/ 2806161 w 6859500"/>
+                <a:gd name="connsiteY13" fmla="*/ 4053340 h 6859500"/>
+                <a:gd name="connsiteX14" fmla="*/ 2806161 w 6859500"/>
+                <a:gd name="connsiteY14" fmla="*/ 6235893 h 6859500"/>
+                <a:gd name="connsiteX15" fmla="*/ 3429770 w 6859500"/>
+                <a:gd name="connsiteY15" fmla="*/ 6859501 h 6859500"/>
+                <a:gd name="connsiteX16" fmla="*/ 4053340 w 6859500"/>
+                <a:gd name="connsiteY16" fmla="*/ 6235893 h 6859500"/>
+              </a:gdLst>
+              <a:ahLst/>
+              <a:cxnLst>
+                <a:cxn ang="0">
+                  <a:pos x="connsiteX0" y="connsiteY0"/>
+                </a:cxn>
+                <a:cxn ang="0">
+                  <a:pos x="connsiteX1" y="connsiteY1"/>
+                </a:cxn>
+                <a:cxn ang="0">
+                  <a:pos x="connsiteX2" y="connsiteY2"/>
+                </a:cxn>
+                <a:cxn ang="0">
+                  <a:pos x="connsiteX3" y="connsiteY3"/>
+                </a:cxn>
+                <a:cxn ang="0">
+                  <a:pos x="connsiteX4" y="connsiteY4"/>
+                </a:cxn>
+                <a:cxn ang="0">
+                  <a:pos x="connsiteX5" y="connsiteY5"/>
+                </a:cxn>
+                <a:cxn ang="0">
+                  <a:pos x="connsiteX6" y="connsiteY6"/>
+                </a:cxn>
+                <a:cxn ang="0">
+                  <a:pos x="connsiteX7" y="connsiteY7"/>
+                </a:cxn>
+                <a:cxn ang="0">
+                  <a:pos x="connsiteX8" y="connsiteY8"/>
+                </a:cxn>
+                <a:cxn ang="0">
+                  <a:pos x="connsiteX9" y="connsiteY9"/>
+                </a:cxn>
+                <a:cxn ang="0">
+                  <a:pos x="connsiteX10" y="connsiteY10"/>
+                </a:cxn>
+                <a:cxn ang="0">
+                  <a:pos x="connsiteX11" y="connsiteY11"/>
+                </a:cxn>
+                <a:cxn ang="0">
+                  <a:pos x="connsiteX12" y="connsiteY12"/>
+                </a:cxn>
+                <a:cxn ang="0">
+                  <a:pos x="connsiteX13" y="connsiteY13"/>
+                </a:cxn>
+                <a:cxn ang="0">
+                  <a:pos x="connsiteX14" y="connsiteY14"/>
+                </a:cxn>
+                <a:cxn ang="0">
+                  <a:pos x="connsiteX15" y="connsiteY15"/>
+                </a:cxn>
+                <a:cxn ang="0">
+                  <a:pos x="connsiteX16" y="connsiteY16"/>
+                </a:cxn>
+              </a:cxnLst>
+              <a:rect l="l" t="t" r="r" b="b"/>
+              <a:pathLst>
+                <a:path w="6859500" h="6859500">
+                  <a:moveTo>
+                    <a:pt x="4053340" y="6235893"/>
+                  </a:moveTo>
+                  <a:lnTo>
+                    <a:pt x="4053340" y="4053340"/>
+                  </a:lnTo>
+                  <a:lnTo>
+                    <a:pt x="6235893" y="4053340"/>
+                  </a:lnTo>
+                  <a:cubicBezTo>
+                    <a:pt x="6580293" y="4053340"/>
+                    <a:pt x="6859501" y="3774132"/>
+                    <a:pt x="6859501" y="3429731"/>
+                  </a:cubicBezTo>
+                  <a:cubicBezTo>
+                    <a:pt x="6859501" y="3085330"/>
+                    <a:pt x="6580332" y="2806123"/>
+                    <a:pt x="6235893" y="2806123"/>
+                  </a:cubicBezTo>
+                  <a:lnTo>
+                    <a:pt x="4053340" y="2806123"/>
+                  </a:lnTo>
+                  <a:lnTo>
+                    <a:pt x="4053340" y="623608"/>
+                  </a:lnTo>
+                  <a:cubicBezTo>
+                    <a:pt x="4053340" y="279208"/>
+                    <a:pt x="3774171" y="0"/>
+                    <a:pt x="3429731" y="0"/>
+                  </a:cubicBezTo>
+                  <a:cubicBezTo>
+                    <a:pt x="3085330" y="0"/>
+                    <a:pt x="2806123" y="279208"/>
+                    <a:pt x="2806123" y="623608"/>
+                  </a:cubicBezTo>
+                  <a:lnTo>
+                    <a:pt x="2806123" y="2806161"/>
+                  </a:lnTo>
+                  <a:lnTo>
+                    <a:pt x="623608" y="2806161"/>
+                  </a:lnTo>
+                  <a:cubicBezTo>
+                    <a:pt x="279208" y="2806161"/>
+                    <a:pt x="0" y="3085369"/>
+                    <a:pt x="0" y="3429731"/>
+                  </a:cubicBezTo>
+                  <a:cubicBezTo>
+                    <a:pt x="0" y="3774132"/>
+                    <a:pt x="279208" y="4053340"/>
+                    <a:pt x="623608" y="4053340"/>
+                  </a:cubicBezTo>
+                  <a:lnTo>
+                    <a:pt x="2806161" y="4053340"/>
+                  </a:lnTo>
+                  <a:lnTo>
+                    <a:pt x="2806161" y="6235893"/>
+                  </a:lnTo>
+                  <a:cubicBezTo>
+                    <a:pt x="2806161" y="6580293"/>
+                    <a:pt x="3085369" y="6859501"/>
+                    <a:pt x="3429770" y="6859501"/>
+                  </a:cubicBezTo>
+                  <a:cubicBezTo>
+                    <a:pt x="3774171" y="6859501"/>
+                    <a:pt x="4053340" y="6580293"/>
+                    <a:pt x="4053340" y="6235893"/>
+                  </a:cubicBezTo>
+                  <a:close/>
+                </a:path>
+              </a:pathLst>
+            </a:custGeom>
+            <a:ln w="3848" cap="flat">
+              <a:noFill/>
+              <a:prstDash val="solid"/>
+              <a:miter/>
+            </a:ln>
+            <a:effectLst>
+              <a:glow rad="152400">
+                <a:srgbClr val="000000">
+                  <a:alpha val="4000"/>
+                </a:srgbClr>
+              </a:glow>
+              <a:outerShdw blurRad="101600" dist="38100" dir="16200000" rotWithShape="0">
+                <a:srgbClr val="000000">
+                  <a:alpha val="5000"/>
+                </a:srgbClr>
+              </a:outerShdw>
+            </a:effectLst>
+          </p:spPr>
+          <p:txBody>
+            <a:bodyPr rtlCol="0" anchor="ctr"/>
+            <a:lstStyle/>
+            <a:p>
+              <a:endParaRPr lang="en-US" dirty="0"/>
+            </a:p>
+          </p:txBody>
+        </p:sp>
+        <p:sp useBgFill="1">
+          <p:nvSpPr>
+            <p:cNvPr id="30" name="Oval 29">
+              <a:extLst>
+                <a:ext uri="{FF2B5EF4-FFF2-40B4-BE49-F238E27FC236}">
+                  <a16:creationId xmlns:a16="http://schemas.microsoft.com/office/drawing/2014/main" id="{FB98224C-F1DB-4F10-9B7F-93B86BA13F40}"/>
+                </a:ext>
+                <a:ext uri="{C183D7F6-B498-43B3-948B-1728B52AA6E4}">
+                  <adec:decorative xmlns:adec="http://schemas.microsoft.com/office/drawing/2017/decorative" val="1"/>
+                </a:ext>
+              </a:extLst>
+            </p:cNvPr>
+            <p:cNvSpPr/>
+            <p:nvPr>
+              <p:extLst>
+                <p:ext uri="{386F3935-93C4-4BCD-93E2-E3B085C9AB24}">
+                  <p16:designElem xmlns:p16="http://schemas.microsoft.com/office/powerpoint/2015/main" val="1"/>
+                </p:ext>
+              </p:extLst>
+            </p:nvPr>
+          </p:nvSpPr>
+          <p:spPr>
+            <a:xfrm rot="10800000">
+              <a:off x="11622685" y="6102941"/>
+              <a:ext cx="261660" cy="261660"/>
+            </a:xfrm>
+            <a:prstGeom prst="ellipse">
+              <a:avLst/>
+            </a:prstGeom>
+            <a:ln w="3848" cap="flat">
+              <a:noFill/>
+              <a:prstDash val="solid"/>
+              <a:miter/>
+            </a:ln>
+            <a:effectLst>
+              <a:glow rad="152400">
+                <a:srgbClr val="000000">
+                  <a:alpha val="4000"/>
+                </a:srgbClr>
+              </a:glow>
+              <a:outerShdw blurRad="101600" dist="38100" dir="16200000" rotWithShape="0">
+                <a:srgbClr val="000000">
+                  <a:alpha val="5000"/>
+                </a:srgbClr>
+              </a:outerShdw>
+            </a:effectLst>
+          </p:spPr>
+          <p:txBody>
+            <a:bodyPr rtlCol="0" anchor="ctr"/>
+            <a:lstStyle/>
+            <a:p>
+              <a:endParaRPr lang="en-US"/>
+            </a:p>
+          </p:txBody>
+        </p:sp>
+        <p:sp useBgFill="1">
+          <p:nvSpPr>
+            <p:cNvPr id="31" name="Oval 30">
+              <a:extLst>
+                <a:ext uri="{FF2B5EF4-FFF2-40B4-BE49-F238E27FC236}">
+                  <a16:creationId xmlns:a16="http://schemas.microsoft.com/office/drawing/2014/main" id="{9AE1FC9E-06C9-4A12-8BE7-766C3DA8B9AC}"/>
+                </a:ext>
+                <a:ext uri="{C183D7F6-B498-43B3-948B-1728B52AA6E4}">
+                  <adec:decorative xmlns:adec="http://schemas.microsoft.com/office/drawing/2017/decorative" val="1"/>
+                </a:ext>
+              </a:extLst>
+            </p:cNvPr>
+            <p:cNvSpPr/>
+            <p:nvPr>
+              <p:extLst>
+                <p:ext uri="{386F3935-93C4-4BCD-93E2-E3B085C9AB24}">
+                  <p16:designElem xmlns:p16="http://schemas.microsoft.com/office/powerpoint/2015/main" val="1"/>
+                </p:ext>
+              </p:extLst>
+            </p:nvPr>
+          </p:nvSpPr>
+          <p:spPr>
+            <a:xfrm rot="10800000">
+              <a:off x="11352354" y="406586"/>
+              <a:ext cx="474023" cy="474023"/>
+            </a:xfrm>
+            <a:prstGeom prst="ellipse">
+              <a:avLst/>
+            </a:prstGeom>
+            <a:ln w="3848" cap="flat">
+              <a:noFill/>
+              <a:prstDash val="solid"/>
+              <a:miter/>
+            </a:ln>
+            <a:effectLst>
+              <a:glow rad="152400">
+                <a:srgbClr val="000000">
+                  <a:alpha val="4000"/>
+                </a:srgbClr>
+              </a:glow>
+              <a:outerShdw blurRad="101600" dist="38100" dir="16200000" rotWithShape="0">
+                <a:srgbClr val="000000">
+                  <a:alpha val="5000"/>
+                </a:srgbClr>
+              </a:outerShdw>
+            </a:effectLst>
+          </p:spPr>
+          <p:txBody>
+            <a:bodyPr rtlCol="0" anchor="ctr"/>
+            <a:lstStyle/>
+            <a:p>
+              <a:endParaRPr lang="en-US"/>
+            </a:p>
+          </p:txBody>
+        </p:sp>
+        <p:sp useBgFill="1">
+          <p:nvSpPr>
+            <p:cNvPr id="32" name="Oval 31">
+              <a:extLst>
+                <a:ext uri="{FF2B5EF4-FFF2-40B4-BE49-F238E27FC236}">
+                  <a16:creationId xmlns:a16="http://schemas.microsoft.com/office/drawing/2014/main" id="{29954B75-D8C7-439C-A014-E644E3E2C0A5}"/>
+                </a:ext>
+                <a:ext uri="{C183D7F6-B498-43B3-948B-1728B52AA6E4}">
+                  <adec:decorative xmlns:adec="http://schemas.microsoft.com/office/drawing/2017/decorative" val="1"/>
+                </a:ext>
+              </a:extLst>
+            </p:cNvPr>
+            <p:cNvSpPr/>
+            <p:nvPr>
+              <p:extLst>
+                <p:ext uri="{386F3935-93C4-4BCD-93E2-E3B085C9AB24}">
+                  <p16:designElem xmlns:p16="http://schemas.microsoft.com/office/powerpoint/2015/main" val="1"/>
+                </p:ext>
+              </p:extLst>
+            </p:nvPr>
+          </p:nvSpPr>
+          <p:spPr>
+            <a:xfrm rot="10800000">
+              <a:off x="1678231" y="427615"/>
+              <a:ext cx="334385" cy="334385"/>
+            </a:xfrm>
+            <a:prstGeom prst="ellipse">
+              <a:avLst/>
+            </a:prstGeom>
+            <a:ln w="3848" cap="flat">
+              <a:noFill/>
+              <a:prstDash val="solid"/>
+              <a:miter/>
+            </a:ln>
+            <a:effectLst>
+              <a:glow rad="152400">
+                <a:srgbClr val="000000">
+                  <a:alpha val="4000"/>
+                </a:srgbClr>
+              </a:glow>
+              <a:outerShdw blurRad="101600" dist="38100" dir="16200000" rotWithShape="0">
+                <a:srgbClr val="000000">
+                  <a:alpha val="5000"/>
+                </a:srgbClr>
+              </a:outerShdw>
+            </a:effectLst>
+          </p:spPr>
+          <p:txBody>
+            <a:bodyPr rtlCol="0" anchor="ctr"/>
+            <a:lstStyle/>
+            <a:p>
+              <a:endParaRPr lang="en-US" dirty="0"/>
+            </a:p>
+          </p:txBody>
+        </p:sp>
+      </p:grpSp>
       <p:sp useBgFill="1">
         <p:nvSpPr>
-          <p:cNvPr id="8" name="Rectangle 7">
+          <p:cNvPr id="51" name="Rectangle 50">
             <a:extLst>
               <a:ext uri="{FF2B5EF4-FFF2-40B4-BE49-F238E27FC236}">
-                <a16:creationId xmlns:a16="http://schemas.microsoft.com/office/drawing/2014/main" id="{25AD4A59-91FA-4E30-8F32-A8AB51F768C6}"/>
+                <a16:creationId xmlns:a16="http://schemas.microsoft.com/office/drawing/2014/main" id="{4E1EF4E8-5513-4BF5-BC41-04645281C672}"/>
               </a:ext>
               <a:ext uri="{C183D7F6-B498-43B3-948B-1728B52AA6E4}">
                 <adec:decorative xmlns:adec="http://schemas.microsoft.com/office/drawing/2017/decorative" val="1"/>
@@ -23762,10 +24595,10 @@
       </p:sp>
       <p:sp>
         <p:nvSpPr>
-          <p:cNvPr id="10" name="Rectangle 9">
+          <p:cNvPr id="52" name="Rectangle 51">
             <a:extLst>
               <a:ext uri="{FF2B5EF4-FFF2-40B4-BE49-F238E27FC236}">
-                <a16:creationId xmlns:a16="http://schemas.microsoft.com/office/drawing/2014/main" id="{CDFF45EF-8068-49B8-AFAE-404F6EB18882}"/>
+                <a16:creationId xmlns:a16="http://schemas.microsoft.com/office/drawing/2014/main" id="{361EA5BB-A258-4E22-94F4-C79A441363DA}"/>
               </a:ext>
               <a:ext uri="{C183D7F6-B498-43B3-948B-1728B52AA6E4}">
                 <adec:decorative xmlns:adec="http://schemas.microsoft.com/office/drawing/2017/decorative" val="1"/>
@@ -23815,75 +24648,12 @@
           </a:p>
         </p:txBody>
       </p:sp>
-      <p:sp>
-        <p:nvSpPr>
-          <p:cNvPr id="12" name="Rectangle 11">
+      <p:grpSp>
+        <p:nvGrpSpPr>
+          <p:cNvPr id="53" name="Group 52">
             <a:extLst>
               <a:ext uri="{FF2B5EF4-FFF2-40B4-BE49-F238E27FC236}">
-                <a16:creationId xmlns:a16="http://schemas.microsoft.com/office/drawing/2014/main" id="{301212FA-3FAE-4729-825F-6618CD414679}"/>
-              </a:ext>
-              <a:ext uri="{C183D7F6-B498-43B3-948B-1728B52AA6E4}">
-                <adec:decorative xmlns:adec="http://schemas.microsoft.com/office/drawing/2017/decorative" val="1"/>
-              </a:ext>
-            </a:extLst>
-          </p:cNvPr>
-          <p:cNvSpPr>
-            <a:spLocks noGrp="1" noRot="1" noChangeAspect="1" noMove="1" noResize="1" noEditPoints="1" noAdjustHandles="1" noChangeArrowheads="1" noChangeShapeType="1" noTextEdit="1"/>
-          </p:cNvSpPr>
-          <p:nvPr>
-            <p:extLst>
-              <p:ext uri="{386F3935-93C4-4BCD-93E2-E3B085C9AB24}">
-                <p16:designElem xmlns:p16="http://schemas.microsoft.com/office/powerpoint/2015/main" val="1"/>
-              </p:ext>
-            </p:extLst>
-          </p:nvPr>
-        </p:nvSpPr>
-        <p:spPr>
-          <a:xfrm>
-            <a:off x="-6214" y="-2"/>
-            <a:ext cx="12188952" cy="6858001"/>
-          </a:xfrm>
-          <a:prstGeom prst="rect">
-            <a:avLst/>
-          </a:prstGeom>
-          <a:solidFill>
-            <a:schemeClr val="accent2"/>
-          </a:solidFill>
-          <a:ln>
-            <a:noFill/>
-          </a:ln>
-        </p:spPr>
-        <p:style>
-          <a:lnRef idx="2">
-            <a:schemeClr val="accent1">
-              <a:shade val="50000"/>
-            </a:schemeClr>
-          </a:lnRef>
-          <a:fillRef idx="1">
-            <a:schemeClr val="accent1"/>
-          </a:fillRef>
-          <a:effectRef idx="0">
-            <a:schemeClr val="accent1"/>
-          </a:effectRef>
-          <a:fontRef idx="minor">
-            <a:schemeClr val="lt1"/>
-          </a:fontRef>
-        </p:style>
-        <p:txBody>
-          <a:bodyPr rtlCol="0" anchor="ctr"/>
-          <a:lstStyle/>
-          <a:p>
-            <a:pPr algn="ctr"/>
-            <a:endParaRPr lang="en-US"/>
-          </a:p>
-        </p:txBody>
-      </p:sp>
-      <p:grpSp>
-        <p:nvGrpSpPr>
-          <p:cNvPr id="14" name="Group 13">
-            <a:extLst>
-              <a:ext uri="{FF2B5EF4-FFF2-40B4-BE49-F238E27FC236}">
-                <a16:creationId xmlns:a16="http://schemas.microsoft.com/office/drawing/2014/main" id="{5C921CEF-5829-422A-8B7E-C7CFB1148FD7}"/>
+                <a16:creationId xmlns:a16="http://schemas.microsoft.com/office/drawing/2014/main" id="{AF7B2BB7-8E22-4794-9BDE-B71129D776FE}"/>
               </a:ext>
               <a:ext uri="{C183D7F6-B498-43B3-948B-1728B52AA6E4}">
                 <adec:decorative xmlns:adec="http://schemas.microsoft.com/office/drawing/2017/decorative" val="1"/>
@@ -23903,18 +24673,18 @@
         </p:nvGrpSpPr>
         <p:grpSpPr>
           <a:xfrm>
-            <a:off x="34766" y="168477"/>
-            <a:ext cx="11959928" cy="6064877"/>
-            <a:chOff x="34766" y="168477"/>
-            <a:chExt cx="11959928" cy="6064877"/>
+            <a:off x="207697" y="189413"/>
+            <a:ext cx="2019905" cy="1778845"/>
+            <a:chOff x="207697" y="189413"/>
+            <a:chExt cx="2019905" cy="1778845"/>
           </a:xfrm>
         </p:grpSpPr>
-        <p:sp>
+        <p:sp useBgFill="1">
           <p:nvSpPr>
-            <p:cNvPr id="15" name="Graphic 10">
+            <p:cNvPr id="39" name="Graphic 10">
               <a:extLst>
                 <a:ext uri="{FF2B5EF4-FFF2-40B4-BE49-F238E27FC236}">
-                  <a16:creationId xmlns:a16="http://schemas.microsoft.com/office/drawing/2014/main" id="{5C623D89-3F4C-41A4-A696-39EE558586DE}"/>
+                  <a16:creationId xmlns:a16="http://schemas.microsoft.com/office/drawing/2014/main" id="{F2CC297A-905C-42B8-BFEC-55FB2FCF2EEF}"/>
                 </a:ext>
                 <a:ext uri="{C183D7F6-B498-43B3-948B-1728B52AA6E4}">
                   <adec:decorative xmlns:adec="http://schemas.microsoft.com/office/drawing/2017/decorative" val="1"/>
@@ -23932,8 +24702,8 @@
           </p:nvSpPr>
           <p:spPr>
             <a:xfrm rot="2700000">
-              <a:off x="34766" y="455426"/>
-              <a:ext cx="1349244" cy="1349244"/>
+              <a:off x="207697" y="189413"/>
+              <a:ext cx="1261009" cy="1261009"/>
             </a:xfrm>
             <a:custGeom>
               <a:avLst/>
@@ -24101,450 +24871,20 @@
                 </a:path>
               </a:pathLst>
             </a:custGeom>
-            <a:solidFill>
-              <a:schemeClr val="accent2"/>
-            </a:solidFill>
             <a:ln w="3848" cap="flat">
               <a:noFill/>
               <a:prstDash val="solid"/>
               <a:miter/>
             </a:ln>
             <a:effectLst>
+              <a:glow rad="152400">
+                <a:srgbClr val="000000">
+                  <a:alpha val="4000"/>
+                </a:srgbClr>
+              </a:glow>
               <a:outerShdw blurRad="101600" dist="38100" dir="16200000" rotWithShape="0">
                 <a:srgbClr val="000000">
-                  <a:alpha val="25000"/>
-                </a:srgbClr>
-              </a:outerShdw>
-            </a:effectLst>
-          </p:spPr>
-          <p:txBody>
-            <a:bodyPr rtlCol="0" anchor="ctr"/>
-            <a:lstStyle/>
-            <a:p>
-              <a:endParaRPr lang="en-US" dirty="0"/>
-            </a:p>
-          </p:txBody>
-        </p:sp>
-        <p:sp>
-          <p:nvSpPr>
-            <p:cNvPr id="16" name="Graphic 10">
-              <a:extLst>
-                <a:ext uri="{FF2B5EF4-FFF2-40B4-BE49-F238E27FC236}">
-                  <a16:creationId xmlns:a16="http://schemas.microsoft.com/office/drawing/2014/main" id="{9C4EFFF5-2507-4FAC-94FF-5D4FC3E3F2CA}"/>
-                </a:ext>
-                <a:ext uri="{C183D7F6-B498-43B3-948B-1728B52AA6E4}">
-                  <adec:decorative xmlns:adec="http://schemas.microsoft.com/office/drawing/2017/decorative" val="1"/>
-                </a:ext>
-              </a:extLst>
-            </p:cNvPr>
-            <p:cNvSpPr/>
-            <p:nvPr>
-              <p:extLst>
-                <p:ext uri="{386F3935-93C4-4BCD-93E2-E3B085C9AB24}">
-                  <p16:designElem xmlns:p16="http://schemas.microsoft.com/office/powerpoint/2015/main" val="1"/>
-                </p:ext>
-              </p:extLst>
-            </p:nvPr>
-          </p:nvSpPr>
-          <p:spPr>
-            <a:xfrm rot="2700000">
-              <a:off x="2973121" y="455200"/>
-              <a:ext cx="485348" cy="485348"/>
-            </a:xfrm>
-            <a:custGeom>
-              <a:avLst/>
-              <a:gdLst>
-                <a:gd name="connsiteX0" fmla="*/ 4053340 w 6859500"/>
-                <a:gd name="connsiteY0" fmla="*/ 6235893 h 6859500"/>
-                <a:gd name="connsiteX1" fmla="*/ 4053340 w 6859500"/>
-                <a:gd name="connsiteY1" fmla="*/ 4053340 h 6859500"/>
-                <a:gd name="connsiteX2" fmla="*/ 6235893 w 6859500"/>
-                <a:gd name="connsiteY2" fmla="*/ 4053340 h 6859500"/>
-                <a:gd name="connsiteX3" fmla="*/ 6859501 w 6859500"/>
-                <a:gd name="connsiteY3" fmla="*/ 3429731 h 6859500"/>
-                <a:gd name="connsiteX4" fmla="*/ 6235893 w 6859500"/>
-                <a:gd name="connsiteY4" fmla="*/ 2806123 h 6859500"/>
-                <a:gd name="connsiteX5" fmla="*/ 4053340 w 6859500"/>
-                <a:gd name="connsiteY5" fmla="*/ 2806123 h 6859500"/>
-                <a:gd name="connsiteX6" fmla="*/ 4053340 w 6859500"/>
-                <a:gd name="connsiteY6" fmla="*/ 623608 h 6859500"/>
-                <a:gd name="connsiteX7" fmla="*/ 3429731 w 6859500"/>
-                <a:gd name="connsiteY7" fmla="*/ 0 h 6859500"/>
-                <a:gd name="connsiteX8" fmla="*/ 2806123 w 6859500"/>
-                <a:gd name="connsiteY8" fmla="*/ 623608 h 6859500"/>
-                <a:gd name="connsiteX9" fmla="*/ 2806123 w 6859500"/>
-                <a:gd name="connsiteY9" fmla="*/ 2806161 h 6859500"/>
-                <a:gd name="connsiteX10" fmla="*/ 623608 w 6859500"/>
-                <a:gd name="connsiteY10" fmla="*/ 2806161 h 6859500"/>
-                <a:gd name="connsiteX11" fmla="*/ 0 w 6859500"/>
-                <a:gd name="connsiteY11" fmla="*/ 3429731 h 6859500"/>
-                <a:gd name="connsiteX12" fmla="*/ 623608 w 6859500"/>
-                <a:gd name="connsiteY12" fmla="*/ 4053340 h 6859500"/>
-                <a:gd name="connsiteX13" fmla="*/ 2806161 w 6859500"/>
-                <a:gd name="connsiteY13" fmla="*/ 4053340 h 6859500"/>
-                <a:gd name="connsiteX14" fmla="*/ 2806161 w 6859500"/>
-                <a:gd name="connsiteY14" fmla="*/ 6235893 h 6859500"/>
-                <a:gd name="connsiteX15" fmla="*/ 3429770 w 6859500"/>
-                <a:gd name="connsiteY15" fmla="*/ 6859501 h 6859500"/>
-                <a:gd name="connsiteX16" fmla="*/ 4053340 w 6859500"/>
-                <a:gd name="connsiteY16" fmla="*/ 6235893 h 6859500"/>
-              </a:gdLst>
-              <a:ahLst/>
-              <a:cxnLst>
-                <a:cxn ang="0">
-                  <a:pos x="connsiteX0" y="connsiteY0"/>
-                </a:cxn>
-                <a:cxn ang="0">
-                  <a:pos x="connsiteX1" y="connsiteY1"/>
-                </a:cxn>
-                <a:cxn ang="0">
-                  <a:pos x="connsiteX2" y="connsiteY2"/>
-                </a:cxn>
-                <a:cxn ang="0">
-                  <a:pos x="connsiteX3" y="connsiteY3"/>
-                </a:cxn>
-                <a:cxn ang="0">
-                  <a:pos x="connsiteX4" y="connsiteY4"/>
-                </a:cxn>
-                <a:cxn ang="0">
-                  <a:pos x="connsiteX5" y="connsiteY5"/>
-                </a:cxn>
-                <a:cxn ang="0">
-                  <a:pos x="connsiteX6" y="connsiteY6"/>
-                </a:cxn>
-                <a:cxn ang="0">
-                  <a:pos x="connsiteX7" y="connsiteY7"/>
-                </a:cxn>
-                <a:cxn ang="0">
-                  <a:pos x="connsiteX8" y="connsiteY8"/>
-                </a:cxn>
-                <a:cxn ang="0">
-                  <a:pos x="connsiteX9" y="connsiteY9"/>
-                </a:cxn>
-                <a:cxn ang="0">
-                  <a:pos x="connsiteX10" y="connsiteY10"/>
-                </a:cxn>
-                <a:cxn ang="0">
-                  <a:pos x="connsiteX11" y="connsiteY11"/>
-                </a:cxn>
-                <a:cxn ang="0">
-                  <a:pos x="connsiteX12" y="connsiteY12"/>
-                </a:cxn>
-                <a:cxn ang="0">
-                  <a:pos x="connsiteX13" y="connsiteY13"/>
-                </a:cxn>
-                <a:cxn ang="0">
-                  <a:pos x="connsiteX14" y="connsiteY14"/>
-                </a:cxn>
-                <a:cxn ang="0">
-                  <a:pos x="connsiteX15" y="connsiteY15"/>
-                </a:cxn>
-                <a:cxn ang="0">
-                  <a:pos x="connsiteX16" y="connsiteY16"/>
-                </a:cxn>
-              </a:cxnLst>
-              <a:rect l="l" t="t" r="r" b="b"/>
-              <a:pathLst>
-                <a:path w="6859500" h="6859500">
-                  <a:moveTo>
-                    <a:pt x="4053340" y="6235893"/>
-                  </a:moveTo>
-                  <a:lnTo>
-                    <a:pt x="4053340" y="4053340"/>
-                  </a:lnTo>
-                  <a:lnTo>
-                    <a:pt x="6235893" y="4053340"/>
-                  </a:lnTo>
-                  <a:cubicBezTo>
-                    <a:pt x="6580293" y="4053340"/>
-                    <a:pt x="6859501" y="3774132"/>
-                    <a:pt x="6859501" y="3429731"/>
-                  </a:cubicBezTo>
-                  <a:cubicBezTo>
-                    <a:pt x="6859501" y="3085330"/>
-                    <a:pt x="6580332" y="2806123"/>
-                    <a:pt x="6235893" y="2806123"/>
-                  </a:cubicBezTo>
-                  <a:lnTo>
-                    <a:pt x="4053340" y="2806123"/>
-                  </a:lnTo>
-                  <a:lnTo>
-                    <a:pt x="4053340" y="623608"/>
-                  </a:lnTo>
-                  <a:cubicBezTo>
-                    <a:pt x="4053340" y="279208"/>
-                    <a:pt x="3774171" y="0"/>
-                    <a:pt x="3429731" y="0"/>
-                  </a:cubicBezTo>
-                  <a:cubicBezTo>
-                    <a:pt x="3085330" y="0"/>
-                    <a:pt x="2806123" y="279208"/>
-                    <a:pt x="2806123" y="623608"/>
-                  </a:cubicBezTo>
-                  <a:lnTo>
-                    <a:pt x="2806123" y="2806161"/>
-                  </a:lnTo>
-                  <a:lnTo>
-                    <a:pt x="623608" y="2806161"/>
-                  </a:lnTo>
-                  <a:cubicBezTo>
-                    <a:pt x="279208" y="2806161"/>
-                    <a:pt x="0" y="3085369"/>
-                    <a:pt x="0" y="3429731"/>
-                  </a:cubicBezTo>
-                  <a:cubicBezTo>
-                    <a:pt x="0" y="3774132"/>
-                    <a:pt x="279208" y="4053340"/>
-                    <a:pt x="623608" y="4053340"/>
-                  </a:cubicBezTo>
-                  <a:lnTo>
-                    <a:pt x="2806161" y="4053340"/>
-                  </a:lnTo>
-                  <a:lnTo>
-                    <a:pt x="2806161" y="6235893"/>
-                  </a:lnTo>
-                  <a:cubicBezTo>
-                    <a:pt x="2806161" y="6580293"/>
-                    <a:pt x="3085369" y="6859501"/>
-                    <a:pt x="3429770" y="6859501"/>
-                  </a:cubicBezTo>
-                  <a:cubicBezTo>
-                    <a:pt x="3774171" y="6859501"/>
-                    <a:pt x="4053340" y="6580293"/>
-                    <a:pt x="4053340" y="6235893"/>
-                  </a:cubicBezTo>
-                  <a:close/>
-                </a:path>
-              </a:pathLst>
-            </a:custGeom>
-            <a:solidFill>
-              <a:schemeClr val="accent2"/>
-            </a:solidFill>
-            <a:ln w="3848" cap="flat">
-              <a:noFill/>
-              <a:prstDash val="solid"/>
-              <a:miter/>
-            </a:ln>
-            <a:effectLst>
-              <a:outerShdw blurRad="101600" dist="38100" dir="16200000" rotWithShape="0">
-                <a:srgbClr val="000000">
-                  <a:alpha val="25000"/>
-                </a:srgbClr>
-              </a:outerShdw>
-            </a:effectLst>
-          </p:spPr>
-          <p:txBody>
-            <a:bodyPr rtlCol="0" anchor="ctr"/>
-            <a:lstStyle/>
-            <a:p>
-              <a:endParaRPr lang="en-US" dirty="0"/>
-            </a:p>
-          </p:txBody>
-        </p:sp>
-        <p:sp useBgFill="1">
-          <p:nvSpPr>
-            <p:cNvPr id="17" name="Graphic 10">
-              <a:extLst>
-                <a:ext uri="{FF2B5EF4-FFF2-40B4-BE49-F238E27FC236}">
-                  <a16:creationId xmlns:a16="http://schemas.microsoft.com/office/drawing/2014/main" id="{04BE7263-8990-44DD-90E4-60F654375676}"/>
-                </a:ext>
-                <a:ext uri="{C183D7F6-B498-43B3-948B-1728B52AA6E4}">
-                  <adec:decorative xmlns:adec="http://schemas.microsoft.com/office/drawing/2017/decorative" val="1"/>
-                </a:ext>
-              </a:extLst>
-            </p:cNvPr>
-            <p:cNvSpPr/>
-            <p:nvPr>
-              <p:extLst>
-                <p:ext uri="{386F3935-93C4-4BCD-93E2-E3B085C9AB24}">
-                  <p16:designElem xmlns:p16="http://schemas.microsoft.com/office/powerpoint/2015/main" val="1"/>
-                </p:ext>
-              </p:extLst>
-            </p:nvPr>
-          </p:nvSpPr>
-          <p:spPr>
-            <a:xfrm rot="2700000">
-              <a:off x="9551227" y="168477"/>
-              <a:ext cx="2322574" cy="2322574"/>
-            </a:xfrm>
-            <a:custGeom>
-              <a:avLst/>
-              <a:gdLst>
-                <a:gd name="connsiteX0" fmla="*/ 4053340 w 6859500"/>
-                <a:gd name="connsiteY0" fmla="*/ 6235893 h 6859500"/>
-                <a:gd name="connsiteX1" fmla="*/ 4053340 w 6859500"/>
-                <a:gd name="connsiteY1" fmla="*/ 4053340 h 6859500"/>
-                <a:gd name="connsiteX2" fmla="*/ 6235893 w 6859500"/>
-                <a:gd name="connsiteY2" fmla="*/ 4053340 h 6859500"/>
-                <a:gd name="connsiteX3" fmla="*/ 6859501 w 6859500"/>
-                <a:gd name="connsiteY3" fmla="*/ 3429731 h 6859500"/>
-                <a:gd name="connsiteX4" fmla="*/ 6235893 w 6859500"/>
-                <a:gd name="connsiteY4" fmla="*/ 2806123 h 6859500"/>
-                <a:gd name="connsiteX5" fmla="*/ 4053340 w 6859500"/>
-                <a:gd name="connsiteY5" fmla="*/ 2806123 h 6859500"/>
-                <a:gd name="connsiteX6" fmla="*/ 4053340 w 6859500"/>
-                <a:gd name="connsiteY6" fmla="*/ 623608 h 6859500"/>
-                <a:gd name="connsiteX7" fmla="*/ 3429731 w 6859500"/>
-                <a:gd name="connsiteY7" fmla="*/ 0 h 6859500"/>
-                <a:gd name="connsiteX8" fmla="*/ 2806123 w 6859500"/>
-                <a:gd name="connsiteY8" fmla="*/ 623608 h 6859500"/>
-                <a:gd name="connsiteX9" fmla="*/ 2806123 w 6859500"/>
-                <a:gd name="connsiteY9" fmla="*/ 2806161 h 6859500"/>
-                <a:gd name="connsiteX10" fmla="*/ 623608 w 6859500"/>
-                <a:gd name="connsiteY10" fmla="*/ 2806161 h 6859500"/>
-                <a:gd name="connsiteX11" fmla="*/ 0 w 6859500"/>
-                <a:gd name="connsiteY11" fmla="*/ 3429731 h 6859500"/>
-                <a:gd name="connsiteX12" fmla="*/ 623608 w 6859500"/>
-                <a:gd name="connsiteY12" fmla="*/ 4053340 h 6859500"/>
-                <a:gd name="connsiteX13" fmla="*/ 2806161 w 6859500"/>
-                <a:gd name="connsiteY13" fmla="*/ 4053340 h 6859500"/>
-                <a:gd name="connsiteX14" fmla="*/ 2806161 w 6859500"/>
-                <a:gd name="connsiteY14" fmla="*/ 6235893 h 6859500"/>
-                <a:gd name="connsiteX15" fmla="*/ 3429770 w 6859500"/>
-                <a:gd name="connsiteY15" fmla="*/ 6859501 h 6859500"/>
-                <a:gd name="connsiteX16" fmla="*/ 4053340 w 6859500"/>
-                <a:gd name="connsiteY16" fmla="*/ 6235893 h 6859500"/>
-              </a:gdLst>
-              <a:ahLst/>
-              <a:cxnLst>
-                <a:cxn ang="0">
-                  <a:pos x="connsiteX0" y="connsiteY0"/>
-                </a:cxn>
-                <a:cxn ang="0">
-                  <a:pos x="connsiteX1" y="connsiteY1"/>
-                </a:cxn>
-                <a:cxn ang="0">
-                  <a:pos x="connsiteX2" y="connsiteY2"/>
-                </a:cxn>
-                <a:cxn ang="0">
-                  <a:pos x="connsiteX3" y="connsiteY3"/>
-                </a:cxn>
-                <a:cxn ang="0">
-                  <a:pos x="connsiteX4" y="connsiteY4"/>
-                </a:cxn>
-                <a:cxn ang="0">
-                  <a:pos x="connsiteX5" y="connsiteY5"/>
-                </a:cxn>
-                <a:cxn ang="0">
-                  <a:pos x="connsiteX6" y="connsiteY6"/>
-                </a:cxn>
-                <a:cxn ang="0">
-                  <a:pos x="connsiteX7" y="connsiteY7"/>
-                </a:cxn>
-                <a:cxn ang="0">
-                  <a:pos x="connsiteX8" y="connsiteY8"/>
-                </a:cxn>
-                <a:cxn ang="0">
-                  <a:pos x="connsiteX9" y="connsiteY9"/>
-                </a:cxn>
-                <a:cxn ang="0">
-                  <a:pos x="connsiteX10" y="connsiteY10"/>
-                </a:cxn>
-                <a:cxn ang="0">
-                  <a:pos x="connsiteX11" y="connsiteY11"/>
-                </a:cxn>
-                <a:cxn ang="0">
-                  <a:pos x="connsiteX12" y="connsiteY12"/>
-                </a:cxn>
-                <a:cxn ang="0">
-                  <a:pos x="connsiteX13" y="connsiteY13"/>
-                </a:cxn>
-                <a:cxn ang="0">
-                  <a:pos x="connsiteX14" y="connsiteY14"/>
-                </a:cxn>
-                <a:cxn ang="0">
-                  <a:pos x="connsiteX15" y="connsiteY15"/>
-                </a:cxn>
-                <a:cxn ang="0">
-                  <a:pos x="connsiteX16" y="connsiteY16"/>
-                </a:cxn>
-              </a:cxnLst>
-              <a:rect l="l" t="t" r="r" b="b"/>
-              <a:pathLst>
-                <a:path w="6859500" h="6859500">
-                  <a:moveTo>
-                    <a:pt x="4053340" y="6235893"/>
-                  </a:moveTo>
-                  <a:lnTo>
-                    <a:pt x="4053340" y="4053340"/>
-                  </a:lnTo>
-                  <a:lnTo>
-                    <a:pt x="6235893" y="4053340"/>
-                  </a:lnTo>
-                  <a:cubicBezTo>
-                    <a:pt x="6580293" y="4053340"/>
-                    <a:pt x="6859501" y="3774132"/>
-                    <a:pt x="6859501" y="3429731"/>
-                  </a:cubicBezTo>
-                  <a:cubicBezTo>
-                    <a:pt x="6859501" y="3085330"/>
-                    <a:pt x="6580332" y="2806123"/>
-                    <a:pt x="6235893" y="2806123"/>
-                  </a:cubicBezTo>
-                  <a:lnTo>
-                    <a:pt x="4053340" y="2806123"/>
-                  </a:lnTo>
-                  <a:lnTo>
-                    <a:pt x="4053340" y="623608"/>
-                  </a:lnTo>
-                  <a:cubicBezTo>
-                    <a:pt x="4053340" y="279208"/>
-                    <a:pt x="3774171" y="0"/>
-                    <a:pt x="3429731" y="0"/>
-                  </a:cubicBezTo>
-                  <a:cubicBezTo>
-                    <a:pt x="3085330" y="0"/>
-                    <a:pt x="2806123" y="279208"/>
-                    <a:pt x="2806123" y="623608"/>
-                  </a:cubicBezTo>
-                  <a:lnTo>
-                    <a:pt x="2806123" y="2806161"/>
-                  </a:lnTo>
-                  <a:lnTo>
-                    <a:pt x="623608" y="2806161"/>
-                  </a:lnTo>
-                  <a:cubicBezTo>
-                    <a:pt x="279208" y="2806161"/>
-                    <a:pt x="0" y="3085369"/>
-                    <a:pt x="0" y="3429731"/>
-                  </a:cubicBezTo>
-                  <a:cubicBezTo>
-                    <a:pt x="0" y="3774132"/>
-                    <a:pt x="279208" y="4053340"/>
-                    <a:pt x="623608" y="4053340"/>
-                  </a:cubicBezTo>
-                  <a:lnTo>
-                    <a:pt x="2806161" y="4053340"/>
-                  </a:lnTo>
-                  <a:lnTo>
-                    <a:pt x="2806161" y="6235893"/>
-                  </a:lnTo>
-                  <a:cubicBezTo>
-                    <a:pt x="2806161" y="6580293"/>
-                    <a:pt x="3085369" y="6859501"/>
-                    <a:pt x="3429770" y="6859501"/>
-                  </a:cubicBezTo>
-                  <a:cubicBezTo>
-                    <a:pt x="3774171" y="6859501"/>
-                    <a:pt x="4053340" y="6580293"/>
-                    <a:pt x="4053340" y="6235893"/>
-                  </a:cubicBezTo>
-                  <a:close/>
-                </a:path>
-              </a:pathLst>
-            </a:custGeom>
-            <a:solidFill>
-              <a:schemeClr val="accent2"/>
-            </a:solidFill>
-            <a:ln w="3848" cap="flat">
-              <a:noFill/>
-              <a:prstDash val="solid"/>
-              <a:miter/>
-            </a:ln>
-            <a:effectLst>
-              <a:outerShdw blurRad="101600" dist="38100" dir="16200000" rotWithShape="0">
-                <a:srgbClr val="000000">
-                  <a:alpha val="25000"/>
+                  <a:alpha val="5000"/>
                 </a:srgbClr>
               </a:outerShdw>
             </a:effectLst>
@@ -24559,226 +24899,10 @@
         </p:sp>
         <p:sp useBgFill="1">
           <p:nvSpPr>
-            <p:cNvPr id="18" name="Graphic 10">
+            <p:cNvPr id="40" name="Oval 39">
               <a:extLst>
                 <a:ext uri="{FF2B5EF4-FFF2-40B4-BE49-F238E27FC236}">
-                  <a16:creationId xmlns:a16="http://schemas.microsoft.com/office/drawing/2014/main" id="{9467587E-F099-44B9-AD7C-578FDE476FB2}"/>
-                </a:ext>
-                <a:ext uri="{C183D7F6-B498-43B3-948B-1728B52AA6E4}">
-                  <adec:decorative xmlns:adec="http://schemas.microsoft.com/office/drawing/2017/decorative" val="1"/>
-                </a:ext>
-              </a:extLst>
-            </p:cNvPr>
-            <p:cNvSpPr/>
-            <p:nvPr>
-              <p:extLst>
-                <p:ext uri="{386F3935-93C4-4BCD-93E2-E3B085C9AB24}">
-                  <p16:designElem xmlns:p16="http://schemas.microsoft.com/office/powerpoint/2015/main" val="1"/>
-                </p:ext>
-              </p:extLst>
-            </p:nvPr>
-          </p:nvSpPr>
-          <p:spPr>
-            <a:xfrm rot="2700000">
-              <a:off x="10717017" y="5456180"/>
-              <a:ext cx="777174" cy="777174"/>
-            </a:xfrm>
-            <a:custGeom>
-              <a:avLst/>
-              <a:gdLst>
-                <a:gd name="connsiteX0" fmla="*/ 4053340 w 6859500"/>
-                <a:gd name="connsiteY0" fmla="*/ 6235893 h 6859500"/>
-                <a:gd name="connsiteX1" fmla="*/ 4053340 w 6859500"/>
-                <a:gd name="connsiteY1" fmla="*/ 4053340 h 6859500"/>
-                <a:gd name="connsiteX2" fmla="*/ 6235893 w 6859500"/>
-                <a:gd name="connsiteY2" fmla="*/ 4053340 h 6859500"/>
-                <a:gd name="connsiteX3" fmla="*/ 6859501 w 6859500"/>
-                <a:gd name="connsiteY3" fmla="*/ 3429731 h 6859500"/>
-                <a:gd name="connsiteX4" fmla="*/ 6235893 w 6859500"/>
-                <a:gd name="connsiteY4" fmla="*/ 2806123 h 6859500"/>
-                <a:gd name="connsiteX5" fmla="*/ 4053340 w 6859500"/>
-                <a:gd name="connsiteY5" fmla="*/ 2806123 h 6859500"/>
-                <a:gd name="connsiteX6" fmla="*/ 4053340 w 6859500"/>
-                <a:gd name="connsiteY6" fmla="*/ 623608 h 6859500"/>
-                <a:gd name="connsiteX7" fmla="*/ 3429731 w 6859500"/>
-                <a:gd name="connsiteY7" fmla="*/ 0 h 6859500"/>
-                <a:gd name="connsiteX8" fmla="*/ 2806123 w 6859500"/>
-                <a:gd name="connsiteY8" fmla="*/ 623608 h 6859500"/>
-                <a:gd name="connsiteX9" fmla="*/ 2806123 w 6859500"/>
-                <a:gd name="connsiteY9" fmla="*/ 2806161 h 6859500"/>
-                <a:gd name="connsiteX10" fmla="*/ 623608 w 6859500"/>
-                <a:gd name="connsiteY10" fmla="*/ 2806161 h 6859500"/>
-                <a:gd name="connsiteX11" fmla="*/ 0 w 6859500"/>
-                <a:gd name="connsiteY11" fmla="*/ 3429731 h 6859500"/>
-                <a:gd name="connsiteX12" fmla="*/ 623608 w 6859500"/>
-                <a:gd name="connsiteY12" fmla="*/ 4053340 h 6859500"/>
-                <a:gd name="connsiteX13" fmla="*/ 2806161 w 6859500"/>
-                <a:gd name="connsiteY13" fmla="*/ 4053340 h 6859500"/>
-                <a:gd name="connsiteX14" fmla="*/ 2806161 w 6859500"/>
-                <a:gd name="connsiteY14" fmla="*/ 6235893 h 6859500"/>
-                <a:gd name="connsiteX15" fmla="*/ 3429770 w 6859500"/>
-                <a:gd name="connsiteY15" fmla="*/ 6859501 h 6859500"/>
-                <a:gd name="connsiteX16" fmla="*/ 4053340 w 6859500"/>
-                <a:gd name="connsiteY16" fmla="*/ 6235893 h 6859500"/>
-              </a:gdLst>
-              <a:ahLst/>
-              <a:cxnLst>
-                <a:cxn ang="0">
-                  <a:pos x="connsiteX0" y="connsiteY0"/>
-                </a:cxn>
-                <a:cxn ang="0">
-                  <a:pos x="connsiteX1" y="connsiteY1"/>
-                </a:cxn>
-                <a:cxn ang="0">
-                  <a:pos x="connsiteX2" y="connsiteY2"/>
-                </a:cxn>
-                <a:cxn ang="0">
-                  <a:pos x="connsiteX3" y="connsiteY3"/>
-                </a:cxn>
-                <a:cxn ang="0">
-                  <a:pos x="connsiteX4" y="connsiteY4"/>
-                </a:cxn>
-                <a:cxn ang="0">
-                  <a:pos x="connsiteX5" y="connsiteY5"/>
-                </a:cxn>
-                <a:cxn ang="0">
-                  <a:pos x="connsiteX6" y="connsiteY6"/>
-                </a:cxn>
-                <a:cxn ang="0">
-                  <a:pos x="connsiteX7" y="connsiteY7"/>
-                </a:cxn>
-                <a:cxn ang="0">
-                  <a:pos x="connsiteX8" y="connsiteY8"/>
-                </a:cxn>
-                <a:cxn ang="0">
-                  <a:pos x="connsiteX9" y="connsiteY9"/>
-                </a:cxn>
-                <a:cxn ang="0">
-                  <a:pos x="connsiteX10" y="connsiteY10"/>
-                </a:cxn>
-                <a:cxn ang="0">
-                  <a:pos x="connsiteX11" y="connsiteY11"/>
-                </a:cxn>
-                <a:cxn ang="0">
-                  <a:pos x="connsiteX12" y="connsiteY12"/>
-                </a:cxn>
-                <a:cxn ang="0">
-                  <a:pos x="connsiteX13" y="connsiteY13"/>
-                </a:cxn>
-                <a:cxn ang="0">
-                  <a:pos x="connsiteX14" y="connsiteY14"/>
-                </a:cxn>
-                <a:cxn ang="0">
-                  <a:pos x="connsiteX15" y="connsiteY15"/>
-                </a:cxn>
-                <a:cxn ang="0">
-                  <a:pos x="connsiteX16" y="connsiteY16"/>
-                </a:cxn>
-              </a:cxnLst>
-              <a:rect l="l" t="t" r="r" b="b"/>
-              <a:pathLst>
-                <a:path w="6859500" h="6859500">
-                  <a:moveTo>
-                    <a:pt x="4053340" y="6235893"/>
-                  </a:moveTo>
-                  <a:lnTo>
-                    <a:pt x="4053340" y="4053340"/>
-                  </a:lnTo>
-                  <a:lnTo>
-                    <a:pt x="6235893" y="4053340"/>
-                  </a:lnTo>
-                  <a:cubicBezTo>
-                    <a:pt x="6580293" y="4053340"/>
-                    <a:pt x="6859501" y="3774132"/>
-                    <a:pt x="6859501" y="3429731"/>
-                  </a:cubicBezTo>
-                  <a:cubicBezTo>
-                    <a:pt x="6859501" y="3085330"/>
-                    <a:pt x="6580332" y="2806123"/>
-                    <a:pt x="6235893" y="2806123"/>
-                  </a:cubicBezTo>
-                  <a:lnTo>
-                    <a:pt x="4053340" y="2806123"/>
-                  </a:lnTo>
-                  <a:lnTo>
-                    <a:pt x="4053340" y="623608"/>
-                  </a:lnTo>
-                  <a:cubicBezTo>
-                    <a:pt x="4053340" y="279208"/>
-                    <a:pt x="3774171" y="0"/>
-                    <a:pt x="3429731" y="0"/>
-                  </a:cubicBezTo>
-                  <a:cubicBezTo>
-                    <a:pt x="3085330" y="0"/>
-                    <a:pt x="2806123" y="279208"/>
-                    <a:pt x="2806123" y="623608"/>
-                  </a:cubicBezTo>
-                  <a:lnTo>
-                    <a:pt x="2806123" y="2806161"/>
-                  </a:lnTo>
-                  <a:lnTo>
-                    <a:pt x="623608" y="2806161"/>
-                  </a:lnTo>
-                  <a:cubicBezTo>
-                    <a:pt x="279208" y="2806161"/>
-                    <a:pt x="0" y="3085369"/>
-                    <a:pt x="0" y="3429731"/>
-                  </a:cubicBezTo>
-                  <a:cubicBezTo>
-                    <a:pt x="0" y="3774132"/>
-                    <a:pt x="279208" y="4053340"/>
-                    <a:pt x="623608" y="4053340"/>
-                  </a:cubicBezTo>
-                  <a:lnTo>
-                    <a:pt x="2806161" y="4053340"/>
-                  </a:lnTo>
-                  <a:lnTo>
-                    <a:pt x="2806161" y="6235893"/>
-                  </a:lnTo>
-                  <a:cubicBezTo>
-                    <a:pt x="2806161" y="6580293"/>
-                    <a:pt x="3085369" y="6859501"/>
-                    <a:pt x="3429770" y="6859501"/>
-                  </a:cubicBezTo>
-                  <a:cubicBezTo>
-                    <a:pt x="3774171" y="6859501"/>
-                    <a:pt x="4053340" y="6580293"/>
-                    <a:pt x="4053340" y="6235893"/>
-                  </a:cubicBezTo>
-                  <a:close/>
-                </a:path>
-              </a:pathLst>
-            </a:custGeom>
-            <a:solidFill>
-              <a:schemeClr val="accent2"/>
-            </a:solidFill>
-            <a:ln w="3848" cap="flat">
-              <a:noFill/>
-              <a:prstDash val="solid"/>
-              <a:miter/>
-            </a:ln>
-            <a:effectLst>
-              <a:outerShdw blurRad="101600" dist="38100" dir="16200000" rotWithShape="0">
-                <a:srgbClr val="000000">
-                  <a:alpha val="25000"/>
-                </a:srgbClr>
-              </a:outerShdw>
-            </a:effectLst>
-          </p:spPr>
-          <p:txBody>
-            <a:bodyPr rtlCol="0" anchor="ctr"/>
-            <a:lstStyle/>
-            <a:p>
-              <a:endParaRPr lang="en-US"/>
-            </a:p>
-          </p:txBody>
-        </p:sp>
-        <p:sp>
-          <p:nvSpPr>
-            <p:cNvPr id="19" name="Oval 18">
-              <a:extLst>
-                <a:ext uri="{FF2B5EF4-FFF2-40B4-BE49-F238E27FC236}">
-                  <a16:creationId xmlns:a16="http://schemas.microsoft.com/office/drawing/2014/main" id="{DDDF32BB-D6CB-432E-B840-21CAE2BE38B4}"/>
+                  <a16:creationId xmlns:a16="http://schemas.microsoft.com/office/drawing/2014/main" id="{895FAF0E-8EDF-4055-9578-394F1ACB3C1F}"/>
                 </a:ext>
                 <a:ext uri="{C183D7F6-B498-43B3-948B-1728B52AA6E4}">
                   <adec:decorative xmlns:adec="http://schemas.microsoft.com/office/drawing/2017/decorative" val="1"/>
@@ -24796,24 +24920,26 @@
           </p:nvSpPr>
           <p:spPr>
             <a:xfrm rot="10800000">
-              <a:off x="2078970" y="1198934"/>
-              <a:ext cx="261660" cy="261660"/>
+              <a:off x="689661" y="1671181"/>
+              <a:ext cx="297077" cy="297077"/>
             </a:xfrm>
             <a:prstGeom prst="ellipse">
               <a:avLst/>
             </a:prstGeom>
-            <a:solidFill>
-              <a:schemeClr val="accent2"/>
-            </a:solidFill>
             <a:ln w="3848" cap="flat">
               <a:noFill/>
               <a:prstDash val="solid"/>
               <a:miter/>
             </a:ln>
             <a:effectLst>
+              <a:glow rad="152400">
+                <a:srgbClr val="000000">
+                  <a:alpha val="4000"/>
+                </a:srgbClr>
+              </a:glow>
               <a:outerShdw blurRad="101600" dist="38100" dir="16200000" rotWithShape="0">
                 <a:srgbClr val="000000">
-                  <a:alpha val="25000"/>
+                  <a:alpha val="5000"/>
                 </a:srgbClr>
               </a:outerShdw>
             </a:effectLst>
@@ -24828,17 +24954,19 @@
         </p:sp>
         <p:sp useBgFill="1">
           <p:nvSpPr>
-            <p:cNvPr id="20" name="Oval 19">
+            <p:cNvPr id="41" name="Oval 40">
               <a:extLst>
                 <a:ext uri="{FF2B5EF4-FFF2-40B4-BE49-F238E27FC236}">
-                  <a16:creationId xmlns:a16="http://schemas.microsoft.com/office/drawing/2014/main" id="{BE002FF5-FB7B-485D-92F6-614DFA6AB97C}"/>
+                  <a16:creationId xmlns:a16="http://schemas.microsoft.com/office/drawing/2014/main" id="{AEC4BAA7-1F27-4F25-9D16-9099BF9AC7E8}"/>
                 </a:ext>
                 <a:ext uri="{C183D7F6-B498-43B3-948B-1728B52AA6E4}">
                   <adec:decorative xmlns:adec="http://schemas.microsoft.com/office/drawing/2017/decorative" val="1"/>
                 </a:ext>
               </a:extLst>
             </p:cNvPr>
-            <p:cNvSpPr/>
+            <p:cNvSpPr>
+              <a:spLocks noChangeAspect="1"/>
+            </p:cNvSpPr>
             <p:nvPr>
               <p:extLst>
                 <p:ext uri="{386F3935-93C4-4BCD-93E2-E3B085C9AB24}">
@@ -24849,24 +24977,26 @@
           </p:nvSpPr>
           <p:spPr>
             <a:xfrm rot="10800000">
-              <a:off x="11733034" y="5367357"/>
-              <a:ext cx="261660" cy="261660"/>
+              <a:off x="2017290" y="592943"/>
+              <a:ext cx="210312" cy="210312"/>
             </a:xfrm>
             <a:prstGeom prst="ellipse">
               <a:avLst/>
             </a:prstGeom>
-            <a:solidFill>
-              <a:schemeClr val="accent2"/>
-            </a:solidFill>
             <a:ln w="3848" cap="flat">
               <a:noFill/>
               <a:prstDash val="solid"/>
               <a:miter/>
             </a:ln>
             <a:effectLst>
+              <a:glow rad="152400">
+                <a:srgbClr val="000000">
+                  <a:alpha val="4000"/>
+                </a:srgbClr>
+              </a:glow>
               <a:outerShdw blurRad="101600" dist="38100" dir="16200000" rotWithShape="0">
                 <a:srgbClr val="000000">
-                  <a:alpha val="25000"/>
+                  <a:alpha val="5000"/>
                 </a:srgbClr>
               </a:outerShdw>
             </a:effectLst>
@@ -24876,59 +25006,6 @@
             <a:lstStyle/>
             <a:p>
               <a:endParaRPr lang="en-US"/>
-            </a:p>
-          </p:txBody>
-        </p:sp>
-        <p:sp>
-          <p:nvSpPr>
-            <p:cNvPr id="21" name="Oval 20">
-              <a:extLst>
-                <a:ext uri="{FF2B5EF4-FFF2-40B4-BE49-F238E27FC236}">
-                  <a16:creationId xmlns:a16="http://schemas.microsoft.com/office/drawing/2014/main" id="{693CEC0F-CBF3-43A6-A64F-610542946D47}"/>
-                </a:ext>
-                <a:ext uri="{C183D7F6-B498-43B3-948B-1728B52AA6E4}">
-                  <adec:decorative xmlns:adec="http://schemas.microsoft.com/office/drawing/2017/decorative" val="1"/>
-                </a:ext>
-              </a:extLst>
-            </p:cNvPr>
-            <p:cNvSpPr/>
-            <p:nvPr>
-              <p:extLst>
-                <p:ext uri="{386F3935-93C4-4BCD-93E2-E3B085C9AB24}">
-                  <p16:designElem xmlns:p16="http://schemas.microsoft.com/office/powerpoint/2015/main" val="1"/>
-                </p:ext>
-              </p:extLst>
-            </p:nvPr>
-          </p:nvSpPr>
-          <p:spPr>
-            <a:xfrm rot="10800000">
-              <a:off x="246085" y="5215745"/>
-              <a:ext cx="418430" cy="418430"/>
-            </a:xfrm>
-            <a:prstGeom prst="ellipse">
-              <a:avLst/>
-            </a:prstGeom>
-            <a:solidFill>
-              <a:schemeClr val="accent2"/>
-            </a:solidFill>
-            <a:ln w="3848" cap="flat">
-              <a:noFill/>
-              <a:prstDash val="solid"/>
-              <a:miter/>
-            </a:ln>
-            <a:effectLst>
-              <a:outerShdw blurRad="101600" dist="38100" dir="16200000" rotWithShape="0">
-                <a:srgbClr val="000000">
-                  <a:alpha val="25000"/>
-                </a:srgbClr>
-              </a:outerShdw>
-            </a:effectLst>
-          </p:spPr>
-          <p:txBody>
-            <a:bodyPr rtlCol="0" anchor="ctr"/>
-            <a:lstStyle/>
-            <a:p>
-              <a:endParaRPr lang="en-US" dirty="0"/>
             </a:p>
           </p:txBody>
         </p:sp>
@@ -24951,74 +25028,134 @@
         </p:nvSpPr>
         <p:spPr>
           <a:xfrm>
-            <a:off x="822352" y="566126"/>
-            <a:ext cx="10531448" cy="2210521"/>
+            <a:off x="500012" y="2454188"/>
+            <a:ext cx="2194305" cy="2364765"/>
           </a:xfrm>
         </p:spPr>
         <p:txBody>
-          <a:bodyPr anchor="b">
+          <a:bodyPr vert="horz" lIns="91440" tIns="45720" rIns="91440" bIns="45720" rtlCol="0" anchor="b">
             <a:normAutofit/>
           </a:bodyPr>
           <a:lstStyle/>
           <a:p>
-            <a:pPr algn="ctr"/>
             <a:r>
-              <a:rPr lang="pl-PL" dirty="0">
+              <a:rPr lang="en-US" sz="5400" kern="1200">
                 <a:solidFill>
-                  <a:srgbClr val="FFFFFF"/>
+                  <a:schemeClr val="tx1"/>
                 </a:solidFill>
+                <a:latin typeface="+mj-lt"/>
+                <a:ea typeface="+mj-ea"/>
+                <a:cs typeface="+mj-cs"/>
               </a:rPr>
               <a:t>Testy</a:t>
             </a:r>
             <a:br>
-              <a:rPr lang="pl-PL" dirty="0">
+              <a:rPr lang="en-US" sz="5400" kern="1200">
                 <a:solidFill>
-                  <a:srgbClr val="FFFFFF"/>
+                  <a:schemeClr val="tx1"/>
                 </a:solidFill>
+                <a:latin typeface="+mj-lt"/>
+                <a:ea typeface="+mj-ea"/>
+                <a:cs typeface="+mj-cs"/>
               </a:rPr>
             </a:br>
-            <a:endParaRPr lang="pl-PL" dirty="0">
+            <a:endParaRPr lang="en-US" sz="5400" kern="1200">
               <a:solidFill>
-                <a:srgbClr val="FFFFFF"/>
+                <a:schemeClr val="tx1"/>
               </a:solidFill>
+              <a:latin typeface="+mj-lt"/>
+              <a:ea typeface="+mj-ea"/>
+              <a:cs typeface="+mj-cs"/>
             </a:endParaRPr>
           </a:p>
         </p:txBody>
       </p:sp>
-      <p:sp>
-        <p:nvSpPr>
-          <p:cNvPr id="3" name="Symbol zastępczy zawartości 2">
+      <p:pic>
+        <p:nvPicPr>
+          <p:cNvPr id="4" name="Content Placeholder 3" descr="A graph with numbers and lines&#10;&#10;Description automatically generated">
             <a:extLst>
               <a:ext uri="{FF2B5EF4-FFF2-40B4-BE49-F238E27FC236}">
-                <a16:creationId xmlns:a16="http://schemas.microsoft.com/office/drawing/2014/main" id="{109148DD-81A4-C7B7-A65E-6A9E3017FC29}"/>
+                <a16:creationId xmlns:a16="http://schemas.microsoft.com/office/drawing/2014/main" id="{2355D1C6-8E66-54A8-713A-C7CC4351FBA8}"/>
+              </a:ext>
+            </a:extLst>
+          </p:cNvPr>
+          <p:cNvPicPr>
+            <a:picLocks noGrp="1" noChangeAspect="1"/>
+          </p:cNvPicPr>
+          <p:nvPr>
+            <p:ph idx="1"/>
+          </p:nvPr>
+        </p:nvPicPr>
+        <p:blipFill>
+          <a:blip r:embed="rId2"/>
+          <a:stretch>
+            <a:fillRect/>
+          </a:stretch>
+        </p:blipFill>
+        <p:spPr>
+          <a:xfrm>
+            <a:off x="3055189" y="536394"/>
+            <a:ext cx="8601373" cy="5899124"/>
+          </a:xfrm>
+          <a:prstGeom prst="rect">
+            <a:avLst/>
+          </a:prstGeom>
+        </p:spPr>
+      </p:pic>
+      <p:sp useBgFill="1">
+        <p:nvSpPr>
+          <p:cNvPr id="54" name="Oval 53">
+            <a:extLst>
+              <a:ext uri="{FF2B5EF4-FFF2-40B4-BE49-F238E27FC236}">
+                <a16:creationId xmlns:a16="http://schemas.microsoft.com/office/drawing/2014/main" id="{8333FD0A-502E-4A24-8E99-5496F09DC714}"/>
+              </a:ext>
+              <a:ext uri="{C183D7F6-B498-43B3-948B-1728B52AA6E4}">
+                <adec:decorative xmlns:adec="http://schemas.microsoft.com/office/drawing/2017/decorative" val="1"/>
               </a:ext>
             </a:extLst>
           </p:cNvPr>
           <p:cNvSpPr>
-            <a:spLocks noGrp="1"/>
+            <a:spLocks noGrp="1" noRot="1" noChangeAspect="1" noMove="1" noResize="1" noEditPoints="1" noAdjustHandles="1" noChangeArrowheads="1" noChangeShapeType="1" noTextEdit="1"/>
           </p:cNvSpPr>
           <p:nvPr>
-            <p:ph idx="1"/>
+            <p:extLst>
+              <p:ext uri="{386F3935-93C4-4BCD-93E2-E3B085C9AB24}">
+                <p16:designElem xmlns:p16="http://schemas.microsoft.com/office/powerpoint/2015/main" val="1"/>
+              </p:ext>
+            </p:extLst>
           </p:nvPr>
         </p:nvSpPr>
         <p:spPr>
-          <a:xfrm>
-            <a:off x="1992663" y="2948363"/>
-            <a:ext cx="8188032" cy="3176250"/>
+          <a:xfrm rot="10800000">
+            <a:off x="11470962" y="5630260"/>
+            <a:ext cx="355414" cy="355414"/>
           </a:xfrm>
+          <a:prstGeom prst="ellipse">
+            <a:avLst/>
+          </a:prstGeom>
+          <a:ln w="3848" cap="flat">
+            <a:noFill/>
+            <a:prstDash val="solid"/>
+            <a:miter/>
+          </a:ln>
+          <a:effectLst>
+            <a:glow rad="152400">
+              <a:srgbClr val="000000">
+                <a:alpha val="4000"/>
+              </a:srgbClr>
+            </a:glow>
+            <a:outerShdw blurRad="101600" dist="38100" dir="16200000" rotWithShape="0">
+              <a:srgbClr val="000000">
+                <a:alpha val="5000"/>
+              </a:srgbClr>
+            </a:outerShdw>
+          </a:effectLst>
         </p:spPr>
         <p:txBody>
-          <a:bodyPr anchor="t">
-            <a:normAutofit/>
-          </a:bodyPr>
+          <a:bodyPr rtlCol="0" anchor="ctr"/>
           <a:lstStyle/>
           <a:p>
-            <a:pPr algn="ctr"/>
-            <a:endParaRPr lang="pl-PL" sz="1800" dirty="0">
-              <a:solidFill>
-                <a:srgbClr val="FFFFFF"/>
-              </a:solidFill>
-            </a:endParaRPr>
+            <a:endParaRPr lang="en-US"/>
           </a:p>
         </p:txBody>
       </p:sp>
@@ -25305,7 +25442,7 @@
             <a:bodyPr rtlCol="0" anchor="ctr"/>
             <a:lstStyle/>
             <a:p>
-              <a:endParaRPr lang="en-US" dirty="0"/>
+              <a:endParaRPr lang="en-US"/>
             </a:p>
           </p:txBody>
         </p:sp>
@@ -25523,7 +25660,7 @@
             <a:bodyPr rtlCol="0" anchor="ctr"/>
             <a:lstStyle/>
             <a:p>
-              <a:endParaRPr lang="en-US" dirty="0"/>
+              <a:endParaRPr lang="en-US"/>
             </a:p>
           </p:txBody>
         </p:sp>
@@ -25741,7 +25878,7 @@
             <a:bodyPr rtlCol="0" anchor="ctr"/>
             <a:lstStyle/>
             <a:p>
-              <a:endParaRPr lang="en-US" dirty="0"/>
+              <a:endParaRPr lang="en-US"/>
             </a:p>
           </p:txBody>
         </p:sp>
@@ -25906,7 +26043,7 @@
             <a:bodyPr rtlCol="0" anchor="ctr"/>
             <a:lstStyle/>
             <a:p>
-              <a:endParaRPr lang="en-US" dirty="0"/>
+              <a:endParaRPr lang="en-US"/>
             </a:p>
           </p:txBody>
         </p:sp>
@@ -25953,7 +26090,7 @@
           <a:bodyPr rtlCol="0" anchor="ctr"/>
           <a:lstStyle/>
           <a:p>
-            <a:endParaRPr lang="en-US" dirty="0">
+            <a:endParaRPr lang="en-US">
               <a:solidFill>
                 <a:schemeClr val="tx1"/>
               </a:solidFill>
@@ -26235,7 +26372,7 @@
             <a:bodyPr rtlCol="0" anchor="ctr"/>
             <a:lstStyle/>
             <a:p>
-              <a:endParaRPr lang="en-US" dirty="0"/>
+              <a:endParaRPr lang="en-US"/>
             </a:p>
           </p:txBody>
         </p:sp>
@@ -26290,7 +26427,7 @@
             <a:bodyPr rtlCol="0" anchor="ctr"/>
             <a:lstStyle/>
             <a:p>
-              <a:endParaRPr lang="en-US" dirty="0"/>
+              <a:endParaRPr lang="en-US"/>
             </a:p>
           </p:txBody>
         </p:sp>
@@ -26400,7 +26537,7 @@
             <a:bodyPr rtlCol="0" anchor="ctr"/>
             <a:lstStyle/>
             <a:p>
-              <a:endParaRPr lang="en-US" dirty="0"/>
+              <a:endParaRPr lang="en-US"/>
             </a:p>
           </p:txBody>
         </p:sp>
@@ -26452,7 +26589,7 @@
           <a:bodyPr rtlCol="0" anchor="ctr"/>
           <a:lstStyle/>
           <a:p>
-            <a:endParaRPr lang="en-US" dirty="0">
+            <a:endParaRPr lang="en-US">
               <a:solidFill>
                 <a:schemeClr val="tx1"/>
               </a:solidFill>
@@ -26490,7 +26627,7 @@
           <a:p>
             <a:pPr algn="ctr"/>
             <a:r>
-              <a:rPr lang="en-US" sz="6000" kern="1200" dirty="0" err="1">
+              <a:rPr lang="en-US" sz="6000" kern="1200" err="1">
                 <a:solidFill>
                   <a:srgbClr val="FFFFFF"/>
                 </a:solidFill>
@@ -26501,7 +26638,7 @@
               <a:t>Dziękujemy</a:t>
             </a:r>
             <a:r>
-              <a:rPr lang="en-US" sz="6000" kern="1200" dirty="0">
+              <a:rPr lang="en-US" sz="6000" kern="1200">
                 <a:solidFill>
                   <a:srgbClr val="FFFFFF"/>
                 </a:solidFill>
@@ -26512,7 +26649,7 @@
               <a:t> za </a:t>
             </a:r>
             <a:r>
-              <a:rPr lang="en-US" sz="6000" kern="1200" dirty="0" err="1">
+              <a:rPr lang="en-US" sz="6000" kern="1200" err="1">
                 <a:solidFill>
                   <a:srgbClr val="FFFFFF"/>
                 </a:solidFill>
@@ -26523,7 +26660,7 @@
               <a:t>uwagę</a:t>
             </a:r>
             <a:r>
-              <a:rPr lang="en-US" sz="6000" kern="1200" dirty="0">
+              <a:rPr lang="en-US" sz="6000" kern="1200">
                 <a:solidFill>
                   <a:srgbClr val="FFFFFF"/>
                 </a:solidFill>
@@ -26565,7 +26702,7 @@
           <a:lstStyle/>
           <a:p>
             <a:r>
-              <a:rPr lang="pl-PL" dirty="0">
+              <a:rPr lang="pl-PL">
                 <a:solidFill>
                   <a:schemeClr val="bg1"/>
                 </a:solidFill>
@@ -26575,7 +26712,7 @@
           </a:p>
           <a:p>
             <a:r>
-              <a:rPr lang="pl-PL" dirty="0">
+              <a:rPr lang="pl-PL">
                 <a:solidFill>
                   <a:schemeClr val="bg1"/>
                 </a:solidFill>
@@ -26583,14 +26720,14 @@
               <a:t>Robert </a:t>
             </a:r>
             <a:r>
-              <a:rPr lang="pl-PL" dirty="0" err="1">
+              <a:rPr lang="pl-PL" err="1">
                 <a:solidFill>
                   <a:schemeClr val="bg1"/>
                 </a:solidFill>
               </a:rPr>
               <a:t>Mesek</a:t>
             </a:r>
-            <a:endParaRPr lang="pl-PL" dirty="0">
+            <a:endParaRPr lang="pl-PL">
               <a:solidFill>
                 <a:schemeClr val="bg1"/>
               </a:solidFill>
@@ -26598,7 +26735,7 @@
           </a:p>
           <a:p>
             <a:r>
-              <a:rPr lang="pl-PL" dirty="0">
+              <a:rPr lang="pl-PL">
                 <a:solidFill>
                   <a:schemeClr val="bg1"/>
                 </a:solidFill>
@@ -26622,8 +26759,8 @@
         </p:nvSpPr>
         <p:spPr>
           <a:xfrm>
-            <a:off x="404982" y="4942466"/>
-            <a:ext cx="4607079" cy="1107996"/>
+            <a:off x="386546" y="5120676"/>
+            <a:ext cx="6100353" cy="1446550"/>
           </a:xfrm>
           <a:prstGeom prst="rect">
             <a:avLst/>
@@ -26631,7 +26768,7 @@
           <a:noFill/>
         </p:spPr>
         <p:txBody>
-          <a:bodyPr wrap="square" rtlCol="0">
+          <a:bodyPr wrap="square" lIns="91440" tIns="45720" rIns="91440" bIns="45720" rtlCol="0" anchor="t">
             <a:spAutoFit/>
           </a:bodyPr>
           <a:lstStyle/>
@@ -26682,9 +26819,115 @@
                 <a:solidFill>
                   <a:schemeClr val="bg1"/>
                 </a:solidFill>
+                <a:latin typeface="Open sans"/>
+                <a:ea typeface="Open sans"/>
+                <a:cs typeface="Open sans"/>
+              </a:rPr>
+              <a:t>"Geometria obliczeniowa. Algorytmy i zastosowania"</a:t>
+            </a:r>
+            <a:br>
+              <a:rPr lang="pl-PL" sz="1100" dirty="0">
+                <a:solidFill>
+                  <a:schemeClr val="bg1"/>
+                </a:solidFill>
+                <a:latin typeface="Open sans"/>
+                <a:ea typeface="Open sans"/>
+                <a:cs typeface="Open sans"/>
+              </a:rPr>
+            </a:br>
+            <a:r>
+              <a:rPr lang="pl-PL" sz="1100" dirty="0">
+                <a:solidFill>
+                  <a:schemeClr val="bg1"/>
+                </a:solidFill>
+                <a:latin typeface="Open sans"/>
+                <a:ea typeface="Open sans"/>
+                <a:cs typeface="Open sans"/>
+              </a:rPr>
+              <a:t>M. Berg M. </a:t>
+            </a:r>
+            <a:r>
+              <a:rPr lang="pl-PL" sz="1100" dirty="0" err="1">
+                <a:solidFill>
+                  <a:schemeClr val="bg1"/>
+                </a:solidFill>
+                <a:latin typeface="Open sans"/>
+                <a:ea typeface="Open sans"/>
+                <a:cs typeface="Open sans"/>
+              </a:rPr>
+              <a:t>Kreveld</a:t>
+            </a:r>
+            <a:r>
+              <a:rPr lang="pl-PL" sz="1100" dirty="0">
+                <a:solidFill>
+                  <a:schemeClr val="bg1"/>
+                </a:solidFill>
+                <a:latin typeface="Open sans"/>
+                <a:ea typeface="Open sans"/>
+                <a:cs typeface="Open sans"/>
+              </a:rPr>
+              <a:t> M. </a:t>
+            </a:r>
+            <a:r>
+              <a:rPr lang="pl-PL" sz="1100" dirty="0" err="1">
+                <a:solidFill>
+                  <a:schemeClr val="bg1"/>
+                </a:solidFill>
+                <a:latin typeface="Open sans"/>
+                <a:ea typeface="Open sans"/>
+                <a:cs typeface="Open sans"/>
+              </a:rPr>
+              <a:t>Overmars</a:t>
+            </a:r>
+            <a:r>
+              <a:rPr lang="pl-PL" sz="1100" dirty="0">
+                <a:solidFill>
+                  <a:schemeClr val="bg1"/>
+                </a:solidFill>
+                <a:latin typeface="Open sans"/>
+                <a:ea typeface="Open sans"/>
+                <a:cs typeface="Open sans"/>
+              </a:rPr>
+              <a:t> | WNT Warszawa 2007 | </a:t>
+            </a:r>
+            <a:r>
+              <a:rPr lang="pl-PL" sz="1100" dirty="0">
+                <a:solidFill>
+                  <a:schemeClr val="bg1"/>
+                </a:solidFill>
+                <a:ea typeface="+mn-lt"/>
+                <a:cs typeface="+mn-lt"/>
+              </a:rPr>
+              <a:t>ISBN: 9788320432442</a:t>
+            </a:r>
+            <a:endParaRPr lang="pl-PL" dirty="0">
+              <a:solidFill>
+                <a:schemeClr val="bg1"/>
+              </a:solidFill>
+              <a:ea typeface="Open sans"/>
+              <a:cs typeface="Open sans"/>
+            </a:endParaRPr>
+          </a:p>
+          <a:p>
+            <a:pPr marL="285750" indent="-285750">
+              <a:buFont typeface="Arial" panose="020B0604020202020204" pitchFamily="34" charset="0"/>
+              <a:buChar char="•"/>
+            </a:pPr>
+            <a:r>
+              <a:rPr lang="pl-PL" sz="1100" dirty="0">
+                <a:solidFill>
+                  <a:schemeClr val="bg1"/>
+                </a:solidFill>
               </a:rPr>
               <a:t>Wikipedia</a:t>
             </a:r>
+            <a:endParaRPr lang="pl-PL" sz="1100" dirty="0">
+              <a:solidFill>
+                <a:schemeClr val="bg1"/>
+              </a:solidFill>
+              <a:ea typeface="Open sans"/>
+              <a:cs typeface="Open sans"/>
+            </a:endParaRPr>
           </a:p>
           <a:p>
             <a:pPr marL="285750" indent="-285750">
@@ -26704,22 +26947,7 @@
                   </a:extLst>
                 </a:hlinkClick>
               </a:rPr>
-              <a:t>Half-Edge Data </a:t>
-            </a:r>
-            <a:r>
-              <a:rPr lang="pl-PL" sz="1100" dirty="0" err="1">
-                <a:solidFill>
-                  <a:schemeClr val="bg1"/>
-                </a:solidFill>
-                <a:hlinkClick r:id="rId3">
-                  <a:extLst>
-                    <a:ext uri="{A12FA001-AC4F-418D-AE19-62706E023703}">
-                      <ahyp:hlinkClr xmlns:ahyp="http://schemas.microsoft.com/office/drawing/2018/hyperlinkcolor" val="tx"/>
-                    </a:ext>
-                  </a:extLst>
-                </a:hlinkClick>
-              </a:rPr>
-              <a:t>Structure</a:t>
+              <a:t>Half-Edge Data Structure</a:t>
             </a:r>
             <a:endParaRPr lang="pl-PL" sz="1100" dirty="0">
               <a:solidFill>
@@ -26758,7 +26986,7 @@
               <a:buFont typeface="Arial" panose="020B0604020202020204" pitchFamily="34" charset="0"/>
               <a:buChar char="•"/>
             </a:pPr>
-            <a:endParaRPr lang="pl-PL" sz="1100" dirty="0">
+            <a:endParaRPr lang="pl-PL" sz="1100">
               <a:solidFill>
                 <a:schemeClr val="bg1"/>
               </a:solidFill>
@@ -26825,7 +27053,7 @@
           <a:lstStyle/>
           <a:p>
             <a:r>
-              <a:rPr lang="pl-PL" sz="3600" dirty="0">
+              <a:rPr lang="pl-PL" sz="3600">
                 <a:ea typeface="+mj-lt"/>
                 <a:cs typeface="+mj-lt"/>
               </a:rPr>
@@ -26867,36 +27095,36 @@
           <a:lstStyle/>
           <a:p>
             <a:r>
-              <a:rPr lang="pl-PL" dirty="0">
+              <a:rPr lang="pl-PL">
                 <a:ea typeface="+mn-lt"/>
                 <a:cs typeface="+mn-lt"/>
               </a:rPr>
               <a:t>1. Klasyfikacja wierzchołków danego wielokąta.</a:t>
             </a:r>
-            <a:endParaRPr lang="en-US" dirty="0">
+            <a:endParaRPr lang="en-US">
               <a:ea typeface="+mn-lt"/>
               <a:cs typeface="+mn-lt"/>
             </a:endParaRPr>
           </a:p>
           <a:p>
             <a:r>
-              <a:rPr lang="pl-PL" dirty="0">
+              <a:rPr lang="pl-PL">
                 <a:ea typeface="+mn-lt"/>
                 <a:cs typeface="+mn-lt"/>
               </a:rPr>
               <a:t>2. Podział wielokąta na wielokąty monotoniczne.</a:t>
             </a:r>
-            <a:endParaRPr lang="pl-PL" dirty="0"/>
+            <a:endParaRPr lang="pl-PL"/>
           </a:p>
           <a:p>
             <a:r>
-              <a:rPr lang="pl-PL" dirty="0">
+              <a:rPr lang="pl-PL">
                 <a:ea typeface="+mn-lt"/>
                 <a:cs typeface="+mn-lt"/>
               </a:rPr>
               <a:t>3. Triangulacja wielokątów monotonicznych.</a:t>
             </a:r>
-            <a:endParaRPr lang="pl-PL" dirty="0"/>
+            <a:endParaRPr lang="pl-PL"/>
           </a:p>
         </p:txBody>
       </p:sp>
@@ -27183,7 +27411,7 @@
             <a:bodyPr rtlCol="0" anchor="ctr"/>
             <a:lstStyle/>
             <a:p>
-              <a:endParaRPr lang="en-US" dirty="0"/>
+              <a:endParaRPr lang="en-US"/>
             </a:p>
           </p:txBody>
         </p:sp>
@@ -27401,7 +27629,7 @@
             <a:bodyPr rtlCol="0" anchor="ctr"/>
             <a:lstStyle/>
             <a:p>
-              <a:endParaRPr lang="en-US" dirty="0"/>
+              <a:endParaRPr lang="en-US"/>
             </a:p>
           </p:txBody>
         </p:sp>
@@ -27619,7 +27847,7 @@
             <a:bodyPr rtlCol="0" anchor="ctr"/>
             <a:lstStyle/>
             <a:p>
-              <a:endParaRPr lang="en-US" dirty="0"/>
+              <a:endParaRPr lang="en-US"/>
             </a:p>
           </p:txBody>
         </p:sp>
@@ -27784,7 +28012,7 @@
             <a:bodyPr rtlCol="0" anchor="ctr"/>
             <a:lstStyle/>
             <a:p>
-              <a:endParaRPr lang="en-US" dirty="0"/>
+              <a:endParaRPr lang="en-US"/>
             </a:p>
           </p:txBody>
         </p:sp>
@@ -27831,7 +28059,7 @@
           <a:bodyPr rtlCol="0" anchor="ctr"/>
           <a:lstStyle/>
           <a:p>
-            <a:endParaRPr lang="en-US" dirty="0">
+            <a:endParaRPr lang="en-US">
               <a:solidFill>
                 <a:schemeClr val="tx1"/>
               </a:solidFill>
@@ -27886,7 +28114,7 @@
           <a:bodyPr rtlCol="0" anchor="ctr"/>
           <a:lstStyle/>
           <a:p>
-            <a:endParaRPr lang="en-US" dirty="0">
+            <a:endParaRPr lang="en-US">
               <a:solidFill>
                 <a:schemeClr val="tx1"/>
               </a:solidFill>
@@ -28194,7 +28422,7 @@
             <a:bodyPr rtlCol="0" anchor="ctr"/>
             <a:lstStyle/>
             <a:p>
-              <a:endParaRPr lang="en-US" dirty="0"/>
+              <a:endParaRPr lang="en-US"/>
             </a:p>
           </p:txBody>
         </p:sp>
@@ -28285,7 +28513,7 @@
           <a:lstStyle/>
           <a:p>
             <a:r>
-              <a:rPr lang="pl-PL" sz="4200" kern="1200" dirty="0">
+              <a:rPr lang="pl-PL" sz="4200" kern="1200">
                 <a:latin typeface="+mj-lt"/>
                 <a:ea typeface="+mj-ea"/>
                 <a:cs typeface="+mj-cs"/>
@@ -28293,17 +28521,17 @@
               <a:t>Wielokąt na którym przedstawimy</a:t>
             </a:r>
             <a:r>
-              <a:rPr lang="pl-PL" sz="4200" dirty="0"/>
+              <a:rPr lang="pl-PL" sz="4200"/>
               <a:t> </a:t>
             </a:r>
             <a:br>
-              <a:rPr lang="pl-PL" sz="4200" dirty="0"/>
+              <a:rPr lang="pl-PL" sz="4200"/>
             </a:br>
             <a:r>
-              <a:rPr lang="pl-PL" sz="4200" dirty="0"/>
+              <a:rPr lang="pl-PL" sz="4200"/>
               <a:t>działanie</a:t>
             </a:r>
-            <a:endParaRPr lang="pl-PL" sz="4200" kern="1200" dirty="0">
+            <a:endParaRPr lang="pl-PL" sz="4200" kern="1200">
               <a:latin typeface="+mj-lt"/>
               <a:ea typeface="Open sans"/>
               <a:cs typeface="Open sans"/>
@@ -28480,7 +28708,7 @@
           <a:bodyPr rtlCol="0" anchor="ctr"/>
           <a:lstStyle/>
           <a:p>
-            <a:endParaRPr lang="en-US" dirty="0">
+            <a:endParaRPr lang="en-US">
               <a:solidFill>
                 <a:schemeClr val="tx1"/>
               </a:solidFill>
@@ -28535,7 +28763,7 @@
           <a:bodyPr rtlCol="0" anchor="ctr"/>
           <a:lstStyle/>
           <a:p>
-            <a:endParaRPr lang="en-US" dirty="0">
+            <a:endParaRPr lang="en-US">
               <a:solidFill>
                 <a:schemeClr val="tx1"/>
               </a:solidFill>
@@ -28788,7 +29016,7 @@
             <a:bodyPr rtlCol="0" anchor="ctr"/>
             <a:lstStyle/>
             <a:p>
-              <a:endParaRPr lang="en-US" dirty="0"/>
+              <a:endParaRPr lang="en-US"/>
             </a:p>
           </p:txBody>
         </p:sp>
@@ -28932,7 +29160,7 @@
           <a:lstStyle/>
           <a:p>
             <a:r>
-              <a:rPr lang="pl-PL" dirty="0">
+              <a:rPr lang="pl-PL">
                 <a:ea typeface="Open sans"/>
                 <a:cs typeface="Open sans"/>
               </a:rPr>
@@ -28970,65 +29198,65 @@
           <a:lstStyle/>
           <a:p>
             <a:r>
-              <a:rPr lang="pl-PL" sz="2400" dirty="0">
+              <a:rPr lang="pl-PL" sz="2400">
                 <a:ea typeface="+mn-lt"/>
                 <a:cs typeface="+mn-lt"/>
               </a:rPr>
               <a:t>    Początkowy - kolor zielony</a:t>
             </a:r>
-            <a:endParaRPr lang="pl-PL" sz="2400" dirty="0">
+            <a:endParaRPr lang="pl-PL" sz="2400">
               <a:ea typeface="Open sans"/>
               <a:cs typeface="Open sans"/>
             </a:endParaRPr>
           </a:p>
           <a:p>
             <a:r>
-              <a:rPr lang="pl-PL" sz="2400" dirty="0">
+              <a:rPr lang="pl-PL" sz="2400">
                 <a:ea typeface="+mn-lt"/>
                 <a:cs typeface="+mn-lt"/>
               </a:rPr>
               <a:t>    Końcowy - kolor czerwony</a:t>
             </a:r>
-            <a:endParaRPr lang="pl-PL" sz="2400" dirty="0">
+            <a:endParaRPr lang="pl-PL" sz="2400">
               <a:ea typeface="Open sans"/>
               <a:cs typeface="Open sans"/>
             </a:endParaRPr>
           </a:p>
           <a:p>
             <a:r>
-              <a:rPr lang="pl-PL" sz="2400" dirty="0">
+              <a:rPr lang="pl-PL" sz="2400">
                 <a:ea typeface="+mn-lt"/>
                 <a:cs typeface="+mn-lt"/>
               </a:rPr>
               <a:t>    Łączący - kolor niebieski</a:t>
             </a:r>
-            <a:endParaRPr lang="pl-PL" sz="2400" dirty="0">
+            <a:endParaRPr lang="pl-PL" sz="2400">
               <a:ea typeface="Open sans"/>
               <a:cs typeface="Open sans"/>
             </a:endParaRPr>
           </a:p>
           <a:p>
             <a:r>
-              <a:rPr lang="pl-PL" sz="2400" dirty="0">
+              <a:rPr lang="pl-PL" sz="2400">
                 <a:ea typeface="+mn-lt"/>
                 <a:cs typeface="+mn-lt"/>
               </a:rPr>
               <a:t>    Dzielący - kolor cyjan</a:t>
             </a:r>
-            <a:endParaRPr lang="pl-PL" sz="2400" dirty="0">
+            <a:endParaRPr lang="pl-PL" sz="2400">
               <a:ea typeface="Open sans"/>
               <a:cs typeface="Open sans"/>
             </a:endParaRPr>
           </a:p>
           <a:p>
             <a:r>
-              <a:rPr lang="pl-PL" sz="2400" dirty="0">
+              <a:rPr lang="pl-PL" sz="2400">
                 <a:ea typeface="+mn-lt"/>
                 <a:cs typeface="+mn-lt"/>
               </a:rPr>
               <a:t>    Prawidłowy - kolor brązowy</a:t>
             </a:r>
-            <a:endParaRPr lang="pl-PL" sz="2400" dirty="0">
+            <a:endParaRPr lang="pl-PL" sz="2400">
               <a:ea typeface="Open sans"/>
               <a:cs typeface="Open sans"/>
             </a:endParaRPr>
@@ -29154,7 +29382,7 @@
           <a:lstStyle/>
           <a:p>
             <a:r>
-              <a:rPr lang="pl-PL" dirty="0">
+              <a:rPr lang="pl-PL">
                 <a:ea typeface="+mn-lt"/>
                 <a:cs typeface="+mn-lt"/>
               </a:rPr>
@@ -29162,7 +29390,7 @@
             </a:r>
           </a:p>
           <a:p>
-            <a:endParaRPr lang="pl-PL" dirty="0">
+            <a:endParaRPr lang="pl-PL">
               <a:ea typeface="+mn-lt"/>
               <a:cs typeface="+mn-lt"/>
             </a:endParaRPr>
@@ -29283,26 +29511,26 @@
             </a:endParaRPr>
           </a:p>
           <a:p>
-            <a:endParaRPr lang="pl-PL" dirty="0">
+            <a:endParaRPr lang="pl-PL">
               <a:ea typeface="+mn-lt"/>
               <a:cs typeface="+mn-lt"/>
             </a:endParaRPr>
           </a:p>
           <a:p>
             <a:r>
-              <a:rPr lang="pl-PL" dirty="0">
+              <a:rPr lang="pl-PL">
                 <a:ea typeface="+mn-lt"/>
                 <a:cs typeface="+mn-lt"/>
               </a:rPr>
               <a:t>Głównym celem jest wyeliminowanie wierzchołków łączących oraz dzielących. Wielokąt y-monotoniczny to takich, który właśnie nie posiada żadnych wierzchołków tego typu.</a:t>
             </a:r>
-            <a:endParaRPr lang="pl-PL" dirty="0">
+            <a:endParaRPr lang="pl-PL">
               <a:ea typeface="Open sans"/>
               <a:cs typeface="Open sans"/>
             </a:endParaRPr>
           </a:p>
           <a:p>
-            <a:endParaRPr lang="pl-PL" dirty="0">
+            <a:endParaRPr lang="pl-PL">
               <a:ea typeface="Open sans"/>
               <a:cs typeface="Open sans"/>
             </a:endParaRPr>
@@ -29361,27 +29589,27 @@
           <a:lstStyle/>
           <a:p>
             <a:r>
-              <a:rPr lang="en-US" dirty="0" err="1">
+              <a:rPr lang="en-US" err="1">
                 <a:ea typeface="Open sans"/>
                 <a:cs typeface="Open sans"/>
               </a:rPr>
               <a:t>Wierzchołek</a:t>
             </a:r>
             <a:r>
-              <a:rPr lang="en-US" dirty="0">
+              <a:rPr lang="en-US">
                 <a:ea typeface="Open sans"/>
                 <a:cs typeface="Open sans"/>
               </a:rPr>
               <a:t> </a:t>
             </a:r>
             <a:r>
-              <a:rPr lang="en-US" dirty="0" err="1">
+              <a:rPr lang="en-US" err="1">
                 <a:ea typeface="Open sans"/>
                 <a:cs typeface="Open sans"/>
               </a:rPr>
               <a:t>dzielący</a:t>
             </a:r>
-            <a:endParaRPr lang="en-US" dirty="0" err="1"/>
+            <a:endParaRPr lang="en-US" err="1"/>
           </a:p>
         </p:txBody>
       </p:sp>
@@ -29412,111 +29640,111 @@
               <a:buNone/>
             </a:pPr>
             <a:r>
-              <a:rPr lang="pl-PL" dirty="0">
+              <a:rPr lang="pl-PL">
                 <a:ea typeface="+mn-lt"/>
                 <a:cs typeface="+mn-lt"/>
               </a:rPr>
               <a:t>Będziemy starali się znaleźć wierzchołki znajdujące się w pobliżu rozpatrywanego aktualnie wierzchołka </a:t>
             </a:r>
             <a:r>
-              <a:rPr lang="pl-PL" dirty="0" err="1">
+              <a:rPr lang="pl-PL" err="1">
                 <a:ea typeface="+mn-lt"/>
                 <a:cs typeface="+mn-lt"/>
               </a:rPr>
               <a:t>v_i</a:t>
             </a:r>
             <a:r>
-              <a:rPr lang="pl-PL" dirty="0">
+              <a:rPr lang="pl-PL">
                 <a:ea typeface="+mn-lt"/>
                 <a:cs typeface="+mn-lt"/>
               </a:rPr>
               <a:t>. Aby szybko znajdywać taki wierzchołek dla </a:t>
             </a:r>
             <a:r>
-              <a:rPr lang="pl-PL" dirty="0" err="1">
+              <a:rPr lang="pl-PL" err="1">
                 <a:ea typeface="+mn-lt"/>
                 <a:cs typeface="+mn-lt"/>
               </a:rPr>
               <a:t>v_i</a:t>
             </a:r>
             <a:r>
-              <a:rPr lang="pl-PL" dirty="0">
+              <a:rPr lang="pl-PL">
                 <a:ea typeface="+mn-lt"/>
                 <a:cs typeface="+mn-lt"/>
               </a:rPr>
               <a:t> dzielącego zauważmy, że będzie on najniższym wierzchołkiem leżącym pomiędzy prostą </a:t>
             </a:r>
             <a:r>
-              <a:rPr lang="pl-PL" dirty="0" err="1">
+              <a:rPr lang="pl-PL" err="1">
                 <a:ea typeface="+mn-lt"/>
                 <a:cs typeface="+mn-lt"/>
               </a:rPr>
               <a:t>e_l</a:t>
             </a:r>
             <a:r>
-              <a:rPr lang="pl-PL" dirty="0">
+              <a:rPr lang="pl-PL">
                 <a:ea typeface="+mn-lt"/>
                 <a:cs typeface="+mn-lt"/>
               </a:rPr>
               <a:t> będącą bezpośrednio na lewo od </a:t>
             </a:r>
             <a:r>
-              <a:rPr lang="pl-PL" dirty="0" err="1">
+              <a:rPr lang="pl-PL" err="1">
                 <a:ea typeface="+mn-lt"/>
                 <a:cs typeface="+mn-lt"/>
               </a:rPr>
               <a:t>v_i</a:t>
             </a:r>
             <a:r>
-              <a:rPr lang="pl-PL" dirty="0">
+              <a:rPr lang="pl-PL">
                 <a:ea typeface="+mn-lt"/>
                 <a:cs typeface="+mn-lt"/>
               </a:rPr>
               <a:t> oraz $</a:t>
             </a:r>
             <a:r>
-              <a:rPr lang="pl-PL" dirty="0" err="1">
+              <a:rPr lang="pl-PL" err="1">
                 <a:ea typeface="+mn-lt"/>
                 <a:cs typeface="+mn-lt"/>
               </a:rPr>
               <a:t>e_p</a:t>
             </a:r>
             <a:r>
-              <a:rPr lang="pl-PL" dirty="0">
+              <a:rPr lang="pl-PL">
                 <a:ea typeface="+mn-lt"/>
                 <a:cs typeface="+mn-lt"/>
               </a:rPr>
               <a:t>$ będącą bezpośrednio po prawej stronie. Wierzchołek ten nazwiemy pomocnikiem(</a:t>
             </a:r>
             <a:r>
-              <a:rPr lang="pl-PL" dirty="0" err="1">
+              <a:rPr lang="pl-PL" err="1">
                 <a:ea typeface="+mn-lt"/>
                 <a:cs typeface="+mn-lt"/>
               </a:rPr>
               <a:t>v_i</a:t>
             </a:r>
             <a:r>
-              <a:rPr lang="pl-PL" dirty="0">
+              <a:rPr lang="pl-PL">
                 <a:ea typeface="+mn-lt"/>
                 <a:cs typeface="+mn-lt"/>
               </a:rPr>
               <a:t>), zauważmy, że może on być górnym końcem samej </a:t>
             </a:r>
             <a:r>
-              <a:rPr lang="pl-PL" dirty="0" err="1">
+              <a:rPr lang="pl-PL" err="1">
                 <a:ea typeface="+mn-lt"/>
                 <a:cs typeface="+mn-lt"/>
               </a:rPr>
               <a:t>e_l</a:t>
             </a:r>
             <a:r>
-              <a:rPr lang="pl-PL" dirty="0">
+              <a:rPr lang="pl-PL">
                 <a:ea typeface="+mn-lt"/>
                 <a:cs typeface="+mn-lt"/>
               </a:rPr>
               <a:t>.</a:t>
             </a:r>
-            <a:endParaRPr lang="pl-PL" dirty="0">
+            <a:endParaRPr lang="pl-PL">
               <a:ea typeface="Open sans"/>
               <a:cs typeface="Open sans"/>
             </a:endParaRPr>
